--- a/LinkedIn_Final_Presentation.pptx
+++ b/LinkedIn_Final_Presentation.pptx
@@ -4,6 +4,9 @@
   <p:sldMasterIdLst>
     <p:sldMasterId id="2147483648" r:id="rId1"/>
   </p:sldMasterIdLst>
+  <p:notesMasterIdLst>
+    <p:notesMasterId r:id="rId14"/>
+  </p:notesMasterIdLst>
   <p:sldIdLst>
     <p:sldId id="256" r:id="rId2"/>
     <p:sldId id="257" r:id="rId3"/>
@@ -18,10 +21,7 @@
     <p:sldId id="266" r:id="rId12"/>
     <p:sldId id="267" r:id="rId13"/>
   </p:sldIdLst>
-  <p:notesMasterIdLst>
-    <p:notesMasterId r:id="rId14"/>
-  </p:notesMasterIdLst>
-  <p:sldSz cx="9144000" cy="5143500"/>
+  <p:sldSz cx="9144000" cy="5143500" type="screen16x9"/>
   <p:notesSz cx="5143500" cy="9144000"/>
   <p:defaultTextStyle>
     <a:lvl1pPr marL="0" algn="l" defTabSz="914400" rtl="0" eaLnBrk="1" latinLnBrk="0" hangingPunct="1">
@@ -115,6 +115,11 @@
       </a:defRPr>
     </a:lvl9pPr>
   </p:defaultTextStyle>
+  <p:extLst>
+    <p:ext uri="{EFAFB233-063F-42B5-8137-9DF3F51BA10A}">
+      <p15:sldGuideLst xmlns:p15="http://schemas.microsoft.com/office/powerpoint/2012/main"/>
+    </p:ext>
+  </p:extLst>
 </p:presentation>
 </file>
 
@@ -140,234 +145,10 @@
           <a:chExt cx="0" cy="0"/>
         </a:xfrm>
       </p:grpSpPr>
-      <p:sp>
-        <p:nvSpPr>
-          <p:cNvPr id="2" name="Header Placeholder 1"/>
-          <p:cNvSpPr>
-            <a:spLocks noGrp="1"/>
-          </p:cNvSpPr>
-          <p:nvPr>
-            <p:ph type="hdr" sz="quarter"/>
-          </p:nvPr>
-        </p:nvSpPr>
-        <p:spPr>
-          <a:xfrm>
-            <a:off x="0" y="0"/>
-            <a:ext cx="2971800" cy="458788"/>
-          </a:xfrm>
-          <a:prstGeom prst="rect">
-            <a:avLst/>
-          </a:prstGeom>
-        </p:spPr>
-        <p:txBody>
-          <a:bodyPr vert="horz" lIns="91440" tIns="45720" rIns="91440" bIns="45720" rtlCol="0"/>
-          <a:lstStyle>
-            <a:lvl1pPr algn="l">
-              <a:defRPr sz="1200"/>
-            </a:lvl1pPr>
-          </a:lstStyle>
-          <a:p>
-            <a:endParaRPr lang="en-US"/>
-          </a:p>
-        </p:txBody>
-      </p:sp>
-      <p:sp>
-        <p:nvSpPr>
-          <p:cNvPr id="3" name="Date Placeholder 2"/>
-          <p:cNvSpPr>
-            <a:spLocks noGrp="1"/>
-          </p:cNvSpPr>
-          <p:nvPr>
-            <p:ph type="dt" idx="1"/>
-          </p:nvPr>
-        </p:nvSpPr>
-        <p:spPr>
-          <a:xfrm>
-            <a:off x="3884613" y="0"/>
-            <a:ext cx="2971800" cy="458788"/>
-          </a:xfrm>
-          <a:prstGeom prst="rect">
-            <a:avLst/>
-          </a:prstGeom>
-        </p:spPr>
-        <p:txBody>
-          <a:bodyPr vert="horz" lIns="91440" tIns="45720" rIns="91440" bIns="45720" rtlCol="0"/>
-          <a:lstStyle>
-            <a:lvl1pPr algn="r">
-              <a:defRPr sz="1200"/>
-            </a:lvl1pPr>
-          </a:lstStyle>
-          <a:p>
-            <a:fld id="{5282F153-3F37-0F45-9E97-73ACFA13230C}" type="datetimeFigureOut">
-              <a:rPr lang="en-US"/>
-              <a:t>7/23/19</a:t>
-            </a:fld>
-            <a:endParaRPr lang="en-US"/>
-          </a:p>
-        </p:txBody>
-      </p:sp>
-      <p:sp>
-        <p:nvSpPr>
-          <p:cNvPr id="4" name="Slide Image Placeholder 3"/>
-          <p:cNvSpPr>
-            <a:spLocks noGrp="1" noRot="1" noChangeAspect="1"/>
-          </p:cNvSpPr>
-          <p:nvPr>
-            <p:ph type="sldImg" idx="2"/>
-          </p:nvPr>
-        </p:nvSpPr>
-        <p:spPr>
-          <a:xfrm>
-            <a:off x="685800" y="1143000"/>
-            <a:ext cx="5486400" cy="3086100"/>
-          </a:xfrm>
-          <a:prstGeom prst="rect">
-            <a:avLst/>
-          </a:prstGeom>
-          <a:noFill/>
-          <a:ln w="12700">
-            <a:solidFill>
-              <a:prstClr val="black"/>
-            </a:solidFill>
-          </a:ln>
-        </p:spPr>
-        <p:txBody>
-          <a:bodyPr vert="horz" lIns="91440" tIns="45720" rIns="91440" bIns="45720" rtlCol="0" anchor="ctr"/>
-          <a:lstStyle/>
-          <a:p>
-            <a:endParaRPr lang="en-US"/>
-          </a:p>
-        </p:txBody>
-      </p:sp>
-      <p:sp>
-        <p:nvSpPr>
-          <p:cNvPr id="5" name="Notes Placeholder 4"/>
-          <p:cNvSpPr>
-            <a:spLocks noGrp="1"/>
-          </p:cNvSpPr>
-          <p:nvPr>
-            <p:ph type="body" sz="quarter" idx="3"/>
-          </p:nvPr>
-        </p:nvSpPr>
-        <p:spPr>
-          <a:xfrm>
-            <a:off x="685800" y="4400550"/>
-            <a:ext cx="5486400" cy="3600450"/>
-          </a:xfrm>
-          <a:prstGeom prst="rect">
-            <a:avLst/>
-          </a:prstGeom>
-        </p:spPr>
-        <p:txBody>
-          <a:bodyPr vert="horz" lIns="91440" tIns="45720" rIns="91440" bIns="45720" rtlCol="0"/>
-          <a:lstStyle/>
-          <a:p>
-            <a:pPr lvl="0"/>
-            <a:r>
-              <a:rPr lang="en-US"/>
-              <a:t>Click to edit Master text styles</a:t>
-            </a:r>
-          </a:p>
-          <a:p>
-            <a:pPr lvl="1"/>
-            <a:r>
-              <a:rPr lang="en-US"/>
-              <a:t>Second level</a:t>
-            </a:r>
-          </a:p>
-          <a:p>
-            <a:pPr lvl="2"/>
-            <a:r>
-              <a:rPr lang="en-US"/>
-              <a:t>Third level</a:t>
-            </a:r>
-          </a:p>
-          <a:p>
-            <a:pPr lvl="3"/>
-            <a:r>
-              <a:rPr lang="en-US"/>
-              <a:t>Fourth level</a:t>
-            </a:r>
-          </a:p>
-          <a:p>
-            <a:pPr lvl="4"/>
-            <a:r>
-              <a:rPr lang="en-US"/>
-              <a:t>Fifth level</a:t>
-            </a:r>
-          </a:p>
-        </p:txBody>
-      </p:sp>
-      <p:sp>
-        <p:nvSpPr>
-          <p:cNvPr id="6" name="Footer Placeholder 5"/>
-          <p:cNvSpPr>
-            <a:spLocks noGrp="1"/>
-          </p:cNvSpPr>
-          <p:nvPr>
-            <p:ph type="ftr" sz="quarter" idx="4"/>
-          </p:nvPr>
-        </p:nvSpPr>
-        <p:spPr>
-          <a:xfrm>
-            <a:off x="0" y="8685213"/>
-            <a:ext cx="2971800" cy="458787"/>
-          </a:xfrm>
-          <a:prstGeom prst="rect">
-            <a:avLst/>
-          </a:prstGeom>
-        </p:spPr>
-        <p:txBody>
-          <a:bodyPr vert="horz" lIns="91440" tIns="45720" rIns="91440" bIns="45720" rtlCol="0" anchor="b"/>
-          <a:lstStyle>
-            <a:lvl1pPr algn="l">
-              <a:defRPr sz="1200"/>
-            </a:lvl1pPr>
-          </a:lstStyle>
-          <a:p>
-            <a:endParaRPr lang="en-US"/>
-          </a:p>
-        </p:txBody>
-      </p:sp>
-      <p:sp>
-        <p:nvSpPr>
-          <p:cNvPr id="7" name="Slide Number Placeholder 6"/>
-          <p:cNvSpPr>
-            <a:spLocks noGrp="1"/>
-          </p:cNvSpPr>
-          <p:nvPr>
-            <p:ph type="sldNum" sz="quarter" idx="5"/>
-          </p:nvPr>
-        </p:nvSpPr>
-        <p:spPr>
-          <a:xfrm>
-            <a:off x="3884613" y="8685213"/>
-            <a:ext cx="2971800" cy="458787"/>
-          </a:xfrm>
-          <a:prstGeom prst="rect">
-            <a:avLst/>
-          </a:prstGeom>
-        </p:spPr>
-        <p:txBody>
-          <a:bodyPr vert="horz" lIns="91440" tIns="45720" rIns="91440" bIns="45720" rtlCol="0" anchor="b"/>
-          <a:lstStyle>
-            <a:lvl1pPr algn="r">
-              <a:defRPr sz="1200"/>
-            </a:lvl1pPr>
-          </a:lstStyle>
-          <a:p>
-            <a:fld id="{CE5E9CC1-C706-0F49-92D6-E571CC5EEA8F}" type="slidenum">
-              <a:rPr lang="en-US"/>
-              <a:t>‹#›</a:t>
-            </a:fld>
-            <a:endParaRPr lang="en-US"/>
-          </a:p>
-        </p:txBody>
-      </p:sp>
     </p:spTree>
     <p:extLst>
       <p:ext uri="{BB962C8B-B14F-4D97-AF65-F5344CB8AC3E}">
-        <p14:creationId xmlns:p14="http://schemas.microsoft.com/office/powerpoint/2010/main" val="1024086991"/>
+        <p14:creationId xmlns:p14="http://schemas.microsoft.com/office/powerpoint/2010/main" val="3449784584"/>
       </p:ext>
     </p:extLst>
   </p:cSld>
@@ -511,10 +292,6 @@
           <a:bodyPr/>
           <a:lstStyle/>
           <a:p>
-            <a:r>
-              <a:rPr lang="en-US" dirty="0"/>
-              <a:t/>
-            </a:r>
             <a:endParaRPr lang="en-US" dirty="0"/>
           </a:p>
         </p:txBody>
@@ -599,10 +376,6 @@
           <a:bodyPr/>
           <a:lstStyle/>
           <a:p>
-            <a:r>
-              <a:rPr lang="en-US" dirty="0"/>
-              <a:t/>
-            </a:r>
             <a:endParaRPr lang="en-US" dirty="0"/>
           </a:p>
         </p:txBody>
@@ -687,10 +460,6 @@
           <a:bodyPr/>
           <a:lstStyle/>
           <a:p>
-            <a:r>
-              <a:rPr lang="en-US" dirty="0"/>
-              <a:t/>
-            </a:r>
             <a:endParaRPr lang="en-US" dirty="0"/>
           </a:p>
         </p:txBody>
@@ -775,10 +544,6 @@
           <a:bodyPr/>
           <a:lstStyle/>
           <a:p>
-            <a:r>
-              <a:rPr lang="en-US" dirty="0"/>
-              <a:t/>
-            </a:r>
             <a:endParaRPr lang="en-US" dirty="0"/>
           </a:p>
         </p:txBody>
@@ -863,10 +628,6 @@
           <a:bodyPr/>
           <a:lstStyle/>
           <a:p>
-            <a:r>
-              <a:rPr lang="en-US" dirty="0"/>
-              <a:t/>
-            </a:r>
             <a:endParaRPr lang="en-US" dirty="0"/>
           </a:p>
         </p:txBody>
@@ -951,10 +712,6 @@
           <a:bodyPr/>
           <a:lstStyle/>
           <a:p>
-            <a:r>
-              <a:rPr lang="en-US" dirty="0"/>
-              <a:t/>
-            </a:r>
             <a:endParaRPr lang="en-US" dirty="0"/>
           </a:p>
         </p:txBody>
@@ -1039,10 +796,6 @@
           <a:bodyPr/>
           <a:lstStyle/>
           <a:p>
-            <a:r>
-              <a:rPr lang="en-US" dirty="0"/>
-              <a:t/>
-            </a:r>
             <a:endParaRPr lang="en-US" dirty="0"/>
           </a:p>
         </p:txBody>
@@ -1127,10 +880,6 @@
           <a:bodyPr/>
           <a:lstStyle/>
           <a:p>
-            <a:r>
-              <a:rPr lang="en-US" dirty="0"/>
-              <a:t/>
-            </a:r>
             <a:endParaRPr lang="en-US" dirty="0"/>
           </a:p>
         </p:txBody>
@@ -1215,10 +964,6 @@
           <a:bodyPr/>
           <a:lstStyle/>
           <a:p>
-            <a:r>
-              <a:rPr lang="en-US" dirty="0"/>
-              <a:t/>
-            </a:r>
             <a:endParaRPr lang="en-US" dirty="0"/>
           </a:p>
         </p:txBody>
@@ -1303,10 +1048,6 @@
           <a:bodyPr/>
           <a:lstStyle/>
           <a:p>
-            <a:r>
-              <a:rPr lang="en-US" dirty="0"/>
-              <a:t/>
-            </a:r>
             <a:endParaRPr lang="en-US" dirty="0"/>
           </a:p>
         </p:txBody>
@@ -1391,10 +1132,6 @@
           <a:bodyPr/>
           <a:lstStyle/>
           <a:p>
-            <a:r>
-              <a:rPr lang="en-US" dirty="0"/>
-              <a:t/>
-            </a:r>
             <a:endParaRPr lang="en-US" dirty="0"/>
           </a:p>
         </p:txBody>
@@ -1479,10 +1216,6 @@
           <a:bodyPr/>
           <a:lstStyle/>
           <a:p>
-            <a:r>
-              <a:rPr lang="en-US" dirty="0"/>
-              <a:t/>
-            </a:r>
             <a:endParaRPr lang="en-US" dirty="0"/>
           </a:p>
         </p:txBody>
@@ -1556,6 +1289,11 @@
 <file path=ppt/slideMasters/slideMaster1.xml><?xml version="1.0" encoding="utf-8"?>
 <p:sldMaster xmlns:a="http://schemas.openxmlformats.org/drawingml/2006/main" xmlns:r="http://schemas.openxmlformats.org/officeDocument/2006/relationships" xmlns:p="http://schemas.openxmlformats.org/presentationml/2006/main">
   <p:cSld>
+    <p:bg>
+      <p:bgRef idx="1001">
+        <a:schemeClr val="bg1"/>
+      </p:bgRef>
+    </p:bg>
     <p:spTree>
       <p:nvGrpSpPr>
         <p:cNvPr id="1" name=""/>
@@ -1838,6 +1576,7 @@
         <a:solidFill>
           <a:srgbClr val="0D1117"/>
         </a:solidFill>
+        <a:effectLst/>
       </p:bgPr>
     </p:bg>
     <p:spTree>
@@ -1873,6 +1612,13 @@
           </a:solidFill>
           <a:ln/>
         </p:spPr>
+        <p:txBody>
+          <a:bodyPr/>
+          <a:lstStyle/>
+          <a:p>
+            <a:endParaRPr lang="en-US"/>
+          </a:p>
+        </p:txBody>
       </p:sp>
       <p:sp>
         <p:nvSpPr>
@@ -1893,6 +1639,13 @@
           </a:solidFill>
           <a:ln/>
         </p:spPr>
+        <p:txBody>
+          <a:bodyPr/>
+          <a:lstStyle/>
+          <a:p>
+            <a:endParaRPr lang="en-US"/>
+          </a:p>
+        </p:txBody>
       </p:sp>
       <p:sp>
         <p:nvSpPr>
@@ -1913,6 +1666,13 @@
           </a:solidFill>
           <a:ln/>
         </p:spPr>
+        <p:txBody>
+          <a:bodyPr/>
+          <a:lstStyle/>
+          <a:p>
+            <a:endParaRPr lang="en-US"/>
+          </a:p>
+        </p:txBody>
       </p:sp>
       <p:sp>
         <p:nvSpPr>
@@ -1935,6 +1695,13 @@
           </a:solidFill>
           <a:ln/>
         </p:spPr>
+        <p:txBody>
+          <a:bodyPr/>
+          <a:lstStyle/>
+          <a:p>
+            <a:endParaRPr lang="en-US"/>
+          </a:p>
+        </p:txBody>
       </p:sp>
       <p:sp>
         <p:nvSpPr>
@@ -1957,11 +1724,11 @@
           <a:bodyPr wrap="square" rtlCol="0" anchor="ctr"/>
           <a:lstStyle/>
           <a:p>
-            <a:pPr algn="ctr" indent="0" marL="0">
-              <a:buNone/>
-            </a:pPr>
-            <a:r>
-              <a:rPr lang="en-US" sz="1000" b="1" spc="200" kern="0" dirty="0">
+            <a:pPr marL="0" indent="0" algn="ctr">
+              <a:buNone/>
+            </a:pPr>
+            <a:r>
+              <a:rPr lang="en-US" sz="1000" b="1" kern="0" spc="200" dirty="0">
                 <a:solidFill>
                   <a:srgbClr val="FFFFFF"/>
                 </a:solidFill>
@@ -1996,7 +1763,7 @@
           <a:bodyPr wrap="square" lIns="0" tIns="0" rIns="0" bIns="0" rtlCol="0" anchor="ctr"/>
           <a:lstStyle/>
           <a:p>
-            <a:pPr indent="0" marL="0">
+            <a:pPr marL="0" indent="0">
               <a:buNone/>
             </a:pPr>
             <a:r>
@@ -2035,7 +1802,7 @@
           <a:bodyPr wrap="square" lIns="0" tIns="0" rIns="0" bIns="0" rtlCol="0" anchor="ctr"/>
           <a:lstStyle/>
           <a:p>
-            <a:pPr indent="0" marL="0">
+            <a:pPr marL="0" indent="0">
               <a:buNone/>
             </a:pPr>
             <a:r>
@@ -2074,7 +1841,7 @@
           <a:bodyPr wrap="square" lIns="0" tIns="0" rIns="0" bIns="0" rtlCol="0" anchor="ctr"/>
           <a:lstStyle/>
           <a:p>
-            <a:pPr indent="0" marL="0">
+            <a:pPr marL="0" indent="0">
               <a:buNone/>
             </a:pPr>
             <a:r>
@@ -2111,6 +1878,13 @@
           </a:solidFill>
           <a:ln/>
         </p:spPr>
+        <p:txBody>
+          <a:bodyPr/>
+          <a:lstStyle/>
+          <a:p>
+            <a:endParaRPr lang="en-US"/>
+          </a:p>
+        </p:txBody>
       </p:sp>
       <p:sp>
         <p:nvSpPr>
@@ -2133,11 +1907,11 @@
           <a:bodyPr wrap="square" lIns="0" tIns="0" rIns="0" bIns="0" rtlCol="0" anchor="ctr"/>
           <a:lstStyle/>
           <a:p>
-            <a:pPr indent="0" marL="0">
-              <a:buNone/>
-            </a:pPr>
-            <a:r>
-              <a:rPr lang="en-US" sz="900" b="1" spc="200" kern="0" dirty="0">
+            <a:pPr marL="0" indent="0">
+              <a:buNone/>
+            </a:pPr>
+            <a:r>
+              <a:rPr lang="en-US" sz="900" b="1" kern="0" spc="200" dirty="0">
                 <a:solidFill>
                   <a:srgbClr val="8B949E"/>
                 </a:solidFill>
@@ -2172,7 +1946,7 @@
           <a:bodyPr wrap="square" lIns="0" tIns="0" rIns="0" bIns="0" rtlCol="0" anchor="ctr"/>
           <a:lstStyle/>
           <a:p>
-            <a:pPr indent="0" marL="0">
+            <a:pPr marL="0" indent="0">
               <a:buNone/>
             </a:pPr>
             <a:r>
@@ -2209,13 +1983,20 @@
           </a:solidFill>
           <a:ln/>
           <a:effectLst>
-            <a:outerShdw sx="100000" sy="100000" kx="0" ky="0" algn="bl" rotWithShape="0" blurRad="101600" dist="38100" dir="8100000">
+            <a:outerShdw blurRad="101600" dist="38100" dir="8100000" algn="bl" rotWithShape="0">
               <a:srgbClr val="000000">
                 <a:alpha val="30000"/>
               </a:srgbClr>
             </a:outerShdw>
           </a:effectLst>
         </p:spPr>
+        <p:txBody>
+          <a:bodyPr/>
+          <a:lstStyle/>
+          <a:p>
+            <a:endParaRPr lang="en-US"/>
+          </a:p>
+        </p:txBody>
       </p:sp>
       <p:sp>
         <p:nvSpPr>
@@ -2238,7 +2019,7 @@
           <a:bodyPr wrap="square" rtlCol="0" anchor="ctr"/>
           <a:lstStyle/>
           <a:p>
-            <a:pPr algn="ctr" indent="0" marL="0">
+            <a:pPr marL="0" indent="0" algn="ctr">
               <a:buNone/>
             </a:pPr>
             <a:r>
@@ -2277,6 +2058,13 @@
           </a:solidFill>
           <a:ln/>
         </p:spPr>
+        <p:txBody>
+          <a:bodyPr/>
+          <a:lstStyle/>
+          <a:p>
+            <a:endParaRPr lang="en-US"/>
+          </a:p>
+        </p:txBody>
       </p:sp>
       <p:sp>
         <p:nvSpPr>
@@ -2299,7 +2087,7 @@
           <a:bodyPr wrap="square" rtlCol="0" anchor="ctr"/>
           <a:lstStyle/>
           <a:p>
-            <a:pPr algn="ctr" indent="0" marL="0">
+            <a:pPr marL="0" indent="0" algn="ctr">
               <a:buNone/>
             </a:pPr>
             <a:r>
@@ -2338,7 +2126,7 @@
           <a:bodyPr wrap="square" rtlCol="0" anchor="t"/>
           <a:lstStyle/>
           <a:p>
-            <a:pPr algn="ctr" indent="0" marL="0">
+            <a:pPr marL="0" indent="0" algn="ctr">
               <a:buNone/>
             </a:pPr>
             <a:r>
@@ -2372,6 +2160,7 @@
         <a:solidFill>
           <a:srgbClr val="0D1117"/>
         </a:solidFill>
+        <a:effectLst/>
       </p:bgPr>
     </p:bg>
     <p:spTree>
@@ -2407,6 +2196,13 @@
           </a:solidFill>
           <a:ln/>
         </p:spPr>
+        <p:txBody>
+          <a:bodyPr/>
+          <a:lstStyle/>
+          <a:p>
+            <a:endParaRPr lang="en-US"/>
+          </a:p>
+        </p:txBody>
       </p:sp>
       <p:sp>
         <p:nvSpPr>
@@ -2429,11 +2225,11 @@
           <a:bodyPr wrap="square" lIns="0" tIns="0" rIns="0" bIns="0" rtlCol="0" anchor="ctr"/>
           <a:lstStyle/>
           <a:p>
-            <a:pPr indent="0" marL="0">
-              <a:buNone/>
-            </a:pPr>
-            <a:r>
-              <a:rPr lang="en-US" sz="1100" b="1" spc="300" kern="0" dirty="0">
+            <a:pPr marL="0" indent="0">
+              <a:buNone/>
+            </a:pPr>
+            <a:r>
+              <a:rPr lang="en-US" sz="1100" b="1" kern="0" spc="300" dirty="0">
                 <a:solidFill>
                   <a:srgbClr val="0A66C2"/>
                 </a:solidFill>
@@ -2468,7 +2264,7 @@
           <a:bodyPr wrap="square" lIns="0" tIns="0" rIns="0" bIns="0" rtlCol="0" anchor="ctr"/>
           <a:lstStyle/>
           <a:p>
-            <a:pPr indent="0" marL="0">
+            <a:pPr marL="0" indent="0">
               <a:buNone/>
             </a:pPr>
             <a:r>
@@ -2507,13 +2303,20 @@
           </a:solidFill>
           <a:ln/>
           <a:effectLst>
-            <a:outerShdw sx="100000" sy="100000" kx="0" ky="0" algn="bl" rotWithShape="0" blurRad="101600" dist="38100" dir="8100000">
+            <a:outerShdw blurRad="101600" dist="38100" dir="8100000" algn="bl" rotWithShape="0">
               <a:srgbClr val="000000">
                 <a:alpha val="30000"/>
               </a:srgbClr>
             </a:outerShdw>
           </a:effectLst>
         </p:spPr>
+        <p:txBody>
+          <a:bodyPr/>
+          <a:lstStyle/>
+          <a:p>
+            <a:endParaRPr lang="en-US"/>
+          </a:p>
+        </p:txBody>
       </p:sp>
       <p:sp>
         <p:nvSpPr>
@@ -2534,6 +2337,13 @@
           </a:solidFill>
           <a:ln/>
         </p:spPr>
+        <p:txBody>
+          <a:bodyPr/>
+          <a:lstStyle/>
+          <a:p>
+            <a:endParaRPr lang="en-US"/>
+          </a:p>
+        </p:txBody>
       </p:sp>
       <p:sp>
         <p:nvSpPr>
@@ -2556,7 +2366,7 @@
           <a:bodyPr wrap="square" lIns="0" tIns="0" rIns="0" bIns="0" rtlCol="0" anchor="ctr"/>
           <a:lstStyle/>
           <a:p>
-            <a:pPr indent="0" marL="0">
+            <a:pPr marL="0" indent="0">
               <a:buNone/>
             </a:pPr>
             <a:r>
@@ -2595,7 +2405,7 @@
           <a:bodyPr wrap="square" lIns="0" tIns="0" rIns="0" bIns="0" rtlCol="0" anchor="ctr"/>
           <a:lstStyle/>
           <a:p>
-            <a:pPr indent="0" marL="0">
+            <a:pPr marL="0" indent="0">
               <a:buNone/>
             </a:pPr>
             <a:r>
@@ -2634,6 +2444,13 @@
           </a:solidFill>
           <a:ln/>
         </p:spPr>
+        <p:txBody>
+          <a:bodyPr/>
+          <a:lstStyle/>
+          <a:p>
+            <a:endParaRPr lang="en-US"/>
+          </a:p>
+        </p:txBody>
       </p:sp>
       <p:sp>
         <p:nvSpPr>
@@ -2656,7 +2473,7 @@
           <a:bodyPr wrap="square" rtlCol="0" anchor="ctr"/>
           <a:lstStyle/>
           <a:p>
-            <a:pPr algn="ctr" indent="0" marL="0">
+            <a:pPr marL="0" indent="0" algn="ctr">
               <a:buNone/>
             </a:pPr>
             <a:r>
@@ -2695,7 +2512,7 @@
           <a:bodyPr wrap="square" lIns="0" tIns="0" rIns="0" bIns="0" rtlCol="0" anchor="ctr"/>
           <a:lstStyle/>
           <a:p>
-            <a:pPr indent="0" marL="0">
+            <a:pPr marL="0" indent="0">
               <a:buNone/>
             </a:pPr>
             <a:r>
@@ -2734,7 +2551,7 @@
           <a:bodyPr wrap="square" rtlCol="0" anchor="ctr"/>
           <a:lstStyle/>
           <a:p>
-            <a:pPr algn="r" indent="0" marL="0">
+            <a:pPr marL="0" indent="0" algn="r">
               <a:buNone/>
             </a:pPr>
             <a:r>
@@ -2773,6 +2590,13 @@
           </a:solidFill>
           <a:ln/>
         </p:spPr>
+        <p:txBody>
+          <a:bodyPr/>
+          <a:lstStyle/>
+          <a:p>
+            <a:endParaRPr lang="en-US"/>
+          </a:p>
+        </p:txBody>
       </p:sp>
       <p:sp>
         <p:nvSpPr>
@@ -2795,7 +2619,7 @@
           <a:bodyPr wrap="square" rtlCol="0" anchor="ctr"/>
           <a:lstStyle/>
           <a:p>
-            <a:pPr algn="ctr" indent="0" marL="0">
+            <a:pPr marL="0" indent="0" algn="ctr">
               <a:buNone/>
             </a:pPr>
             <a:r>
@@ -2834,7 +2658,7 @@
           <a:bodyPr wrap="square" lIns="0" tIns="0" rIns="0" bIns="0" rtlCol="0" anchor="ctr"/>
           <a:lstStyle/>
           <a:p>
-            <a:pPr indent="0" marL="0">
+            <a:pPr marL="0" indent="0">
               <a:buNone/>
             </a:pPr>
             <a:r>
@@ -2873,7 +2697,7 @@
           <a:bodyPr wrap="square" rtlCol="0" anchor="ctr"/>
           <a:lstStyle/>
           <a:p>
-            <a:pPr algn="r" indent="0" marL="0">
+            <a:pPr marL="0" indent="0" algn="r">
               <a:buNone/>
             </a:pPr>
             <a:r>
@@ -2912,6 +2736,13 @@
           </a:solidFill>
           <a:ln/>
         </p:spPr>
+        <p:txBody>
+          <a:bodyPr/>
+          <a:lstStyle/>
+          <a:p>
+            <a:endParaRPr lang="en-US"/>
+          </a:p>
+        </p:txBody>
       </p:sp>
       <p:sp>
         <p:nvSpPr>
@@ -2934,7 +2765,7 @@
           <a:bodyPr wrap="square" rtlCol="0" anchor="ctr"/>
           <a:lstStyle/>
           <a:p>
-            <a:pPr algn="ctr" indent="0" marL="0">
+            <a:pPr marL="0" indent="0" algn="ctr">
               <a:buNone/>
             </a:pPr>
             <a:r>
@@ -2973,7 +2804,7 @@
           <a:bodyPr wrap="square" lIns="0" tIns="0" rIns="0" bIns="0" rtlCol="0" anchor="ctr"/>
           <a:lstStyle/>
           <a:p>
-            <a:pPr indent="0" marL="0">
+            <a:pPr marL="0" indent="0">
               <a:buNone/>
             </a:pPr>
             <a:r>
@@ -3012,7 +2843,7 @@
           <a:bodyPr wrap="square" rtlCol="0" anchor="ctr"/>
           <a:lstStyle/>
           <a:p>
-            <a:pPr algn="r" indent="0" marL="0">
+            <a:pPr marL="0" indent="0" algn="r">
               <a:buNone/>
             </a:pPr>
             <a:r>
@@ -3051,6 +2882,13 @@
           </a:solidFill>
           <a:ln/>
         </p:spPr>
+        <p:txBody>
+          <a:bodyPr/>
+          <a:lstStyle/>
+          <a:p>
+            <a:endParaRPr lang="en-US"/>
+          </a:p>
+        </p:txBody>
       </p:sp>
       <p:sp>
         <p:nvSpPr>
@@ -3073,7 +2911,7 @@
           <a:bodyPr wrap="square" rtlCol="0" anchor="ctr"/>
           <a:lstStyle/>
           <a:p>
-            <a:pPr algn="ctr" indent="0" marL="0">
+            <a:pPr marL="0" indent="0" algn="ctr">
               <a:buNone/>
             </a:pPr>
             <a:r>
@@ -3112,7 +2950,7 @@
           <a:bodyPr wrap="square" lIns="0" tIns="0" rIns="0" bIns="0" rtlCol="0" anchor="ctr"/>
           <a:lstStyle/>
           <a:p>
-            <a:pPr indent="0" marL="0">
+            <a:pPr marL="0" indent="0">
               <a:buNone/>
             </a:pPr>
             <a:r>
@@ -3151,7 +2989,7 @@
           <a:bodyPr wrap="square" rtlCol="0" anchor="ctr"/>
           <a:lstStyle/>
           <a:p>
-            <a:pPr algn="r" indent="0" marL="0">
+            <a:pPr marL="0" indent="0" algn="r">
               <a:buNone/>
             </a:pPr>
             <a:r>
@@ -3190,13 +3028,20 @@
           </a:solidFill>
           <a:ln/>
           <a:effectLst>
-            <a:outerShdw sx="100000" sy="100000" kx="0" ky="0" algn="bl" rotWithShape="0" blurRad="101600" dist="38100" dir="8100000">
+            <a:outerShdw blurRad="101600" dist="38100" dir="8100000" algn="bl" rotWithShape="0">
               <a:srgbClr val="000000">
                 <a:alpha val="30000"/>
               </a:srgbClr>
             </a:outerShdw>
           </a:effectLst>
         </p:spPr>
+        <p:txBody>
+          <a:bodyPr/>
+          <a:lstStyle/>
+          <a:p>
+            <a:endParaRPr lang="en-US"/>
+          </a:p>
+        </p:txBody>
       </p:sp>
       <p:sp>
         <p:nvSpPr>
@@ -3217,6 +3062,13 @@
           </a:solidFill>
           <a:ln/>
         </p:spPr>
+        <p:txBody>
+          <a:bodyPr/>
+          <a:lstStyle/>
+          <a:p>
+            <a:endParaRPr lang="en-US"/>
+          </a:p>
+        </p:txBody>
       </p:sp>
       <p:sp>
         <p:nvSpPr>
@@ -3239,7 +3091,7 @@
           <a:bodyPr wrap="square" lIns="0" tIns="0" rIns="0" bIns="0" rtlCol="0" anchor="ctr"/>
           <a:lstStyle/>
           <a:p>
-            <a:pPr indent="0" marL="0">
+            <a:pPr marL="0" indent="0">
               <a:buNone/>
             </a:pPr>
             <a:r>
@@ -3278,6 +3130,13 @@
           </a:solidFill>
           <a:ln/>
         </p:spPr>
+        <p:txBody>
+          <a:bodyPr/>
+          <a:lstStyle/>
+          <a:p>
+            <a:endParaRPr lang="en-US"/>
+          </a:p>
+        </p:txBody>
       </p:sp>
       <p:sp>
         <p:nvSpPr>
@@ -3300,7 +3159,7 @@
           <a:bodyPr wrap="square" rtlCol="0" anchor="ctr"/>
           <a:lstStyle/>
           <a:p>
-            <a:pPr algn="ctr" indent="0" marL="0">
+            <a:pPr marL="0" indent="0" algn="ctr">
               <a:buNone/>
             </a:pPr>
             <a:r>
@@ -3339,7 +3198,7 @@
           <a:bodyPr wrap="square" lIns="0" tIns="0" rIns="0" bIns="0" rtlCol="0" anchor="ctr"/>
           <a:lstStyle/>
           <a:p>
-            <a:pPr indent="0" marL="0">
+            <a:pPr marL="0" indent="0">
               <a:buNone/>
             </a:pPr>
             <a:r>
@@ -3378,7 +3237,7 @@
           <a:bodyPr wrap="square" rtlCol="0" anchor="ctr"/>
           <a:lstStyle/>
           <a:p>
-            <a:pPr algn="r" indent="0" marL="0">
+            <a:pPr marL="0" indent="0" algn="r">
               <a:buNone/>
             </a:pPr>
             <a:r>
@@ -3417,6 +3276,13 @@
           </a:solidFill>
           <a:ln/>
         </p:spPr>
+        <p:txBody>
+          <a:bodyPr/>
+          <a:lstStyle/>
+          <a:p>
+            <a:endParaRPr lang="en-US"/>
+          </a:p>
+        </p:txBody>
       </p:sp>
       <p:sp>
         <p:nvSpPr>
@@ -3439,7 +3305,7 @@
           <a:bodyPr wrap="square" rtlCol="0" anchor="ctr"/>
           <a:lstStyle/>
           <a:p>
-            <a:pPr algn="ctr" indent="0" marL="0">
+            <a:pPr marL="0" indent="0" algn="ctr">
               <a:buNone/>
             </a:pPr>
             <a:r>
@@ -3478,6 +3344,13 @@
           </a:solidFill>
           <a:ln/>
         </p:spPr>
+        <p:txBody>
+          <a:bodyPr/>
+          <a:lstStyle/>
+          <a:p>
+            <a:endParaRPr lang="en-US"/>
+          </a:p>
+        </p:txBody>
       </p:sp>
       <p:sp>
         <p:nvSpPr>
@@ -3500,7 +3373,7 @@
           <a:bodyPr wrap="square" rtlCol="0" anchor="ctr"/>
           <a:lstStyle/>
           <a:p>
-            <a:pPr algn="ctr" indent="0" marL="0">
+            <a:pPr marL="0" indent="0" algn="ctr">
               <a:buNone/>
             </a:pPr>
             <a:r>
@@ -3539,6 +3412,13 @@
           </a:solidFill>
           <a:ln/>
         </p:spPr>
+        <p:txBody>
+          <a:bodyPr/>
+          <a:lstStyle/>
+          <a:p>
+            <a:endParaRPr lang="en-US"/>
+          </a:p>
+        </p:txBody>
       </p:sp>
       <p:sp>
         <p:nvSpPr>
@@ -3561,7 +3441,7 @@
           <a:bodyPr wrap="square" rtlCol="0" anchor="ctr"/>
           <a:lstStyle/>
           <a:p>
-            <a:pPr algn="ctr" indent="0" marL="0">
+            <a:pPr marL="0" indent="0" algn="ctr">
               <a:buNone/>
             </a:pPr>
             <a:r>
@@ -3600,6 +3480,13 @@
           </a:solidFill>
           <a:ln/>
         </p:spPr>
+        <p:txBody>
+          <a:bodyPr/>
+          <a:lstStyle/>
+          <a:p>
+            <a:endParaRPr lang="en-US"/>
+          </a:p>
+        </p:txBody>
       </p:sp>
       <p:sp>
         <p:nvSpPr>
@@ -3622,7 +3509,7 @@
           <a:bodyPr wrap="square" rtlCol="0" anchor="ctr"/>
           <a:lstStyle/>
           <a:p>
-            <a:pPr algn="ctr" indent="0" marL="0">
+            <a:pPr marL="0" indent="0" algn="ctr">
               <a:buNone/>
             </a:pPr>
             <a:r>
@@ -3661,7 +3548,7 @@
           <a:bodyPr wrap="square" rtlCol="0" anchor="ctr"/>
           <a:lstStyle/>
           <a:p>
-            <a:pPr algn="ctr" indent="0" marL="0">
+            <a:pPr marL="0" indent="0" algn="ctr">
               <a:buNone/>
             </a:pPr>
             <a:r>
@@ -3700,6 +3587,13 @@
           </a:solidFill>
           <a:ln/>
         </p:spPr>
+        <p:txBody>
+          <a:bodyPr/>
+          <a:lstStyle/>
+          <a:p>
+            <a:endParaRPr lang="en-US"/>
+          </a:p>
+        </p:txBody>
       </p:sp>
       <p:sp>
         <p:nvSpPr>
@@ -3722,7 +3616,7 @@
           <a:bodyPr wrap="square" rtlCol="0" anchor="ctr"/>
           <a:lstStyle/>
           <a:p>
-            <a:pPr algn="ctr" indent="0" marL="0">
+            <a:pPr marL="0" indent="0" algn="ctr">
               <a:buNone/>
             </a:pPr>
             <a:r>
@@ -3761,7 +3655,7 @@
           <a:bodyPr wrap="square" lIns="0" tIns="0" rIns="0" bIns="0" rtlCol="0" anchor="ctr"/>
           <a:lstStyle/>
           <a:p>
-            <a:pPr indent="0" marL="0">
+            <a:pPr marL="0" indent="0">
               <a:buNone/>
             </a:pPr>
             <a:r>
@@ -3800,7 +3694,7 @@
           <a:bodyPr wrap="square" rtlCol="0" anchor="ctr"/>
           <a:lstStyle/>
           <a:p>
-            <a:pPr algn="r" indent="0" marL="0">
+            <a:pPr marL="0" indent="0" algn="r">
               <a:buNone/>
             </a:pPr>
             <a:r>
@@ -3839,6 +3733,13 @@
           </a:solidFill>
           <a:ln/>
         </p:spPr>
+        <p:txBody>
+          <a:bodyPr/>
+          <a:lstStyle/>
+          <a:p>
+            <a:endParaRPr lang="en-US"/>
+          </a:p>
+        </p:txBody>
       </p:sp>
       <p:sp>
         <p:nvSpPr>
@@ -3861,7 +3762,7 @@
           <a:bodyPr wrap="square" rtlCol="0" anchor="ctr"/>
           <a:lstStyle/>
           <a:p>
-            <a:pPr algn="ctr" indent="0" marL="0">
+            <a:pPr marL="0" indent="0" algn="ctr">
               <a:buNone/>
             </a:pPr>
             <a:r>
@@ -3900,6 +3801,13 @@
           </a:solidFill>
           <a:ln/>
         </p:spPr>
+        <p:txBody>
+          <a:bodyPr/>
+          <a:lstStyle/>
+          <a:p>
+            <a:endParaRPr lang="en-US"/>
+          </a:p>
+        </p:txBody>
       </p:sp>
       <p:sp>
         <p:nvSpPr>
@@ -3922,7 +3830,7 @@
           <a:bodyPr wrap="square" rtlCol="0" anchor="ctr"/>
           <a:lstStyle/>
           <a:p>
-            <a:pPr algn="ctr" indent="0" marL="0">
+            <a:pPr marL="0" indent="0" algn="ctr">
               <a:buNone/>
             </a:pPr>
             <a:r>
@@ -3961,6 +3869,13 @@
           </a:solidFill>
           <a:ln/>
         </p:spPr>
+        <p:txBody>
+          <a:bodyPr/>
+          <a:lstStyle/>
+          <a:p>
+            <a:endParaRPr lang="en-US"/>
+          </a:p>
+        </p:txBody>
       </p:sp>
       <p:sp>
         <p:nvSpPr>
@@ -3983,7 +3898,7 @@
           <a:bodyPr wrap="square" rtlCol="0" anchor="ctr"/>
           <a:lstStyle/>
           <a:p>
-            <a:pPr algn="ctr" indent="0" marL="0">
+            <a:pPr marL="0" indent="0" algn="ctr">
               <a:buNone/>
             </a:pPr>
             <a:r>
@@ -4022,6 +3937,13 @@
           </a:solidFill>
           <a:ln/>
         </p:spPr>
+        <p:txBody>
+          <a:bodyPr/>
+          <a:lstStyle/>
+          <a:p>
+            <a:endParaRPr lang="en-US"/>
+          </a:p>
+        </p:txBody>
       </p:sp>
       <p:sp>
         <p:nvSpPr>
@@ -4044,7 +3966,7 @@
           <a:bodyPr wrap="square" rtlCol="0" anchor="ctr"/>
           <a:lstStyle/>
           <a:p>
-            <a:pPr algn="ctr" indent="0" marL="0">
+            <a:pPr marL="0" indent="0" algn="ctr">
               <a:buNone/>
             </a:pPr>
             <a:r>
@@ -4083,7 +4005,7 @@
           <a:bodyPr wrap="square" lIns="0" tIns="0" rIns="0" bIns="0" rtlCol="0" anchor="ctr"/>
           <a:lstStyle/>
           <a:p>
-            <a:pPr indent="0" marL="0">
+            <a:pPr marL="0" indent="0">
               <a:buNone/>
             </a:pPr>
             <a:r>
@@ -4117,6 +4039,7 @@
         <a:solidFill>
           <a:srgbClr val="0D1117"/>
         </a:solidFill>
+        <a:effectLst/>
       </p:bgPr>
     </p:bg>
     <p:spTree>
@@ -4152,6 +4075,13 @@
           </a:solidFill>
           <a:ln/>
         </p:spPr>
+        <p:txBody>
+          <a:bodyPr/>
+          <a:lstStyle/>
+          <a:p>
+            <a:endParaRPr lang="en-US"/>
+          </a:p>
+        </p:txBody>
       </p:sp>
       <p:sp>
         <p:nvSpPr>
@@ -4174,11 +4104,11 @@
           <a:bodyPr wrap="square" lIns="0" tIns="0" rIns="0" bIns="0" rtlCol="0" anchor="ctr"/>
           <a:lstStyle/>
           <a:p>
-            <a:pPr indent="0" marL="0">
-              <a:buNone/>
-            </a:pPr>
-            <a:r>
-              <a:rPr lang="en-US" sz="1100" b="1" spc="300" kern="0" dirty="0">
+            <a:pPr marL="0" indent="0">
+              <a:buNone/>
+            </a:pPr>
+            <a:r>
+              <a:rPr lang="en-US" sz="1100" b="1" kern="0" spc="300" dirty="0">
                 <a:solidFill>
                   <a:srgbClr val="0A66C2"/>
                 </a:solidFill>
@@ -4213,7 +4143,7 @@
           <a:bodyPr wrap="square" lIns="0" tIns="0" rIns="0" bIns="0" rtlCol="0" anchor="ctr"/>
           <a:lstStyle/>
           <a:p>
-            <a:pPr indent="0" marL="0">
+            <a:pPr marL="0" indent="0">
               <a:buNone/>
             </a:pPr>
             <a:r>
@@ -4252,13 +4182,20 @@
           </a:solidFill>
           <a:ln/>
           <a:effectLst>
-            <a:outerShdw sx="100000" sy="100000" kx="0" ky="0" algn="bl" rotWithShape="0" blurRad="101600" dist="38100" dir="8100000">
+            <a:outerShdw blurRad="101600" dist="38100" dir="8100000" algn="bl" rotWithShape="0">
               <a:srgbClr val="000000">
                 <a:alpha val="30000"/>
               </a:srgbClr>
             </a:outerShdw>
           </a:effectLst>
         </p:spPr>
+        <p:txBody>
+          <a:bodyPr/>
+          <a:lstStyle/>
+          <a:p>
+            <a:endParaRPr lang="en-US"/>
+          </a:p>
+        </p:txBody>
       </p:sp>
       <p:sp>
         <p:nvSpPr>
@@ -4279,6 +4216,13 @@
           </a:solidFill>
           <a:ln/>
         </p:spPr>
+        <p:txBody>
+          <a:bodyPr/>
+          <a:lstStyle/>
+          <a:p>
+            <a:endParaRPr lang="en-US"/>
+          </a:p>
+        </p:txBody>
       </p:sp>
       <p:sp>
         <p:nvSpPr>
@@ -4301,7 +4245,7 @@
           <a:bodyPr wrap="square" rtlCol="0" anchor="ctr"/>
           <a:lstStyle/>
           <a:p>
-            <a:pPr algn="ctr" indent="0" marL="0">
+            <a:pPr marL="0" indent="0" algn="ctr">
               <a:buNone/>
             </a:pPr>
             <a:r>
@@ -4340,7 +4284,7 @@
           <a:bodyPr wrap="square" rtlCol="0" anchor="t"/>
           <a:lstStyle/>
           <a:p>
-            <a:pPr algn="ctr" indent="0" marL="0">
+            <a:pPr marL="0" indent="0" algn="ctr">
               <a:buNone/>
             </a:pPr>
             <a:r>
@@ -4357,7 +4301,7 @@
             <a:endParaRPr lang="en-US" sz="1100" dirty="0"/>
           </a:p>
           <a:p>
-            <a:pPr algn="ctr" indent="0" marL="0">
+            <a:pPr marL="0" indent="0" algn="ctr">
               <a:buNone/>
             </a:pPr>
             <a:r>
@@ -4396,13 +4340,20 @@
           </a:solidFill>
           <a:ln/>
           <a:effectLst>
-            <a:outerShdw sx="100000" sy="100000" kx="0" ky="0" algn="bl" rotWithShape="0" blurRad="101600" dist="38100" dir="8100000">
+            <a:outerShdw blurRad="101600" dist="38100" dir="8100000" algn="bl" rotWithShape="0">
               <a:srgbClr val="000000">
                 <a:alpha val="30000"/>
               </a:srgbClr>
             </a:outerShdw>
           </a:effectLst>
         </p:spPr>
+        <p:txBody>
+          <a:bodyPr/>
+          <a:lstStyle/>
+          <a:p>
+            <a:endParaRPr lang="en-US"/>
+          </a:p>
+        </p:txBody>
       </p:sp>
       <p:sp>
         <p:nvSpPr>
@@ -4423,6 +4374,13 @@
           </a:solidFill>
           <a:ln/>
         </p:spPr>
+        <p:txBody>
+          <a:bodyPr/>
+          <a:lstStyle/>
+          <a:p>
+            <a:endParaRPr lang="en-US"/>
+          </a:p>
+        </p:txBody>
       </p:sp>
       <p:sp>
         <p:nvSpPr>
@@ -4445,7 +4403,7 @@
           <a:bodyPr wrap="square" rtlCol="0" anchor="ctr"/>
           <a:lstStyle/>
           <a:p>
-            <a:pPr algn="ctr" indent="0" marL="0">
+            <a:pPr marL="0" indent="0" algn="ctr">
               <a:buNone/>
             </a:pPr>
             <a:r>
@@ -4484,7 +4442,7 @@
           <a:bodyPr wrap="square" rtlCol="0" anchor="t"/>
           <a:lstStyle/>
           <a:p>
-            <a:pPr algn="ctr" indent="0" marL="0">
+            <a:pPr marL="0" indent="0" algn="ctr">
               <a:buNone/>
             </a:pPr>
             <a:r>
@@ -4501,7 +4459,7 @@
             <a:endParaRPr lang="en-US" sz="1100" dirty="0"/>
           </a:p>
           <a:p>
-            <a:pPr algn="ctr" indent="0" marL="0">
+            <a:pPr marL="0" indent="0" algn="ctr">
               <a:buNone/>
             </a:pPr>
             <a:r>
@@ -4540,13 +4498,20 @@
           </a:solidFill>
           <a:ln/>
           <a:effectLst>
-            <a:outerShdw sx="100000" sy="100000" kx="0" ky="0" algn="bl" rotWithShape="0" blurRad="101600" dist="38100" dir="8100000">
+            <a:outerShdw blurRad="101600" dist="38100" dir="8100000" algn="bl" rotWithShape="0">
               <a:srgbClr val="000000">
                 <a:alpha val="30000"/>
               </a:srgbClr>
             </a:outerShdw>
           </a:effectLst>
         </p:spPr>
+        <p:txBody>
+          <a:bodyPr/>
+          <a:lstStyle/>
+          <a:p>
+            <a:endParaRPr lang="en-US"/>
+          </a:p>
+        </p:txBody>
       </p:sp>
       <p:sp>
         <p:nvSpPr>
@@ -4567,6 +4532,13 @@
           </a:solidFill>
           <a:ln/>
         </p:spPr>
+        <p:txBody>
+          <a:bodyPr/>
+          <a:lstStyle/>
+          <a:p>
+            <a:endParaRPr lang="en-US"/>
+          </a:p>
+        </p:txBody>
       </p:sp>
       <p:sp>
         <p:nvSpPr>
@@ -4589,7 +4561,7 @@
           <a:bodyPr wrap="square" rtlCol="0" anchor="ctr"/>
           <a:lstStyle/>
           <a:p>
-            <a:pPr algn="ctr" indent="0" marL="0">
+            <a:pPr marL="0" indent="0" algn="ctr">
               <a:buNone/>
             </a:pPr>
             <a:r>
@@ -4628,7 +4600,7 @@
           <a:bodyPr wrap="square" rtlCol="0" anchor="t"/>
           <a:lstStyle/>
           <a:p>
-            <a:pPr algn="ctr" indent="0" marL="0">
+            <a:pPr marL="0" indent="0" algn="ctr">
               <a:buNone/>
             </a:pPr>
             <a:r>
@@ -4645,7 +4617,7 @@
             <a:endParaRPr lang="en-US" sz="1100" dirty="0"/>
           </a:p>
           <a:p>
-            <a:pPr algn="ctr" indent="0" marL="0">
+            <a:pPr marL="0" indent="0" algn="ctr">
               <a:buNone/>
             </a:pPr>
             <a:r>
@@ -4684,13 +4656,20 @@
           </a:solidFill>
           <a:ln/>
           <a:effectLst>
-            <a:outerShdw sx="100000" sy="100000" kx="0" ky="0" algn="bl" rotWithShape="0" blurRad="101600" dist="38100" dir="8100000">
+            <a:outerShdw blurRad="101600" dist="38100" dir="8100000" algn="bl" rotWithShape="0">
               <a:srgbClr val="000000">
                 <a:alpha val="30000"/>
               </a:srgbClr>
             </a:outerShdw>
           </a:effectLst>
         </p:spPr>
+        <p:txBody>
+          <a:bodyPr/>
+          <a:lstStyle/>
+          <a:p>
+            <a:endParaRPr lang="en-US"/>
+          </a:p>
+        </p:txBody>
       </p:sp>
       <p:sp>
         <p:nvSpPr>
@@ -4711,6 +4690,13 @@
           </a:solidFill>
           <a:ln/>
         </p:spPr>
+        <p:txBody>
+          <a:bodyPr/>
+          <a:lstStyle/>
+          <a:p>
+            <a:endParaRPr lang="en-US"/>
+          </a:p>
+        </p:txBody>
       </p:sp>
       <p:sp>
         <p:nvSpPr>
@@ -4733,7 +4719,7 @@
           <a:bodyPr wrap="square" rtlCol="0" anchor="ctr"/>
           <a:lstStyle/>
           <a:p>
-            <a:pPr algn="ctr" indent="0" marL="0">
+            <a:pPr marL="0" indent="0" algn="ctr">
               <a:buNone/>
             </a:pPr>
             <a:r>
@@ -4772,7 +4758,7 @@
           <a:bodyPr wrap="square" rtlCol="0" anchor="t"/>
           <a:lstStyle/>
           <a:p>
-            <a:pPr algn="ctr" indent="0" marL="0">
+            <a:pPr marL="0" indent="0" algn="ctr">
               <a:buNone/>
             </a:pPr>
             <a:r>
@@ -4789,7 +4775,7 @@
             <a:endParaRPr lang="en-US" sz="1100" dirty="0"/>
           </a:p>
           <a:p>
-            <a:pPr algn="ctr" indent="0" marL="0">
+            <a:pPr marL="0" indent="0" algn="ctr">
               <a:buNone/>
             </a:pPr>
             <a:r>
@@ -4828,7 +4814,7 @@
           <a:bodyPr wrap="square" lIns="0" tIns="0" rIns="0" bIns="0" rtlCol="0" anchor="ctr"/>
           <a:lstStyle/>
           <a:p>
-            <a:pPr indent="0" marL="0">
+            <a:pPr marL="0" indent="0">
               <a:buNone/>
             </a:pPr>
             <a:r>
@@ -4867,6 +4853,13 @@
           </a:solidFill>
           <a:ln/>
         </p:spPr>
+        <p:txBody>
+          <a:bodyPr/>
+          <a:lstStyle/>
+          <a:p>
+            <a:endParaRPr lang="en-US"/>
+          </a:p>
+        </p:txBody>
       </p:sp>
       <p:sp>
         <p:nvSpPr>
@@ -4889,7 +4882,7 @@
           <a:bodyPr wrap="square" rtlCol="0" anchor="ctr"/>
           <a:lstStyle/>
           <a:p>
-            <a:pPr algn="ctr" indent="0" marL="0">
+            <a:pPr marL="0" indent="0" algn="ctr">
               <a:buNone/>
             </a:pPr>
             <a:r>
@@ -4928,7 +4921,7 @@
           <a:bodyPr wrap="square" lIns="0" tIns="0" rIns="0" bIns="0" rtlCol="0" anchor="ctr"/>
           <a:lstStyle/>
           <a:p>
-            <a:pPr indent="0" marL="0">
+            <a:pPr marL="0" indent="0">
               <a:buNone/>
             </a:pPr>
             <a:r>
@@ -4967,6 +4960,13 @@
           </a:solidFill>
           <a:ln/>
         </p:spPr>
+        <p:txBody>
+          <a:bodyPr/>
+          <a:lstStyle/>
+          <a:p>
+            <a:endParaRPr lang="en-US"/>
+          </a:p>
+        </p:txBody>
       </p:sp>
       <p:sp>
         <p:nvSpPr>
@@ -4989,7 +4989,7 @@
           <a:bodyPr wrap="square" rtlCol="0" anchor="ctr"/>
           <a:lstStyle/>
           <a:p>
-            <a:pPr algn="ctr" indent="0" marL="0">
+            <a:pPr marL="0" indent="0" algn="ctr">
               <a:buNone/>
             </a:pPr>
             <a:r>
@@ -5028,7 +5028,7 @@
           <a:bodyPr wrap="square" lIns="0" tIns="0" rIns="0" bIns="0" rtlCol="0" anchor="ctr"/>
           <a:lstStyle/>
           <a:p>
-            <a:pPr indent="0" marL="0">
+            <a:pPr marL="0" indent="0">
               <a:buNone/>
             </a:pPr>
             <a:r>
@@ -5067,6 +5067,13 @@
           </a:solidFill>
           <a:ln/>
         </p:spPr>
+        <p:txBody>
+          <a:bodyPr/>
+          <a:lstStyle/>
+          <a:p>
+            <a:endParaRPr lang="en-US"/>
+          </a:p>
+        </p:txBody>
       </p:sp>
       <p:sp>
         <p:nvSpPr>
@@ -5089,7 +5096,7 @@
           <a:bodyPr wrap="square" rtlCol="0" anchor="ctr"/>
           <a:lstStyle/>
           <a:p>
-            <a:pPr algn="ctr" indent="0" marL="0">
+            <a:pPr marL="0" indent="0" algn="ctr">
               <a:buNone/>
             </a:pPr>
             <a:r>
@@ -5128,7 +5135,7 @@
           <a:bodyPr wrap="square" lIns="0" tIns="0" rIns="0" bIns="0" rtlCol="0" anchor="ctr"/>
           <a:lstStyle/>
           <a:p>
-            <a:pPr indent="0" marL="0">
+            <a:pPr marL="0" indent="0">
               <a:buNone/>
             </a:pPr>
             <a:r>
@@ -5167,6 +5174,13 @@
           </a:solidFill>
           <a:ln/>
         </p:spPr>
+        <p:txBody>
+          <a:bodyPr/>
+          <a:lstStyle/>
+          <a:p>
+            <a:endParaRPr lang="en-US"/>
+          </a:p>
+        </p:txBody>
       </p:sp>
       <p:sp>
         <p:nvSpPr>
@@ -5189,7 +5203,7 @@
           <a:bodyPr wrap="square" rtlCol="0" anchor="ctr"/>
           <a:lstStyle/>
           <a:p>
-            <a:pPr algn="ctr" indent="0" marL="0">
+            <a:pPr marL="0" indent="0" algn="ctr">
               <a:buNone/>
             </a:pPr>
             <a:r>
@@ -5228,7 +5242,7 @@
           <a:bodyPr wrap="square" lIns="0" tIns="0" rIns="0" bIns="0" rtlCol="0" anchor="ctr"/>
           <a:lstStyle/>
           <a:p>
-            <a:pPr indent="0" marL="0">
+            <a:pPr marL="0" indent="0">
               <a:buNone/>
             </a:pPr>
             <a:r>
@@ -5267,6 +5281,13 @@
           </a:solidFill>
           <a:ln/>
         </p:spPr>
+        <p:txBody>
+          <a:bodyPr/>
+          <a:lstStyle/>
+          <a:p>
+            <a:endParaRPr lang="en-US"/>
+          </a:p>
+        </p:txBody>
       </p:sp>
       <p:sp>
         <p:nvSpPr>
@@ -5289,7 +5310,7 @@
           <a:bodyPr wrap="square" rtlCol="0" anchor="ctr"/>
           <a:lstStyle/>
           <a:p>
-            <a:pPr algn="ctr" indent="0" marL="0">
+            <a:pPr marL="0" indent="0" algn="ctr">
               <a:buNone/>
             </a:pPr>
             <a:r>
@@ -5328,7 +5349,7 @@
           <a:bodyPr wrap="square" lIns="0" tIns="0" rIns="0" bIns="0" rtlCol="0" anchor="ctr"/>
           <a:lstStyle/>
           <a:p>
-            <a:pPr indent="0" marL="0">
+            <a:pPr marL="0" indent="0">
               <a:buNone/>
             </a:pPr>
             <a:r>
@@ -5367,7 +5388,7 @@
           <a:bodyPr wrap="square" lIns="0" tIns="0" rIns="0" bIns="0" rtlCol="0" anchor="ctr"/>
           <a:lstStyle/>
           <a:p>
-            <a:pPr indent="0" marL="0">
+            <a:pPr marL="0" indent="0">
               <a:buNone/>
             </a:pPr>
             <a:r>
@@ -5401,6 +5422,7 @@
         <a:solidFill>
           <a:srgbClr val="0D1117"/>
         </a:solidFill>
+        <a:effectLst/>
       </p:bgPr>
     </p:bg>
     <p:spTree>
@@ -5436,6 +5458,13 @@
           </a:solidFill>
           <a:ln/>
         </p:spPr>
+        <p:txBody>
+          <a:bodyPr/>
+          <a:lstStyle/>
+          <a:p>
+            <a:endParaRPr lang="en-US"/>
+          </a:p>
+        </p:txBody>
       </p:sp>
       <p:sp>
         <p:nvSpPr>
@@ -5458,11 +5487,11 @@
           <a:bodyPr wrap="square" lIns="0" tIns="0" rIns="0" bIns="0" rtlCol="0" anchor="ctr"/>
           <a:lstStyle/>
           <a:p>
-            <a:pPr indent="0" marL="0">
-              <a:buNone/>
-            </a:pPr>
-            <a:r>
-              <a:rPr lang="en-US" sz="1100" b="1" spc="300" kern="0" dirty="0">
+            <a:pPr marL="0" indent="0">
+              <a:buNone/>
+            </a:pPr>
+            <a:r>
+              <a:rPr lang="en-US" sz="1100" b="1" kern="0" spc="300" dirty="0">
                 <a:solidFill>
                   <a:srgbClr val="0A66C2"/>
                 </a:solidFill>
@@ -5497,7 +5526,7 @@
           <a:bodyPr wrap="square" lIns="0" tIns="0" rIns="0" bIns="0" rtlCol="0" anchor="ctr"/>
           <a:lstStyle/>
           <a:p>
-            <a:pPr indent="0" marL="0">
+            <a:pPr marL="0" indent="0">
               <a:buNone/>
             </a:pPr>
             <a:r>
@@ -5536,13 +5565,20 @@
           </a:solidFill>
           <a:ln/>
           <a:effectLst>
-            <a:outerShdw sx="100000" sy="100000" kx="0" ky="0" algn="bl" rotWithShape="0" blurRad="101600" dist="38100" dir="8100000">
+            <a:outerShdw blurRad="101600" dist="38100" dir="8100000" algn="bl" rotWithShape="0">
               <a:srgbClr val="000000">
                 <a:alpha val="30000"/>
               </a:srgbClr>
             </a:outerShdw>
           </a:effectLst>
         </p:spPr>
+        <p:txBody>
+          <a:bodyPr/>
+          <a:lstStyle/>
+          <a:p>
+            <a:endParaRPr lang="en-US"/>
+          </a:p>
+        </p:txBody>
       </p:sp>
       <p:sp>
         <p:nvSpPr>
@@ -5563,6 +5599,13 @@
           </a:solidFill>
           <a:ln/>
         </p:spPr>
+        <p:txBody>
+          <a:bodyPr/>
+          <a:lstStyle/>
+          <a:p>
+            <a:endParaRPr lang="en-US"/>
+          </a:p>
+        </p:txBody>
       </p:sp>
       <p:sp>
         <p:nvSpPr>
@@ -5583,13 +5626,20 @@
           </a:solidFill>
           <a:ln/>
           <a:effectLst>
-            <a:outerShdw sx="100000" sy="100000" kx="0" ky="0" algn="bl" rotWithShape="0" blurRad="101600" dist="38100" dir="8100000">
+            <a:outerShdw blurRad="101600" dist="38100" dir="8100000" algn="bl" rotWithShape="0">
               <a:srgbClr val="000000">
                 <a:alpha val="30000"/>
               </a:srgbClr>
             </a:outerShdw>
           </a:effectLst>
         </p:spPr>
+        <p:txBody>
+          <a:bodyPr/>
+          <a:lstStyle/>
+          <a:p>
+            <a:endParaRPr lang="en-US"/>
+          </a:p>
+        </p:txBody>
       </p:sp>
       <p:sp>
         <p:nvSpPr>
@@ -5612,7 +5662,7 @@
           <a:bodyPr wrap="square" rtlCol="0" anchor="ctr"/>
           <a:lstStyle/>
           <a:p>
-            <a:pPr algn="ctr" indent="0" marL="0">
+            <a:pPr marL="0" indent="0" algn="ctr">
               <a:buNone/>
             </a:pPr>
             <a:r>
@@ -5651,11 +5701,11 @@
           <a:bodyPr wrap="square" lIns="0" tIns="0" rIns="0" bIns="0" rtlCol="0" anchor="ctr"/>
           <a:lstStyle/>
           <a:p>
-            <a:pPr algn="ctr" indent="0" marL="0">
-              <a:buNone/>
-            </a:pPr>
-            <a:r>
-              <a:rPr lang="en-US" sz="1100" b="1" spc="200" kern="0" dirty="0">
+            <a:pPr marL="0" indent="0" algn="ctr">
+              <a:buNone/>
+            </a:pPr>
+            <a:r>
+              <a:rPr lang="en-US" sz="1100" b="1" kern="0" spc="200" dirty="0">
                 <a:solidFill>
                   <a:srgbClr val="8B949E"/>
                 </a:solidFill>
@@ -5690,7 +5740,7 @@
           <a:bodyPr wrap="square" lIns="0" tIns="0" rIns="0" bIns="0" rtlCol="0" anchor="ctr"/>
           <a:lstStyle/>
           <a:p>
-            <a:pPr algn="ctr" indent="0" marL="0">
+            <a:pPr marL="0" indent="0" algn="ctr">
               <a:buNone/>
             </a:pPr>
             <a:r>
@@ -5729,7 +5779,7 @@
           <a:bodyPr wrap="square" lIns="0" tIns="0" rIns="0" bIns="0" rtlCol="0" anchor="ctr"/>
           <a:lstStyle/>
           <a:p>
-            <a:pPr algn="ctr" indent="0" marL="0">
+            <a:pPr marL="0" indent="0" algn="ctr">
               <a:buNone/>
             </a:pPr>
             <a:r>
@@ -5768,7 +5818,7 @@
           <a:bodyPr wrap="square" lIns="0" tIns="0" rIns="0" bIns="0" rtlCol="0" anchor="ctr"/>
           <a:lstStyle/>
           <a:p>
-            <a:pPr indent="0" marL="0">
+            <a:pPr marL="0" indent="0">
               <a:buNone/>
             </a:pPr>
             <a:r>
@@ -5807,13 +5857,20 @@
           </a:solidFill>
           <a:ln/>
           <a:effectLst>
-            <a:outerShdw sx="100000" sy="100000" kx="0" ky="0" algn="bl" rotWithShape="0" blurRad="101600" dist="38100" dir="8100000">
+            <a:outerShdw blurRad="101600" dist="38100" dir="8100000" algn="bl" rotWithShape="0">
               <a:srgbClr val="000000">
                 <a:alpha val="30000"/>
               </a:srgbClr>
             </a:outerShdw>
           </a:effectLst>
         </p:spPr>
+        <p:txBody>
+          <a:bodyPr/>
+          <a:lstStyle/>
+          <a:p>
+            <a:endParaRPr lang="en-US"/>
+          </a:p>
+        </p:txBody>
       </p:sp>
       <p:sp>
         <p:nvSpPr>
@@ -5834,6 +5891,13 @@
           </a:solidFill>
           <a:ln/>
         </p:spPr>
+        <p:txBody>
+          <a:bodyPr/>
+          <a:lstStyle/>
+          <a:p>
+            <a:endParaRPr lang="en-US"/>
+          </a:p>
+        </p:txBody>
       </p:sp>
       <p:sp>
         <p:nvSpPr>
@@ -5856,7 +5920,7 @@
           <a:bodyPr wrap="square" rtlCol="0" anchor="ctr"/>
           <a:lstStyle/>
           <a:p>
-            <a:pPr algn="ctr" indent="0" marL="0">
+            <a:pPr marL="0" indent="0" algn="ctr">
               <a:buNone/>
             </a:pPr>
             <a:r>
@@ -5895,7 +5959,7 @@
           <a:bodyPr wrap="square" lIns="0" tIns="0" rIns="0" bIns="0" rtlCol="0" anchor="ctr"/>
           <a:lstStyle/>
           <a:p>
-            <a:pPr indent="0" marL="0">
+            <a:pPr marL="0" indent="0">
               <a:buNone/>
             </a:pPr>
             <a:r>
@@ -5934,7 +5998,7 @@
           <a:bodyPr wrap="square" lIns="0" tIns="0" rIns="0" bIns="0" rtlCol="0" anchor="ctr"/>
           <a:lstStyle/>
           <a:p>
-            <a:pPr indent="0" marL="0">
+            <a:pPr marL="0" indent="0">
               <a:buNone/>
             </a:pPr>
             <a:r>
@@ -5973,13 +6037,20 @@
           </a:solidFill>
           <a:ln/>
           <a:effectLst>
-            <a:outerShdw sx="100000" sy="100000" kx="0" ky="0" algn="bl" rotWithShape="0" blurRad="101600" dist="38100" dir="8100000">
+            <a:outerShdw blurRad="101600" dist="38100" dir="8100000" algn="bl" rotWithShape="0">
               <a:srgbClr val="000000">
                 <a:alpha val="30000"/>
               </a:srgbClr>
             </a:outerShdw>
           </a:effectLst>
         </p:spPr>
+        <p:txBody>
+          <a:bodyPr/>
+          <a:lstStyle/>
+          <a:p>
+            <a:endParaRPr lang="en-US"/>
+          </a:p>
+        </p:txBody>
       </p:sp>
       <p:sp>
         <p:nvSpPr>
@@ -6000,6 +6071,13 @@
           </a:solidFill>
           <a:ln/>
         </p:spPr>
+        <p:txBody>
+          <a:bodyPr/>
+          <a:lstStyle/>
+          <a:p>
+            <a:endParaRPr lang="en-US"/>
+          </a:p>
+        </p:txBody>
       </p:sp>
       <p:sp>
         <p:nvSpPr>
@@ -6022,7 +6100,7 @@
           <a:bodyPr wrap="square" rtlCol="0" anchor="ctr"/>
           <a:lstStyle/>
           <a:p>
-            <a:pPr algn="ctr" indent="0" marL="0">
+            <a:pPr marL="0" indent="0" algn="ctr">
               <a:buNone/>
             </a:pPr>
             <a:r>
@@ -6061,7 +6139,7 @@
           <a:bodyPr wrap="square" lIns="0" tIns="0" rIns="0" bIns="0" rtlCol="0" anchor="ctr"/>
           <a:lstStyle/>
           <a:p>
-            <a:pPr indent="0" marL="0">
+            <a:pPr marL="0" indent="0">
               <a:buNone/>
             </a:pPr>
             <a:r>
@@ -6100,7 +6178,7 @@
           <a:bodyPr wrap="square" lIns="0" tIns="0" rIns="0" bIns="0" rtlCol="0" anchor="ctr"/>
           <a:lstStyle/>
           <a:p>
-            <a:pPr indent="0" marL="0">
+            <a:pPr marL="0" indent="0">
               <a:buNone/>
             </a:pPr>
             <a:r>
@@ -6139,13 +6217,20 @@
           </a:solidFill>
           <a:ln/>
           <a:effectLst>
-            <a:outerShdw sx="100000" sy="100000" kx="0" ky="0" algn="bl" rotWithShape="0" blurRad="101600" dist="38100" dir="8100000">
+            <a:outerShdw blurRad="101600" dist="38100" dir="8100000" algn="bl" rotWithShape="0">
               <a:srgbClr val="000000">
                 <a:alpha val="30000"/>
               </a:srgbClr>
             </a:outerShdw>
           </a:effectLst>
         </p:spPr>
+        <p:txBody>
+          <a:bodyPr/>
+          <a:lstStyle/>
+          <a:p>
+            <a:endParaRPr lang="en-US"/>
+          </a:p>
+        </p:txBody>
       </p:sp>
       <p:sp>
         <p:nvSpPr>
@@ -6166,6 +6251,13 @@
           </a:solidFill>
           <a:ln/>
         </p:spPr>
+        <p:txBody>
+          <a:bodyPr/>
+          <a:lstStyle/>
+          <a:p>
+            <a:endParaRPr lang="en-US"/>
+          </a:p>
+        </p:txBody>
       </p:sp>
       <p:sp>
         <p:nvSpPr>
@@ -6188,7 +6280,7 @@
           <a:bodyPr wrap="square" rtlCol="0" anchor="ctr"/>
           <a:lstStyle/>
           <a:p>
-            <a:pPr algn="ctr" indent="0" marL="0">
+            <a:pPr marL="0" indent="0" algn="ctr">
               <a:buNone/>
             </a:pPr>
             <a:r>
@@ -6227,7 +6319,7 @@
           <a:bodyPr wrap="square" lIns="0" tIns="0" rIns="0" bIns="0" rtlCol="0" anchor="ctr"/>
           <a:lstStyle/>
           <a:p>
-            <a:pPr indent="0" marL="0">
+            <a:pPr marL="0" indent="0">
               <a:buNone/>
             </a:pPr>
             <a:r>
@@ -6266,7 +6358,7 @@
           <a:bodyPr wrap="square" lIns="0" tIns="0" rIns="0" bIns="0" rtlCol="0" anchor="ctr"/>
           <a:lstStyle/>
           <a:p>
-            <a:pPr indent="0" marL="0">
+            <a:pPr marL="0" indent="0">
               <a:buNone/>
             </a:pPr>
             <a:r>
@@ -6305,13 +6397,20 @@
           </a:solidFill>
           <a:ln/>
           <a:effectLst>
-            <a:outerShdw sx="100000" sy="100000" kx="0" ky="0" algn="bl" rotWithShape="0" blurRad="101600" dist="38100" dir="8100000">
+            <a:outerShdw blurRad="101600" dist="38100" dir="8100000" algn="bl" rotWithShape="0">
               <a:srgbClr val="000000">
                 <a:alpha val="30000"/>
               </a:srgbClr>
             </a:outerShdw>
           </a:effectLst>
         </p:spPr>
+        <p:txBody>
+          <a:bodyPr/>
+          <a:lstStyle/>
+          <a:p>
+            <a:endParaRPr lang="en-US"/>
+          </a:p>
+        </p:txBody>
       </p:sp>
       <p:sp>
         <p:nvSpPr>
@@ -6332,6 +6431,13 @@
           </a:solidFill>
           <a:ln/>
         </p:spPr>
+        <p:txBody>
+          <a:bodyPr/>
+          <a:lstStyle/>
+          <a:p>
+            <a:endParaRPr lang="en-US"/>
+          </a:p>
+        </p:txBody>
       </p:sp>
       <p:sp>
         <p:nvSpPr>
@@ -6354,7 +6460,7 @@
           <a:bodyPr wrap="square" rtlCol="0" anchor="ctr"/>
           <a:lstStyle/>
           <a:p>
-            <a:pPr algn="ctr" indent="0" marL="0">
+            <a:pPr marL="0" indent="0" algn="ctr">
               <a:buNone/>
             </a:pPr>
             <a:r>
@@ -6393,7 +6499,7 @@
           <a:bodyPr wrap="square" lIns="0" tIns="0" rIns="0" bIns="0" rtlCol="0" anchor="ctr"/>
           <a:lstStyle/>
           <a:p>
-            <a:pPr indent="0" marL="0">
+            <a:pPr marL="0" indent="0">
               <a:buNone/>
             </a:pPr>
             <a:r>
@@ -6432,7 +6538,7 @@
           <a:bodyPr wrap="square" lIns="0" tIns="0" rIns="0" bIns="0" rtlCol="0" anchor="ctr"/>
           <a:lstStyle/>
           <a:p>
-            <a:pPr indent="0" marL="0">
+            <a:pPr marL="0" indent="0">
               <a:buNone/>
             </a:pPr>
             <a:r>
@@ -6471,6 +6577,13 @@
           </a:solidFill>
           <a:ln/>
         </p:spPr>
+        <p:txBody>
+          <a:bodyPr/>
+          <a:lstStyle/>
+          <a:p>
+            <a:endParaRPr lang="en-US"/>
+          </a:p>
+        </p:txBody>
       </p:sp>
       <p:sp>
         <p:nvSpPr>
@@ -6493,7 +6606,7 @@
           <a:bodyPr wrap="square" rtlCol="0" anchor="ctr"/>
           <a:lstStyle/>
           <a:p>
-            <a:pPr algn="ctr" indent="0" marL="0">
+            <a:pPr marL="0" indent="0" algn="ctr">
               <a:buNone/>
             </a:pPr>
             <a:r>
@@ -6527,6 +6640,7 @@
         <a:solidFill>
           <a:srgbClr val="0D1117"/>
         </a:solidFill>
+        <a:effectLst/>
       </p:bgPr>
     </p:bg>
     <p:spTree>
@@ -6562,6 +6676,13 @@
           </a:solidFill>
           <a:ln/>
         </p:spPr>
+        <p:txBody>
+          <a:bodyPr/>
+          <a:lstStyle/>
+          <a:p>
+            <a:endParaRPr lang="en-US"/>
+          </a:p>
+        </p:txBody>
       </p:sp>
       <p:sp>
         <p:nvSpPr>
@@ -6584,11 +6705,11 @@
           <a:bodyPr wrap="square" lIns="0" tIns="0" rIns="0" bIns="0" rtlCol="0" anchor="ctr"/>
           <a:lstStyle/>
           <a:p>
-            <a:pPr indent="0" marL="0">
-              <a:buNone/>
-            </a:pPr>
-            <a:r>
-              <a:rPr lang="en-US" sz="1100" b="1" spc="300" kern="0" dirty="0">
+            <a:pPr marL="0" indent="0">
+              <a:buNone/>
+            </a:pPr>
+            <a:r>
+              <a:rPr lang="en-US" sz="1100" b="1" kern="0" spc="300" dirty="0">
                 <a:solidFill>
                   <a:srgbClr val="0A66C2"/>
                 </a:solidFill>
@@ -6623,7 +6744,7 @@
           <a:bodyPr wrap="square" lIns="0" tIns="0" rIns="0" bIns="0" rtlCol="0" anchor="ctr"/>
           <a:lstStyle/>
           <a:p>
-            <a:pPr indent="0" marL="0">
+            <a:pPr marL="0" indent="0">
               <a:buNone/>
             </a:pPr>
             <a:r>
@@ -6662,13 +6783,20 @@
           </a:solidFill>
           <a:ln/>
           <a:effectLst>
-            <a:outerShdw sx="100000" sy="100000" kx="0" ky="0" algn="bl" rotWithShape="0" blurRad="101600" dist="38100" dir="8100000">
+            <a:outerShdw blurRad="101600" dist="38100" dir="8100000" algn="bl" rotWithShape="0">
               <a:srgbClr val="000000">
                 <a:alpha val="30000"/>
               </a:srgbClr>
             </a:outerShdw>
           </a:effectLst>
         </p:spPr>
+        <p:txBody>
+          <a:bodyPr/>
+          <a:lstStyle/>
+          <a:p>
+            <a:endParaRPr lang="en-US"/>
+          </a:p>
+        </p:txBody>
       </p:sp>
       <p:sp>
         <p:nvSpPr>
@@ -6689,6 +6817,13 @@
           </a:solidFill>
           <a:ln/>
         </p:spPr>
+        <p:txBody>
+          <a:bodyPr/>
+          <a:lstStyle/>
+          <a:p>
+            <a:endParaRPr lang="en-US"/>
+          </a:p>
+        </p:txBody>
       </p:sp>
       <p:sp>
         <p:nvSpPr>
@@ -6711,7 +6846,7 @@
           <a:bodyPr wrap="square" lIns="0" tIns="0" rIns="0" bIns="0" rtlCol="0" anchor="ctr"/>
           <a:lstStyle/>
           <a:p>
-            <a:pPr indent="0" marL="0">
+            <a:pPr marL="0" indent="0">
               <a:buNone/>
             </a:pPr>
             <a:r>
@@ -6750,7 +6885,7 @@
           <a:bodyPr wrap="square" lIns="0" tIns="0" rIns="0" bIns="0" rtlCol="0" anchor="ctr"/>
           <a:lstStyle/>
           <a:p>
-            <a:pPr indent="0" marL="0">
+            <a:pPr marL="0" indent="0">
               <a:buNone/>
             </a:pPr>
             <a:r>
@@ -6789,11 +6924,11 @@
           <a:bodyPr wrap="square" lIns="0" tIns="0" rIns="0" bIns="0" rtlCol="0" anchor="ctr"/>
           <a:lstStyle/>
           <a:p>
-            <a:pPr indent="0" marL="0">
-              <a:buNone/>
-            </a:pPr>
-            <a:r>
-              <a:rPr lang="en-US" sz="1000" b="1" spc="200" kern="0" dirty="0">
+            <a:pPr marL="0" indent="0">
+              <a:buNone/>
+            </a:pPr>
+            <a:r>
+              <a:rPr lang="en-US" sz="1000" b="1" kern="0" spc="200" dirty="0">
                 <a:solidFill>
                   <a:srgbClr val="CC1016"/>
                 </a:solidFill>
@@ -6828,7 +6963,7 @@
           <a:bodyPr wrap="square" rtlCol="0" anchor="ctr"/>
           <a:lstStyle/>
           <a:p>
-            <a:pPr indent="0" marL="0">
+            <a:pPr marL="0" indent="0">
               <a:spcAft>
                 <a:spcPts val="400"/>
               </a:spcAft>
@@ -6848,7 +6983,7 @@
             <a:endParaRPr lang="en-US" sz="1100" dirty="0"/>
           </a:p>
           <a:p>
-            <a:pPr indent="0" marL="0">
+            <a:pPr marL="0" indent="0">
               <a:spcAft>
                 <a:spcPts val="400"/>
               </a:spcAft>
@@ -6868,7 +7003,7 @@
             <a:endParaRPr lang="en-US" sz="1100" dirty="0"/>
           </a:p>
           <a:p>
-            <a:pPr indent="0" marL="0">
+            <a:pPr marL="0" indent="0">
               <a:spcAft>
                 <a:spcPts val="400"/>
               </a:spcAft>
@@ -6888,7 +7023,7 @@
             <a:endParaRPr lang="en-US" sz="1100" dirty="0"/>
           </a:p>
           <a:p>
-            <a:pPr indent="0" marL="0">
+            <a:pPr marL="0" indent="0">
               <a:buNone/>
             </a:pPr>
             <a:r>
@@ -6927,13 +7062,20 @@
           </a:solidFill>
           <a:ln/>
           <a:effectLst>
-            <a:outerShdw sx="100000" sy="100000" kx="0" ky="0" algn="bl" rotWithShape="0" blurRad="101600" dist="38100" dir="8100000">
+            <a:outerShdw blurRad="101600" dist="38100" dir="8100000" algn="bl" rotWithShape="0">
               <a:srgbClr val="000000">
                 <a:alpha val="30000"/>
               </a:srgbClr>
             </a:outerShdw>
           </a:effectLst>
         </p:spPr>
+        <p:txBody>
+          <a:bodyPr/>
+          <a:lstStyle/>
+          <a:p>
+            <a:endParaRPr lang="en-US"/>
+          </a:p>
+        </p:txBody>
       </p:sp>
       <p:sp>
         <p:nvSpPr>
@@ -6954,6 +7096,13 @@
           </a:solidFill>
           <a:ln/>
         </p:spPr>
+        <p:txBody>
+          <a:bodyPr/>
+          <a:lstStyle/>
+          <a:p>
+            <a:endParaRPr lang="en-US"/>
+          </a:p>
+        </p:txBody>
       </p:sp>
       <p:sp>
         <p:nvSpPr>
@@ -6976,11 +7125,11 @@
           <a:bodyPr wrap="square" lIns="0" tIns="0" rIns="0" bIns="0" rtlCol="0" anchor="ctr"/>
           <a:lstStyle/>
           <a:p>
-            <a:pPr indent="0" marL="0">
-              <a:buNone/>
-            </a:pPr>
-            <a:r>
-              <a:rPr lang="en-US" sz="1000" b="1" spc="200" kern="0" dirty="0">
+            <a:pPr marL="0" indent="0">
+              <a:buNone/>
+            </a:pPr>
+            <a:r>
+              <a:rPr lang="en-US" sz="1000" b="1" kern="0" spc="200" dirty="0">
                 <a:solidFill>
                   <a:srgbClr val="CC1016"/>
                 </a:solidFill>
@@ -7015,7 +7164,7 @@
           <a:bodyPr wrap="square" lIns="0" tIns="0" rIns="0" bIns="0" rtlCol="0" anchor="ctr"/>
           <a:lstStyle/>
           <a:p>
-            <a:pPr indent="0" marL="0">
+            <a:pPr marL="0" indent="0">
               <a:buNone/>
             </a:pPr>
             <a:r>
@@ -7054,7 +7203,7 @@
           <a:bodyPr wrap="square" lIns="0" tIns="0" rIns="0" bIns="0" rtlCol="0" anchor="ctr"/>
           <a:lstStyle/>
           <a:p>
-            <a:pPr indent="0" marL="0">
+            <a:pPr marL="0" indent="0">
               <a:buNone/>
             </a:pPr>
             <a:r>
@@ -7093,13 +7242,20 @@
           </a:solidFill>
           <a:ln/>
           <a:effectLst>
-            <a:outerShdw sx="100000" sy="100000" kx="0" ky="0" algn="bl" rotWithShape="0" blurRad="101600" dist="38100" dir="8100000">
+            <a:outerShdw blurRad="101600" dist="38100" dir="8100000" algn="bl" rotWithShape="0">
               <a:srgbClr val="000000">
                 <a:alpha val="30000"/>
               </a:srgbClr>
             </a:outerShdw>
           </a:effectLst>
         </p:spPr>
+        <p:txBody>
+          <a:bodyPr/>
+          <a:lstStyle/>
+          <a:p>
+            <a:endParaRPr lang="en-US"/>
+          </a:p>
+        </p:txBody>
       </p:sp>
       <p:sp>
         <p:nvSpPr>
@@ -7120,6 +7276,13 @@
           </a:solidFill>
           <a:ln/>
         </p:spPr>
+        <p:txBody>
+          <a:bodyPr/>
+          <a:lstStyle/>
+          <a:p>
+            <a:endParaRPr lang="en-US"/>
+          </a:p>
+        </p:txBody>
       </p:sp>
       <p:sp>
         <p:nvSpPr>
@@ -7142,11 +7305,11 @@
           <a:bodyPr wrap="square" lIns="0" tIns="0" rIns="0" bIns="0" rtlCol="0" anchor="ctr"/>
           <a:lstStyle/>
           <a:p>
-            <a:pPr indent="0" marL="0">
-              <a:buNone/>
-            </a:pPr>
-            <a:r>
-              <a:rPr lang="en-US" sz="1000" b="1" spc="200" kern="0" dirty="0">
+            <a:pPr marL="0" indent="0">
+              <a:buNone/>
+            </a:pPr>
+            <a:r>
+              <a:rPr lang="en-US" sz="1000" b="1" kern="0" spc="200" dirty="0">
                 <a:solidFill>
                   <a:srgbClr val="E89F17"/>
                 </a:solidFill>
@@ -7181,7 +7344,7 @@
           <a:bodyPr wrap="square" lIns="0" tIns="0" rIns="0" bIns="0" rtlCol="0" anchor="ctr"/>
           <a:lstStyle/>
           <a:p>
-            <a:pPr indent="0" marL="0">
+            <a:pPr marL="0" indent="0">
               <a:buNone/>
             </a:pPr>
             <a:r>
@@ -7220,7 +7383,7 @@
           <a:bodyPr wrap="square" lIns="0" tIns="0" rIns="0" bIns="0" rtlCol="0" anchor="ctr"/>
           <a:lstStyle/>
           <a:p>
-            <a:pPr indent="0" marL="0">
+            <a:pPr marL="0" indent="0">
               <a:buNone/>
             </a:pPr>
             <a:r>
@@ -7259,7 +7422,7 @@
           <a:bodyPr wrap="square" lIns="0" tIns="0" rIns="0" bIns="0" rtlCol="0" anchor="ctr"/>
           <a:lstStyle/>
           <a:p>
-            <a:pPr indent="0" marL="0">
+            <a:pPr marL="0" indent="0">
               <a:buNone/>
             </a:pPr>
             <a:r>
@@ -7293,6 +7456,7 @@
         <a:solidFill>
           <a:srgbClr val="0D1117"/>
         </a:solidFill>
+        <a:effectLst/>
       </p:bgPr>
     </p:bg>
     <p:spTree>
@@ -7328,6 +7492,13 @@
           </a:solidFill>
           <a:ln/>
         </p:spPr>
+        <p:txBody>
+          <a:bodyPr/>
+          <a:lstStyle/>
+          <a:p>
+            <a:endParaRPr lang="en-US"/>
+          </a:p>
+        </p:txBody>
       </p:sp>
       <p:sp>
         <p:nvSpPr>
@@ -7350,11 +7521,11 @@
           <a:bodyPr wrap="square" lIns="0" tIns="0" rIns="0" bIns="0" rtlCol="0" anchor="ctr"/>
           <a:lstStyle/>
           <a:p>
-            <a:pPr indent="0" marL="0">
-              <a:buNone/>
-            </a:pPr>
-            <a:r>
-              <a:rPr lang="en-US" sz="1100" b="1" spc="300" kern="0" dirty="0">
+            <a:pPr marL="0" indent="0">
+              <a:buNone/>
+            </a:pPr>
+            <a:r>
+              <a:rPr lang="en-US" sz="1100" b="1" kern="0" spc="300" dirty="0">
                 <a:solidFill>
                   <a:srgbClr val="0A66C2"/>
                 </a:solidFill>
@@ -7389,7 +7560,7 @@
           <a:bodyPr wrap="square" lIns="0" tIns="0" rIns="0" bIns="0" rtlCol="0" anchor="ctr"/>
           <a:lstStyle/>
           <a:p>
-            <a:pPr indent="0" marL="0">
+            <a:pPr marL="0" indent="0">
               <a:buNone/>
             </a:pPr>
             <a:r>
@@ -7428,13 +7599,20 @@
           </a:solidFill>
           <a:ln/>
           <a:effectLst>
-            <a:outerShdw sx="100000" sy="100000" kx="0" ky="0" algn="bl" rotWithShape="0" blurRad="101600" dist="38100" dir="8100000">
+            <a:outerShdw blurRad="101600" dist="38100" dir="8100000" algn="bl" rotWithShape="0">
               <a:srgbClr val="000000">
                 <a:alpha val="30000"/>
               </a:srgbClr>
             </a:outerShdw>
           </a:effectLst>
         </p:spPr>
+        <p:txBody>
+          <a:bodyPr/>
+          <a:lstStyle/>
+          <a:p>
+            <a:endParaRPr lang="en-US"/>
+          </a:p>
+        </p:txBody>
       </p:sp>
       <p:sp>
         <p:nvSpPr>
@@ -7455,6 +7633,13 @@
           </a:solidFill>
           <a:ln/>
         </p:spPr>
+        <p:txBody>
+          <a:bodyPr/>
+          <a:lstStyle/>
+          <a:p>
+            <a:endParaRPr lang="en-US"/>
+          </a:p>
+        </p:txBody>
       </p:sp>
       <p:sp>
         <p:nvSpPr>
@@ -7477,11 +7662,11 @@
           <a:bodyPr wrap="square" lIns="0" tIns="0" rIns="0" bIns="0" rtlCol="0" anchor="ctr"/>
           <a:lstStyle/>
           <a:p>
-            <a:pPr indent="0" marL="0">
-              <a:buNone/>
-            </a:pPr>
-            <a:r>
-              <a:rPr lang="en-US" sz="1100" b="1" spc="300" kern="0" dirty="0">
+            <a:pPr marL="0" indent="0">
+              <a:buNone/>
+            </a:pPr>
+            <a:r>
+              <a:rPr lang="en-US" sz="1100" b="1" kern="0" spc="300" dirty="0">
                 <a:solidFill>
                   <a:srgbClr val="0A66C2"/>
                 </a:solidFill>
@@ -7516,7 +7701,7 @@
           <a:bodyPr wrap="square" lIns="0" tIns="0" rIns="0" bIns="0" rtlCol="0" anchor="ctr"/>
           <a:lstStyle/>
           <a:p>
-            <a:pPr indent="0" marL="0">
+            <a:pPr marL="0" indent="0">
               <a:buNone/>
             </a:pPr>
             <a:r>
@@ -7530,9 +7715,6 @@
               </a:rPr>
               <a:t>If we </a:t>
             </a:r>
-            <a:pPr indent="0" marL="0">
-              <a:buNone/>
-            </a:pPr>
             <a:r>
               <a:rPr lang="en-US" sz="1800" b="1" i="1" dirty="0">
                 <a:solidFill>
@@ -7544,9 +7726,6 @@
               </a:rPr>
               <a:t>make LinkedIn Learning visible on the home page </a:t>
             </a:r>
-            <a:pPr indent="0" marL="0">
-              <a:buNone/>
-            </a:pPr>
             <a:r>
               <a:rPr lang="en-US" sz="1800" i="1" dirty="0">
                 <a:solidFill>
@@ -7558,9 +7737,6 @@
               </a:rPr>
               <a:t>and </a:t>
             </a:r>
-            <a:pPr indent="0" marL="0">
-              <a:buNone/>
-            </a:pPr>
             <a:r>
               <a:rPr lang="en-US" sz="1800" b="1" i="1" dirty="0">
                 <a:solidFill>
@@ -7572,9 +7748,6 @@
               </a:rPr>
               <a:t>personalize course recommendations to job-skill gaps</a:t>
             </a:r>
-            <a:pPr indent="0" marL="0">
-              <a:buNone/>
-            </a:pPr>
             <a:r>
               <a:rPr lang="en-US" sz="1800" i="1" dirty="0">
                 <a:solidFill>
@@ -7611,7 +7784,7 @@
           <a:bodyPr wrap="square" lIns="0" tIns="0" rIns="0" bIns="0" rtlCol="0" anchor="ctr"/>
           <a:lstStyle/>
           <a:p>
-            <a:pPr indent="0" marL="0">
+            <a:pPr marL="0" indent="0">
               <a:buNone/>
             </a:pPr>
             <a:r>
@@ -7650,13 +7823,20 @@
           </a:solidFill>
           <a:ln/>
           <a:effectLst>
-            <a:outerShdw sx="100000" sy="100000" kx="0" ky="0" algn="bl" rotWithShape="0" blurRad="101600" dist="38100" dir="8100000">
+            <a:outerShdw blurRad="101600" dist="38100" dir="8100000" algn="bl" rotWithShape="0">
               <a:srgbClr val="000000">
                 <a:alpha val="30000"/>
               </a:srgbClr>
             </a:outerShdw>
           </a:effectLst>
         </p:spPr>
+        <p:txBody>
+          <a:bodyPr/>
+          <a:lstStyle/>
+          <a:p>
+            <a:endParaRPr lang="en-US"/>
+          </a:p>
+        </p:txBody>
       </p:sp>
       <p:sp>
         <p:nvSpPr>
@@ -7677,6 +7857,13 @@
           </a:solidFill>
           <a:ln/>
         </p:spPr>
+        <p:txBody>
+          <a:bodyPr/>
+          <a:lstStyle/>
+          <a:p>
+            <a:endParaRPr lang="en-US"/>
+          </a:p>
+        </p:txBody>
       </p:sp>
       <p:sp>
         <p:nvSpPr>
@@ -7699,7 +7886,7 @@
           <a:bodyPr wrap="square" rtlCol="0" anchor="ctr"/>
           <a:lstStyle/>
           <a:p>
-            <a:pPr algn="ctr" indent="0" marL="0">
+            <a:pPr marL="0" indent="0" algn="ctr">
               <a:buNone/>
             </a:pPr>
             <a:r>
@@ -7735,7 +7922,7 @@
           <a:bodyPr wrap="square" lIns="0" tIns="0" rIns="0" bIns="0" rtlCol="0" anchor="ctr"/>
           <a:lstStyle/>
           <a:p>
-            <a:pPr indent="0" marL="0">
+            <a:pPr marL="0" indent="0">
               <a:buNone/>
             </a:pPr>
             <a:r>
@@ -7774,7 +7961,7 @@
           <a:bodyPr wrap="square" lIns="0" tIns="0" rIns="0" bIns="0" rtlCol="0" anchor="ctr"/>
           <a:lstStyle/>
           <a:p>
-            <a:pPr indent="0" marL="0">
+            <a:pPr marL="0" indent="0">
               <a:buNone/>
             </a:pPr>
             <a:r>
@@ -7791,7 +7978,7 @@
             <a:endParaRPr lang="en-US" sz="1100" dirty="0"/>
           </a:p>
           <a:p>
-            <a:pPr indent="0" marL="0">
+            <a:pPr marL="0" indent="0">
               <a:buNone/>
             </a:pPr>
             <a:r>
@@ -7830,13 +8017,20 @@
           </a:solidFill>
           <a:ln/>
           <a:effectLst>
-            <a:outerShdw sx="100000" sy="100000" kx="0" ky="0" algn="bl" rotWithShape="0" blurRad="101600" dist="38100" dir="8100000">
+            <a:outerShdw blurRad="101600" dist="38100" dir="8100000" algn="bl" rotWithShape="0">
               <a:srgbClr val="000000">
                 <a:alpha val="30000"/>
               </a:srgbClr>
             </a:outerShdw>
           </a:effectLst>
         </p:spPr>
+        <p:txBody>
+          <a:bodyPr/>
+          <a:lstStyle/>
+          <a:p>
+            <a:endParaRPr lang="en-US"/>
+          </a:p>
+        </p:txBody>
       </p:sp>
       <p:sp>
         <p:nvSpPr>
@@ -7857,6 +8051,13 @@
           </a:solidFill>
           <a:ln/>
         </p:spPr>
+        <p:txBody>
+          <a:bodyPr/>
+          <a:lstStyle/>
+          <a:p>
+            <a:endParaRPr lang="en-US"/>
+          </a:p>
+        </p:txBody>
       </p:sp>
       <p:sp>
         <p:nvSpPr>
@@ -7879,7 +8080,7 @@
           <a:bodyPr wrap="square" rtlCol="0" anchor="ctr"/>
           <a:lstStyle/>
           <a:p>
-            <a:pPr algn="ctr" indent="0" marL="0">
+            <a:pPr marL="0" indent="0" algn="ctr">
               <a:buNone/>
             </a:pPr>
             <a:r>
@@ -7915,7 +8116,7 @@
           <a:bodyPr wrap="square" lIns="0" tIns="0" rIns="0" bIns="0" rtlCol="0" anchor="ctr"/>
           <a:lstStyle/>
           <a:p>
-            <a:pPr indent="0" marL="0">
+            <a:pPr marL="0" indent="0">
               <a:buNone/>
             </a:pPr>
             <a:r>
@@ -7954,7 +8155,7 @@
           <a:bodyPr wrap="square" lIns="0" tIns="0" rIns="0" bIns="0" rtlCol="0" anchor="ctr"/>
           <a:lstStyle/>
           <a:p>
-            <a:pPr indent="0" marL="0">
+            <a:pPr marL="0" indent="0">
               <a:buNone/>
             </a:pPr>
             <a:r>
@@ -7971,7 +8172,7 @@
             <a:endParaRPr lang="en-US" sz="1100" dirty="0"/>
           </a:p>
           <a:p>
-            <a:pPr indent="0" marL="0">
+            <a:pPr marL="0" indent="0">
               <a:buNone/>
             </a:pPr>
             <a:r>
@@ -8010,13 +8211,20 @@
           </a:solidFill>
           <a:ln/>
           <a:effectLst>
-            <a:outerShdw sx="100000" sy="100000" kx="0" ky="0" algn="bl" rotWithShape="0" blurRad="101600" dist="38100" dir="8100000">
+            <a:outerShdw blurRad="101600" dist="38100" dir="8100000" algn="bl" rotWithShape="0">
               <a:srgbClr val="000000">
                 <a:alpha val="30000"/>
               </a:srgbClr>
             </a:outerShdw>
           </a:effectLst>
         </p:spPr>
+        <p:txBody>
+          <a:bodyPr/>
+          <a:lstStyle/>
+          <a:p>
+            <a:endParaRPr lang="en-US"/>
+          </a:p>
+        </p:txBody>
       </p:sp>
       <p:sp>
         <p:nvSpPr>
@@ -8037,6 +8245,13 @@
           </a:solidFill>
           <a:ln/>
         </p:spPr>
+        <p:txBody>
+          <a:bodyPr/>
+          <a:lstStyle/>
+          <a:p>
+            <a:endParaRPr lang="en-US"/>
+          </a:p>
+        </p:txBody>
       </p:sp>
       <p:sp>
         <p:nvSpPr>
@@ -8059,7 +8274,7 @@
           <a:bodyPr wrap="square" rtlCol="0" anchor="ctr"/>
           <a:lstStyle/>
           <a:p>
-            <a:pPr algn="ctr" indent="0" marL="0">
+            <a:pPr marL="0" indent="0" algn="ctr">
               <a:buNone/>
             </a:pPr>
             <a:r>
@@ -8095,7 +8310,7 @@
           <a:bodyPr wrap="square" lIns="0" tIns="0" rIns="0" bIns="0" rtlCol="0" anchor="ctr"/>
           <a:lstStyle/>
           <a:p>
-            <a:pPr indent="0" marL="0">
+            <a:pPr marL="0" indent="0">
               <a:buNone/>
             </a:pPr>
             <a:r>
@@ -8134,7 +8349,7 @@
           <a:bodyPr wrap="square" lIns="0" tIns="0" rIns="0" bIns="0" rtlCol="0" anchor="ctr"/>
           <a:lstStyle/>
           <a:p>
-            <a:pPr indent="0" marL="0">
+            <a:pPr marL="0" indent="0">
               <a:buNone/>
             </a:pPr>
             <a:r>
@@ -8151,7 +8366,7 @@
             <a:endParaRPr lang="en-US" sz="1100" dirty="0"/>
           </a:p>
           <a:p>
-            <a:pPr indent="0" marL="0">
+            <a:pPr marL="0" indent="0">
               <a:buNone/>
             </a:pPr>
             <a:r>
@@ -8190,7 +8405,7 @@
           <a:bodyPr wrap="square" lIns="0" tIns="0" rIns="0" bIns="0" rtlCol="0" anchor="ctr"/>
           <a:lstStyle/>
           <a:p>
-            <a:pPr indent="0" marL="0">
+            <a:pPr marL="0" indent="0">
               <a:buNone/>
             </a:pPr>
             <a:r>
@@ -8224,6 +8439,7 @@
         <a:solidFill>
           <a:srgbClr val="0D1117"/>
         </a:solidFill>
+        <a:effectLst/>
       </p:bgPr>
     </p:bg>
     <p:spTree>
@@ -8259,6 +8475,13 @@
           </a:solidFill>
           <a:ln/>
         </p:spPr>
+        <p:txBody>
+          <a:bodyPr/>
+          <a:lstStyle/>
+          <a:p>
+            <a:endParaRPr lang="en-US"/>
+          </a:p>
+        </p:txBody>
       </p:sp>
       <p:sp>
         <p:nvSpPr>
@@ -8281,11 +8504,11 @@
           <a:bodyPr wrap="square" lIns="0" tIns="0" rIns="0" bIns="0" rtlCol="0" anchor="ctr"/>
           <a:lstStyle/>
           <a:p>
-            <a:pPr indent="0" marL="0">
-              <a:buNone/>
-            </a:pPr>
-            <a:r>
-              <a:rPr lang="en-US" sz="1100" b="1" spc="300" kern="0" dirty="0">
+            <a:pPr marL="0" indent="0">
+              <a:buNone/>
+            </a:pPr>
+            <a:r>
+              <a:rPr lang="en-US" sz="1100" b="1" kern="0" spc="300" dirty="0">
                 <a:solidFill>
                   <a:srgbClr val="0A66C2"/>
                 </a:solidFill>
@@ -8320,7 +8543,7 @@
           <a:bodyPr wrap="square" lIns="0" tIns="0" rIns="0" bIns="0" rtlCol="0" anchor="ctr"/>
           <a:lstStyle/>
           <a:p>
-            <a:pPr indent="0" marL="0">
+            <a:pPr marL="0" indent="0">
               <a:buNone/>
             </a:pPr>
             <a:r>
@@ -8332,7 +8555,7 @@
                 <a:ea typeface="Georgia" pitchFamily="34" charset="-122"/>
                 <a:cs typeface="Georgia" pitchFamily="34" charset="-120"/>
               </a:rPr>
-              <a:t>Meet Parikshit Ambhore</a:t>
+              <a:t>Meet Jamie Dimon</a:t>
             </a:r>
             <a:endParaRPr lang="en-US" sz="2600" dirty="0"/>
           </a:p>
@@ -8359,13 +8582,20 @@
           </a:solidFill>
           <a:ln/>
           <a:effectLst>
-            <a:outerShdw sx="100000" sy="100000" kx="0" ky="0" algn="bl" rotWithShape="0" blurRad="101600" dist="38100" dir="8100000">
+            <a:outerShdw blurRad="101600" dist="38100" dir="8100000" algn="bl" rotWithShape="0">
               <a:srgbClr val="000000">
                 <a:alpha val="30000"/>
               </a:srgbClr>
             </a:outerShdw>
           </a:effectLst>
         </p:spPr>
+        <p:txBody>
+          <a:bodyPr/>
+          <a:lstStyle/>
+          <a:p>
+            <a:endParaRPr lang="en-US"/>
+          </a:p>
+        </p:txBody>
       </p:sp>
       <p:sp>
         <p:nvSpPr>
@@ -8386,6 +8616,13 @@
           </a:solidFill>
           <a:ln/>
         </p:spPr>
+        <p:txBody>
+          <a:bodyPr/>
+          <a:lstStyle/>
+          <a:p>
+            <a:endParaRPr lang="en-US"/>
+          </a:p>
+        </p:txBody>
       </p:sp>
       <p:sp>
         <p:nvSpPr>
@@ -8408,7 +8645,7 @@
           <a:bodyPr wrap="square" rtlCol="0" anchor="ctr"/>
           <a:lstStyle/>
           <a:p>
-            <a:pPr algn="ctr" indent="0" marL="0">
+            <a:pPr marL="0" indent="0" algn="ctr">
               <a:buNone/>
             </a:pPr>
             <a:r>
@@ -8420,7 +8657,7 @@
                 <a:ea typeface="Arial" pitchFamily="34" charset="-122"/>
                 <a:cs typeface="Arial" pitchFamily="34" charset="-120"/>
               </a:rPr>
-              <a:t>PA</a:t>
+              <a:t>JD</a:t>
             </a:r>
             <a:endParaRPr lang="en-US" sz="3600" dirty="0"/>
           </a:p>
@@ -8447,7 +8684,7 @@
           <a:bodyPr wrap="square" lIns="0" tIns="0" rIns="0" bIns="0" rtlCol="0" anchor="ctr"/>
           <a:lstStyle/>
           <a:p>
-            <a:pPr algn="ctr" indent="0" marL="0">
+            <a:pPr marL="0" indent="0" algn="ctr">
               <a:buNone/>
             </a:pPr>
             <a:r>
@@ -8459,7 +8696,7 @@
                 <a:ea typeface="Georgia" pitchFamily="34" charset="-122"/>
                 <a:cs typeface="Georgia" pitchFamily="34" charset="-120"/>
               </a:rPr>
-              <a:t>Parikshit Ambhore</a:t>
+              <a:t>Jamie Dimon</a:t>
             </a:r>
             <a:endParaRPr lang="en-US" sz="1700" dirty="0"/>
           </a:p>
@@ -8486,11 +8723,11 @@
           <a:bodyPr wrap="square" lIns="0" tIns="0" rIns="0" bIns="0" rtlCol="0" anchor="ctr"/>
           <a:lstStyle/>
           <a:p>
-            <a:pPr algn="ctr" indent="0" marL="0">
-              <a:buNone/>
-            </a:pPr>
-            <a:r>
-              <a:rPr lang="en-US" sz="1000" b="1" spc="200" kern="0" dirty="0">
+            <a:pPr marL="0" indent="0" algn="ctr">
+              <a:buNone/>
+            </a:pPr>
+            <a:r>
+              <a:rPr lang="en-US" sz="1000" b="1" kern="0" spc="200" dirty="0">
                 <a:solidFill>
                   <a:srgbClr val="1B8FE8"/>
                 </a:solidFill>
@@ -8523,6 +8760,13 @@
           </a:solidFill>
           <a:ln/>
         </p:spPr>
+        <p:txBody>
+          <a:bodyPr/>
+          <a:lstStyle/>
+          <a:p>
+            <a:endParaRPr lang="en-US"/>
+          </a:p>
+        </p:txBody>
       </p:sp>
       <p:sp>
         <p:nvSpPr>
@@ -8545,7 +8789,7 @@
           <a:bodyPr wrap="square" lIns="0" tIns="0" rIns="0" bIns="0" rtlCol="0" anchor="ctr"/>
           <a:lstStyle/>
           <a:p>
-            <a:pPr algn="ctr" indent="0" marL="0">
+            <a:pPr marL="0" indent="0" algn="ctr">
               <a:buNone/>
             </a:pPr>
             <a:r>
@@ -8584,7 +8828,7 @@
           <a:bodyPr wrap="square" lIns="0" tIns="0" rIns="0" bIns="0" rtlCol="0" anchor="ctr"/>
           <a:lstStyle/>
           <a:p>
-            <a:pPr algn="ctr" indent="0" marL="0">
+            <a:pPr marL="0" indent="0" algn="ctr">
               <a:buNone/>
             </a:pPr>
             <a:r>
@@ -8623,13 +8867,20 @@
           </a:solidFill>
           <a:ln/>
           <a:effectLst>
-            <a:outerShdw sx="100000" sy="100000" kx="0" ky="0" algn="bl" rotWithShape="0" blurRad="101600" dist="38100" dir="8100000">
+            <a:outerShdw blurRad="101600" dist="38100" dir="8100000" algn="bl" rotWithShape="0">
               <a:srgbClr val="000000">
                 <a:alpha val="30000"/>
               </a:srgbClr>
             </a:outerShdw>
           </a:effectLst>
         </p:spPr>
+        <p:txBody>
+          <a:bodyPr/>
+          <a:lstStyle/>
+          <a:p>
+            <a:endParaRPr lang="en-US"/>
+          </a:p>
+        </p:txBody>
       </p:sp>
       <p:sp>
         <p:nvSpPr>
@@ -8650,6 +8901,13 @@
           </a:solidFill>
           <a:ln/>
         </p:spPr>
+        <p:txBody>
+          <a:bodyPr/>
+          <a:lstStyle/>
+          <a:p>
+            <a:endParaRPr lang="en-US"/>
+          </a:p>
+        </p:txBody>
       </p:sp>
       <p:sp>
         <p:nvSpPr>
@@ -8672,7 +8930,7 @@
           <a:bodyPr wrap="square" lIns="0" tIns="0" rIns="0" bIns="0" rtlCol="0" anchor="ctr"/>
           <a:lstStyle/>
           <a:p>
-            <a:pPr indent="0" marL="0">
+            <a:pPr marL="0" indent="0">
               <a:buNone/>
             </a:pPr>
             <a:r>
@@ -8711,7 +8969,7 @@
           <a:bodyPr wrap="square" lIns="0" tIns="0" rIns="0" bIns="0" rtlCol="0" anchor="ctr"/>
           <a:lstStyle/>
           <a:p>
-            <a:pPr indent="0" marL="0">
+            <a:pPr marL="0" indent="0">
               <a:buNone/>
             </a:pPr>
             <a:r>
@@ -8750,7 +9008,7 @@
           <a:bodyPr wrap="square" lIns="0" tIns="0" rIns="0" bIns="0" rtlCol="0" anchor="ctr"/>
           <a:lstStyle/>
           <a:p>
-            <a:pPr indent="0" marL="0">
+            <a:pPr marL="0" indent="0">
               <a:buNone/>
             </a:pPr>
             <a:r>
@@ -8762,7 +9020,7 @@
                 <a:ea typeface="Calibri" pitchFamily="34" charset="-122"/>
                 <a:cs typeface="Calibri" pitchFamily="34" charset="-120"/>
               </a:rPr>
-              <a:t>Parikshit earns between $50K and $65K annually, aiming for a promotion within 1–2 years through targeted learning and skill development.</a:t>
+              <a:t>Jamie earns between $50K and $65K annually, aiming for a promotion within 1–2 years through targeted learning and skill development.</a:t>
             </a:r>
             <a:endParaRPr lang="en-US" sz="1200" dirty="0"/>
           </a:p>
@@ -8789,6 +9047,13 @@
           </a:solidFill>
           <a:ln/>
         </p:spPr>
+        <p:txBody>
+          <a:bodyPr/>
+          <a:lstStyle/>
+          <a:p>
+            <a:endParaRPr lang="en-US"/>
+          </a:p>
+        </p:txBody>
       </p:sp>
       <p:sp>
         <p:nvSpPr>
@@ -8811,7 +9076,7 @@
           <a:bodyPr wrap="square" rtlCol="0" anchor="ctr"/>
           <a:lstStyle/>
           <a:p>
-            <a:pPr algn="ctr" indent="0" marL="0">
+            <a:pPr marL="0" indent="0" algn="ctr">
               <a:buNone/>
             </a:pPr>
             <a:r>
@@ -8850,7 +9115,7 @@
           <a:bodyPr wrap="square" rtlCol="0" anchor="t"/>
           <a:lstStyle/>
           <a:p>
-            <a:pPr algn="ctr" indent="0" marL="0">
+            <a:pPr marL="0" indent="0" algn="ctr">
               <a:buNone/>
             </a:pPr>
             <a:r>
@@ -8889,7 +9154,7 @@
           <a:bodyPr wrap="square" rtlCol="0" anchor="t"/>
           <a:lstStyle/>
           <a:p>
-            <a:pPr algn="ctr" indent="0" marL="0">
+            <a:pPr marL="0" indent="0" algn="ctr">
               <a:buNone/>
             </a:pPr>
             <a:r>
@@ -8928,6 +9193,13 @@
           </a:solidFill>
           <a:ln/>
         </p:spPr>
+        <p:txBody>
+          <a:bodyPr/>
+          <a:lstStyle/>
+          <a:p>
+            <a:endParaRPr lang="en-US"/>
+          </a:p>
+        </p:txBody>
       </p:sp>
       <p:sp>
         <p:nvSpPr>
@@ -8950,7 +9222,7 @@
           <a:bodyPr wrap="square" rtlCol="0" anchor="ctr"/>
           <a:lstStyle/>
           <a:p>
-            <a:pPr algn="ctr" indent="0" marL="0">
+            <a:pPr marL="0" indent="0" algn="ctr">
               <a:buNone/>
             </a:pPr>
             <a:r>
@@ -8989,7 +9261,7 @@
           <a:bodyPr wrap="square" rtlCol="0" anchor="t"/>
           <a:lstStyle/>
           <a:p>
-            <a:pPr algn="ctr" indent="0" marL="0">
+            <a:pPr marL="0" indent="0" algn="ctr">
               <a:buNone/>
             </a:pPr>
             <a:r>
@@ -9028,7 +9300,7 @@
           <a:bodyPr wrap="square" rtlCol="0" anchor="t"/>
           <a:lstStyle/>
           <a:p>
-            <a:pPr algn="ctr" indent="0" marL="0">
+            <a:pPr marL="0" indent="0" algn="ctr">
               <a:buNone/>
             </a:pPr>
             <a:r>
@@ -9067,7 +9339,7 @@
           <a:bodyPr wrap="square" lIns="0" tIns="0" rIns="0" bIns="0" rtlCol="0" anchor="ctr"/>
           <a:lstStyle/>
           <a:p>
-            <a:pPr indent="0" marL="0">
+            <a:pPr marL="0" indent="0">
               <a:buNone/>
             </a:pPr>
             <a:r>
@@ -9101,6 +9373,7 @@
         <a:solidFill>
           <a:srgbClr val="0D1117"/>
         </a:solidFill>
+        <a:effectLst/>
       </p:bgPr>
     </p:bg>
     <p:spTree>
@@ -9136,6 +9409,13 @@
           </a:solidFill>
           <a:ln/>
         </p:spPr>
+        <p:txBody>
+          <a:bodyPr/>
+          <a:lstStyle/>
+          <a:p>
+            <a:endParaRPr lang="en-US"/>
+          </a:p>
+        </p:txBody>
       </p:sp>
       <p:sp>
         <p:nvSpPr>
@@ -9158,11 +9438,11 @@
           <a:bodyPr wrap="square" lIns="0" tIns="0" rIns="0" bIns="0" rtlCol="0" anchor="ctr"/>
           <a:lstStyle/>
           <a:p>
-            <a:pPr indent="0" marL="0">
-              <a:buNone/>
-            </a:pPr>
-            <a:r>
-              <a:rPr lang="en-US" sz="1100" b="1" spc="300" kern="0" dirty="0">
+            <a:pPr marL="0" indent="0">
+              <a:buNone/>
+            </a:pPr>
+            <a:r>
+              <a:rPr lang="en-US" sz="1100" b="1" kern="0" spc="300" dirty="0">
                 <a:solidFill>
                   <a:srgbClr val="0A66C2"/>
                 </a:solidFill>
@@ -9197,7 +9477,7 @@
           <a:bodyPr wrap="square" lIns="0" tIns="0" rIns="0" bIns="0" rtlCol="0" anchor="ctr"/>
           <a:lstStyle/>
           <a:p>
-            <a:pPr indent="0" marL="0">
+            <a:pPr marL="0" indent="0">
               <a:buNone/>
             </a:pPr>
             <a:r>
@@ -9236,7 +9516,7 @@
           <a:bodyPr wrap="square" lIns="0" tIns="0" rIns="0" bIns="0" rtlCol="0" anchor="ctr"/>
           <a:lstStyle/>
           <a:p>
-            <a:pPr indent="0" marL="0">
+            <a:pPr marL="0" indent="0">
               <a:buNone/>
             </a:pPr>
             <a:r>
@@ -9275,13 +9555,20 @@
           </a:solidFill>
           <a:ln/>
           <a:effectLst>
-            <a:outerShdw sx="100000" sy="100000" kx="0" ky="0" algn="bl" rotWithShape="0" blurRad="101600" dist="38100" dir="8100000">
+            <a:outerShdw blurRad="101600" dist="38100" dir="8100000" algn="bl" rotWithShape="0">
               <a:srgbClr val="000000">
                 <a:alpha val="30000"/>
               </a:srgbClr>
             </a:outerShdw>
           </a:effectLst>
         </p:spPr>
+        <p:txBody>
+          <a:bodyPr/>
+          <a:lstStyle/>
+          <a:p>
+            <a:endParaRPr lang="en-US"/>
+          </a:p>
+        </p:txBody>
       </p:sp>
       <p:sp>
         <p:nvSpPr>
@@ -9302,6 +9589,13 @@
           </a:solidFill>
           <a:ln/>
         </p:spPr>
+        <p:txBody>
+          <a:bodyPr/>
+          <a:lstStyle/>
+          <a:p>
+            <a:endParaRPr lang="en-US"/>
+          </a:p>
+        </p:txBody>
       </p:sp>
       <p:sp>
         <p:nvSpPr>
@@ -9324,7 +9618,7 @@
           <a:bodyPr wrap="square" lIns="0" tIns="0" rIns="0" bIns="0" rtlCol="0" anchor="ctr"/>
           <a:lstStyle/>
           <a:p>
-            <a:pPr indent="0" marL="0">
+            <a:pPr marL="0" indent="0">
               <a:buNone/>
             </a:pPr>
             <a:r>
@@ -9363,7 +9657,7 @@
           <a:bodyPr wrap="square" lIns="0" tIns="0" rIns="0" bIns="0" rtlCol="0" anchor="ctr"/>
           <a:lstStyle/>
           <a:p>
-            <a:pPr indent="0" marL="0">
+            <a:pPr marL="0" indent="0">
               <a:buNone/>
             </a:pPr>
             <a:r>
@@ -9402,13 +9696,20 @@
           </a:solidFill>
           <a:ln/>
           <a:effectLst>
-            <a:outerShdw sx="100000" sy="100000" kx="0" ky="0" algn="bl" rotWithShape="0" blurRad="101600" dist="38100" dir="8100000">
+            <a:outerShdw blurRad="101600" dist="38100" dir="8100000" algn="bl" rotWithShape="0">
               <a:srgbClr val="000000">
                 <a:alpha val="30000"/>
               </a:srgbClr>
             </a:outerShdw>
           </a:effectLst>
         </p:spPr>
+        <p:txBody>
+          <a:bodyPr/>
+          <a:lstStyle/>
+          <a:p>
+            <a:endParaRPr lang="en-US"/>
+          </a:p>
+        </p:txBody>
       </p:sp>
       <p:sp>
         <p:nvSpPr>
@@ -9429,6 +9730,13 @@
           </a:solidFill>
           <a:ln/>
         </p:spPr>
+        <p:txBody>
+          <a:bodyPr/>
+          <a:lstStyle/>
+          <a:p>
+            <a:endParaRPr lang="en-US"/>
+          </a:p>
+        </p:txBody>
       </p:sp>
       <p:sp>
         <p:nvSpPr>
@@ -9451,7 +9759,7 @@
           <a:bodyPr wrap="square" lIns="0" tIns="0" rIns="0" bIns="0" rtlCol="0" anchor="ctr"/>
           <a:lstStyle/>
           <a:p>
-            <a:pPr indent="0" marL="0">
+            <a:pPr marL="0" indent="0">
               <a:buNone/>
             </a:pPr>
             <a:r>
@@ -9490,7 +9798,7 @@
           <a:bodyPr wrap="square" lIns="0" tIns="0" rIns="0" bIns="0" rtlCol="0" anchor="ctr"/>
           <a:lstStyle/>
           <a:p>
-            <a:pPr indent="0" marL="0">
+            <a:pPr marL="0" indent="0">
               <a:buNone/>
             </a:pPr>
             <a:r>
@@ -9529,7 +9837,7 @@
           <a:bodyPr wrap="square" lIns="0" tIns="0" rIns="0" bIns="0" rtlCol="0" anchor="ctr"/>
           <a:lstStyle/>
           <a:p>
-            <a:pPr indent="0" marL="0">
+            <a:pPr marL="0" indent="0">
               <a:buNone/>
             </a:pPr>
             <a:r>
@@ -9568,13 +9876,20 @@
           </a:solidFill>
           <a:ln/>
           <a:effectLst>
-            <a:outerShdw sx="100000" sy="100000" kx="0" ky="0" algn="bl" rotWithShape="0" blurRad="101600" dist="38100" dir="8100000">
+            <a:outerShdw blurRad="101600" dist="38100" dir="8100000" algn="bl" rotWithShape="0">
               <a:srgbClr val="000000">
                 <a:alpha val="30000"/>
               </a:srgbClr>
             </a:outerShdw>
           </a:effectLst>
         </p:spPr>
+        <p:txBody>
+          <a:bodyPr/>
+          <a:lstStyle/>
+          <a:p>
+            <a:endParaRPr lang="en-US"/>
+          </a:p>
+        </p:txBody>
       </p:sp>
       <p:sp>
         <p:nvSpPr>
@@ -9595,6 +9910,13 @@
           </a:solidFill>
           <a:ln/>
         </p:spPr>
+        <p:txBody>
+          <a:bodyPr/>
+          <a:lstStyle/>
+          <a:p>
+            <a:endParaRPr lang="en-US"/>
+          </a:p>
+        </p:txBody>
       </p:sp>
       <p:sp>
         <p:nvSpPr>
@@ -9617,7 +9939,7 @@
           <a:bodyPr wrap="square" rtlCol="0" anchor="ctr"/>
           <a:lstStyle/>
           <a:p>
-            <a:pPr algn="ctr" indent="0" marL="0">
+            <a:pPr marL="0" indent="0" algn="ctr">
               <a:buNone/>
             </a:pPr>
             <a:r>
@@ -9653,7 +9975,7 @@
           <a:bodyPr wrap="square" lIns="0" tIns="0" rIns="0" bIns="0" rtlCol="0" anchor="ctr"/>
           <a:lstStyle/>
           <a:p>
-            <a:pPr indent="0" marL="0">
+            <a:pPr marL="0" indent="0">
               <a:buNone/>
             </a:pPr>
             <a:r>
@@ -9692,7 +10014,7 @@
           <a:bodyPr wrap="square" lIns="0" tIns="0" rIns="0" bIns="0" rtlCol="0" anchor="ctr"/>
           <a:lstStyle/>
           <a:p>
-            <a:pPr indent="0" marL="0">
+            <a:pPr marL="0" indent="0">
               <a:buNone/>
             </a:pPr>
             <a:r>
@@ -9731,13 +10053,20 @@
           </a:solidFill>
           <a:ln/>
           <a:effectLst>
-            <a:outerShdw sx="100000" sy="100000" kx="0" ky="0" algn="bl" rotWithShape="0" blurRad="101600" dist="38100" dir="8100000">
+            <a:outerShdw blurRad="101600" dist="38100" dir="8100000" algn="bl" rotWithShape="0">
               <a:srgbClr val="000000">
                 <a:alpha val="30000"/>
               </a:srgbClr>
             </a:outerShdw>
           </a:effectLst>
         </p:spPr>
+        <p:txBody>
+          <a:bodyPr/>
+          <a:lstStyle/>
+          <a:p>
+            <a:endParaRPr lang="en-US"/>
+          </a:p>
+        </p:txBody>
       </p:sp>
       <p:sp>
         <p:nvSpPr>
@@ -9758,6 +10087,13 @@
           </a:solidFill>
           <a:ln/>
         </p:spPr>
+        <p:txBody>
+          <a:bodyPr/>
+          <a:lstStyle/>
+          <a:p>
+            <a:endParaRPr lang="en-US"/>
+          </a:p>
+        </p:txBody>
       </p:sp>
       <p:sp>
         <p:nvSpPr>
@@ -9780,7 +10116,7 @@
           <a:bodyPr wrap="square" rtlCol="0" anchor="ctr"/>
           <a:lstStyle/>
           <a:p>
-            <a:pPr algn="ctr" indent="0" marL="0">
+            <a:pPr marL="0" indent="0" algn="ctr">
               <a:buNone/>
             </a:pPr>
             <a:r>
@@ -9816,7 +10152,7 @@
           <a:bodyPr wrap="square" lIns="0" tIns="0" rIns="0" bIns="0" rtlCol="0" anchor="ctr"/>
           <a:lstStyle/>
           <a:p>
-            <a:pPr indent="0" marL="0">
+            <a:pPr marL="0" indent="0">
               <a:buNone/>
             </a:pPr>
             <a:r>
@@ -9855,7 +10191,7 @@
           <a:bodyPr wrap="square" lIns="0" tIns="0" rIns="0" bIns="0" rtlCol="0" anchor="ctr"/>
           <a:lstStyle/>
           <a:p>
-            <a:pPr indent="0" marL="0">
+            <a:pPr marL="0" indent="0">
               <a:buNone/>
             </a:pPr>
             <a:r>
@@ -9894,13 +10230,20 @@
           </a:solidFill>
           <a:ln/>
           <a:effectLst>
-            <a:outerShdw sx="100000" sy="100000" kx="0" ky="0" algn="bl" rotWithShape="0" blurRad="101600" dist="38100" dir="8100000">
+            <a:outerShdw blurRad="101600" dist="38100" dir="8100000" algn="bl" rotWithShape="0">
               <a:srgbClr val="000000">
                 <a:alpha val="30000"/>
               </a:srgbClr>
             </a:outerShdw>
           </a:effectLst>
         </p:spPr>
+        <p:txBody>
+          <a:bodyPr/>
+          <a:lstStyle/>
+          <a:p>
+            <a:endParaRPr lang="en-US"/>
+          </a:p>
+        </p:txBody>
       </p:sp>
       <p:sp>
         <p:nvSpPr>
@@ -9921,6 +10264,13 @@
           </a:solidFill>
           <a:ln/>
         </p:spPr>
+        <p:txBody>
+          <a:bodyPr/>
+          <a:lstStyle/>
+          <a:p>
+            <a:endParaRPr lang="en-US"/>
+          </a:p>
+        </p:txBody>
       </p:sp>
       <p:sp>
         <p:nvSpPr>
@@ -9943,7 +10293,7 @@
           <a:bodyPr wrap="square" rtlCol="0" anchor="ctr"/>
           <a:lstStyle/>
           <a:p>
-            <a:pPr algn="ctr" indent="0" marL="0">
+            <a:pPr marL="0" indent="0" algn="ctr">
               <a:buNone/>
             </a:pPr>
             <a:r>
@@ -9979,7 +10329,7 @@
           <a:bodyPr wrap="square" lIns="0" tIns="0" rIns="0" bIns="0" rtlCol="0" anchor="ctr"/>
           <a:lstStyle/>
           <a:p>
-            <a:pPr indent="0" marL="0">
+            <a:pPr marL="0" indent="0">
               <a:buNone/>
             </a:pPr>
             <a:r>
@@ -10018,7 +10368,7 @@
           <a:bodyPr wrap="square" lIns="0" tIns="0" rIns="0" bIns="0" rtlCol="0" anchor="ctr"/>
           <a:lstStyle/>
           <a:p>
-            <a:pPr indent="0" marL="0">
+            <a:pPr marL="0" indent="0">
               <a:buNone/>
             </a:pPr>
             <a:r>
@@ -10057,7 +10407,7 @@
           <a:bodyPr wrap="square" lIns="0" tIns="0" rIns="0" bIns="0" rtlCol="0" anchor="ctr"/>
           <a:lstStyle/>
           <a:p>
-            <a:pPr indent="0" marL="0">
+            <a:pPr marL="0" indent="0">
               <a:buNone/>
             </a:pPr>
             <a:r>
@@ -10091,6 +10441,7 @@
         <a:solidFill>
           <a:srgbClr val="0D1117"/>
         </a:solidFill>
+        <a:effectLst/>
       </p:bgPr>
     </p:bg>
     <p:spTree>
@@ -10126,6 +10477,13 @@
           </a:solidFill>
           <a:ln/>
         </p:spPr>
+        <p:txBody>
+          <a:bodyPr/>
+          <a:lstStyle/>
+          <a:p>
+            <a:endParaRPr lang="en-US"/>
+          </a:p>
+        </p:txBody>
       </p:sp>
       <p:sp>
         <p:nvSpPr>
@@ -10148,11 +10506,11 @@
           <a:bodyPr wrap="square" lIns="0" tIns="0" rIns="0" bIns="0" rtlCol="0" anchor="ctr"/>
           <a:lstStyle/>
           <a:p>
-            <a:pPr indent="0" marL="0">
-              <a:buNone/>
-            </a:pPr>
-            <a:r>
-              <a:rPr lang="en-US" sz="1100" b="1" spc="300" kern="0" dirty="0">
+            <a:pPr marL="0" indent="0">
+              <a:buNone/>
+            </a:pPr>
+            <a:r>
+              <a:rPr lang="en-US" sz="1100" b="1" kern="0" spc="300" dirty="0">
                 <a:solidFill>
                   <a:srgbClr val="0A66C2"/>
                 </a:solidFill>
@@ -10187,7 +10545,7 @@
           <a:bodyPr wrap="square" lIns="0" tIns="0" rIns="0" bIns="0" rtlCol="0" anchor="ctr"/>
           <a:lstStyle/>
           <a:p>
-            <a:pPr indent="0" marL="0">
+            <a:pPr marL="0" indent="0">
               <a:buNone/>
             </a:pPr>
             <a:r>
@@ -10226,7 +10584,7 @@
           <a:bodyPr wrap="square" lIns="0" tIns="0" rIns="0" bIns="0" rtlCol="0" anchor="ctr"/>
           <a:lstStyle/>
           <a:p>
-            <a:pPr indent="0" marL="0">
+            <a:pPr marL="0" indent="0">
               <a:buNone/>
             </a:pPr>
             <a:r>
@@ -10265,13 +10623,20 @@
           </a:solidFill>
           <a:ln/>
           <a:effectLst>
-            <a:outerShdw sx="100000" sy="100000" kx="0" ky="0" algn="bl" rotWithShape="0" blurRad="101600" dist="38100" dir="8100000">
+            <a:outerShdw blurRad="101600" dist="38100" dir="8100000" algn="bl" rotWithShape="0">
               <a:srgbClr val="000000">
                 <a:alpha val="30000"/>
               </a:srgbClr>
             </a:outerShdw>
           </a:effectLst>
         </p:spPr>
+        <p:txBody>
+          <a:bodyPr/>
+          <a:lstStyle/>
+          <a:p>
+            <a:endParaRPr lang="en-US"/>
+          </a:p>
+        </p:txBody>
       </p:sp>
       <p:sp>
         <p:nvSpPr>
@@ -10292,6 +10657,13 @@
           </a:solidFill>
           <a:ln/>
         </p:spPr>
+        <p:txBody>
+          <a:bodyPr/>
+          <a:lstStyle/>
+          <a:p>
+            <a:endParaRPr lang="en-US"/>
+          </a:p>
+        </p:txBody>
       </p:sp>
       <p:sp>
         <p:nvSpPr>
@@ -10314,7 +10686,7 @@
           <a:bodyPr wrap="square" rtlCol="0" anchor="ctr"/>
           <a:lstStyle/>
           <a:p>
-            <a:pPr algn="ctr" indent="0" marL="0">
+            <a:pPr marL="0" indent="0" algn="ctr">
               <a:buNone/>
             </a:pPr>
             <a:r>
@@ -10353,7 +10725,7 @@
           <a:bodyPr wrap="square" lIns="0" tIns="0" rIns="0" bIns="0" rtlCol="0" anchor="ctr"/>
           <a:lstStyle/>
           <a:p>
-            <a:pPr indent="0" marL="0">
+            <a:pPr marL="0" indent="0">
               <a:buNone/>
             </a:pPr>
             <a:r>
@@ -10392,7 +10764,7 @@
           <a:bodyPr wrap="square" lIns="0" tIns="0" rIns="0" bIns="0" rtlCol="0" anchor="ctr"/>
           <a:lstStyle/>
           <a:p>
-            <a:pPr indent="0" marL="0">
+            <a:pPr marL="0" indent="0">
               <a:buNone/>
             </a:pPr>
             <a:r>
@@ -10431,13 +10803,20 @@
           </a:solidFill>
           <a:ln/>
           <a:effectLst>
-            <a:outerShdw sx="100000" sy="100000" kx="0" ky="0" algn="bl" rotWithShape="0" blurRad="101600" dist="38100" dir="8100000">
+            <a:outerShdw blurRad="101600" dist="38100" dir="8100000" algn="bl" rotWithShape="0">
               <a:srgbClr val="000000">
                 <a:alpha val="30000"/>
               </a:srgbClr>
             </a:outerShdw>
           </a:effectLst>
         </p:spPr>
+        <p:txBody>
+          <a:bodyPr/>
+          <a:lstStyle/>
+          <a:p>
+            <a:endParaRPr lang="en-US"/>
+          </a:p>
+        </p:txBody>
       </p:sp>
       <p:sp>
         <p:nvSpPr>
@@ -10458,6 +10837,13 @@
           </a:solidFill>
           <a:ln/>
         </p:spPr>
+        <p:txBody>
+          <a:bodyPr/>
+          <a:lstStyle/>
+          <a:p>
+            <a:endParaRPr lang="en-US"/>
+          </a:p>
+        </p:txBody>
       </p:sp>
       <p:sp>
         <p:nvSpPr>
@@ -10480,7 +10866,7 @@
           <a:bodyPr wrap="square" rtlCol="0" anchor="ctr"/>
           <a:lstStyle/>
           <a:p>
-            <a:pPr algn="ctr" indent="0" marL="0">
+            <a:pPr marL="0" indent="0" algn="ctr">
               <a:buNone/>
             </a:pPr>
             <a:r>
@@ -10519,7 +10905,7 @@
           <a:bodyPr wrap="square" lIns="0" tIns="0" rIns="0" bIns="0" rtlCol="0" anchor="ctr"/>
           <a:lstStyle/>
           <a:p>
-            <a:pPr indent="0" marL="0">
+            <a:pPr marL="0" indent="0">
               <a:buNone/>
             </a:pPr>
             <a:r>
@@ -10558,7 +10944,7 @@
           <a:bodyPr wrap="square" lIns="0" tIns="0" rIns="0" bIns="0" rtlCol="0" anchor="ctr"/>
           <a:lstStyle/>
           <a:p>
-            <a:pPr indent="0" marL="0">
+            <a:pPr marL="0" indent="0">
               <a:buNone/>
             </a:pPr>
             <a:r>
@@ -10597,13 +10983,20 @@
           </a:solidFill>
           <a:ln/>
           <a:effectLst>
-            <a:outerShdw sx="100000" sy="100000" kx="0" ky="0" algn="bl" rotWithShape="0" blurRad="101600" dist="38100" dir="8100000">
+            <a:outerShdw blurRad="101600" dist="38100" dir="8100000" algn="bl" rotWithShape="0">
               <a:srgbClr val="000000">
                 <a:alpha val="30000"/>
               </a:srgbClr>
             </a:outerShdw>
           </a:effectLst>
         </p:spPr>
+        <p:txBody>
+          <a:bodyPr/>
+          <a:lstStyle/>
+          <a:p>
+            <a:endParaRPr lang="en-US"/>
+          </a:p>
+        </p:txBody>
       </p:sp>
       <p:sp>
         <p:nvSpPr>
@@ -10624,6 +11017,13 @@
           </a:solidFill>
           <a:ln/>
         </p:spPr>
+        <p:txBody>
+          <a:bodyPr/>
+          <a:lstStyle/>
+          <a:p>
+            <a:endParaRPr lang="en-US"/>
+          </a:p>
+        </p:txBody>
       </p:sp>
       <p:sp>
         <p:nvSpPr>
@@ -10646,7 +11046,7 @@
           <a:bodyPr wrap="square" rtlCol="0" anchor="ctr"/>
           <a:lstStyle/>
           <a:p>
-            <a:pPr algn="ctr" indent="0" marL="0">
+            <a:pPr marL="0" indent="0" algn="ctr">
               <a:buNone/>
             </a:pPr>
             <a:r>
@@ -10685,7 +11085,7 @@
           <a:bodyPr wrap="square" lIns="0" tIns="0" rIns="0" bIns="0" rtlCol="0" anchor="ctr"/>
           <a:lstStyle/>
           <a:p>
-            <a:pPr indent="0" marL="0">
+            <a:pPr marL="0" indent="0">
               <a:buNone/>
             </a:pPr>
             <a:r>
@@ -10724,7 +11124,7 @@
           <a:bodyPr wrap="square" lIns="0" tIns="0" rIns="0" bIns="0" rtlCol="0" anchor="ctr"/>
           <a:lstStyle/>
           <a:p>
-            <a:pPr indent="0" marL="0">
+            <a:pPr marL="0" indent="0">
               <a:buNone/>
             </a:pPr>
             <a:r>
@@ -10763,7 +11163,7 @@
           <a:bodyPr wrap="square" lIns="0" tIns="0" rIns="0" bIns="0" rtlCol="0" anchor="ctr"/>
           <a:lstStyle/>
           <a:p>
-            <a:pPr indent="0" marL="0">
+            <a:pPr marL="0" indent="0">
               <a:buNone/>
             </a:pPr>
             <a:r>
@@ -10802,13 +11202,20 @@
           </a:solidFill>
           <a:ln/>
           <a:effectLst>
-            <a:outerShdw sx="100000" sy="100000" kx="0" ky="0" algn="bl" rotWithShape="0" blurRad="101600" dist="38100" dir="8100000">
+            <a:outerShdw blurRad="101600" dist="38100" dir="8100000" algn="bl" rotWithShape="0">
               <a:srgbClr val="000000">
                 <a:alpha val="30000"/>
               </a:srgbClr>
             </a:outerShdw>
           </a:effectLst>
         </p:spPr>
+        <p:txBody>
+          <a:bodyPr/>
+          <a:lstStyle/>
+          <a:p>
+            <a:endParaRPr lang="en-US"/>
+          </a:p>
+        </p:txBody>
       </p:sp>
       <p:sp>
         <p:nvSpPr>
@@ -10829,6 +11236,13 @@
           </a:solidFill>
           <a:ln/>
         </p:spPr>
+        <p:txBody>
+          <a:bodyPr/>
+          <a:lstStyle/>
+          <a:p>
+            <a:endParaRPr lang="en-US"/>
+          </a:p>
+        </p:txBody>
       </p:sp>
       <p:sp>
         <p:nvSpPr>
@@ -10851,7 +11265,7 @@
           <a:bodyPr wrap="square" rtlCol="0" anchor="ctr"/>
           <a:lstStyle/>
           <a:p>
-            <a:pPr algn="ctr" indent="0" marL="0">
+            <a:pPr marL="0" indent="0" algn="ctr">
               <a:buNone/>
             </a:pPr>
             <a:r>
@@ -10890,7 +11304,7 @@
           <a:bodyPr wrap="square" lIns="0" tIns="0" rIns="0" bIns="0" rtlCol="0" anchor="ctr"/>
           <a:lstStyle/>
           <a:p>
-            <a:pPr indent="0" marL="0">
+            <a:pPr marL="0" indent="0">
               <a:buNone/>
             </a:pPr>
             <a:r>
@@ -10929,7 +11343,7 @@
           <a:bodyPr wrap="square" lIns="0" tIns="0" rIns="0" bIns="0" rtlCol="0" anchor="ctr"/>
           <a:lstStyle/>
           <a:p>
-            <a:pPr indent="0" marL="0">
+            <a:pPr marL="0" indent="0">
               <a:buNone/>
             </a:pPr>
             <a:r>
@@ -10968,13 +11382,20 @@
           </a:solidFill>
           <a:ln/>
           <a:effectLst>
-            <a:outerShdw sx="100000" sy="100000" kx="0" ky="0" algn="bl" rotWithShape="0" blurRad="101600" dist="38100" dir="8100000">
+            <a:outerShdw blurRad="101600" dist="38100" dir="8100000" algn="bl" rotWithShape="0">
               <a:srgbClr val="000000">
                 <a:alpha val="30000"/>
               </a:srgbClr>
             </a:outerShdw>
           </a:effectLst>
         </p:spPr>
+        <p:txBody>
+          <a:bodyPr/>
+          <a:lstStyle/>
+          <a:p>
+            <a:endParaRPr lang="en-US"/>
+          </a:p>
+        </p:txBody>
       </p:sp>
       <p:sp>
         <p:nvSpPr>
@@ -10995,6 +11416,13 @@
           </a:solidFill>
           <a:ln/>
         </p:spPr>
+        <p:txBody>
+          <a:bodyPr/>
+          <a:lstStyle/>
+          <a:p>
+            <a:endParaRPr lang="en-US"/>
+          </a:p>
+        </p:txBody>
       </p:sp>
       <p:sp>
         <p:nvSpPr>
@@ -11017,7 +11445,7 @@
           <a:bodyPr wrap="square" rtlCol="0" anchor="ctr"/>
           <a:lstStyle/>
           <a:p>
-            <a:pPr algn="ctr" indent="0" marL="0">
+            <a:pPr marL="0" indent="0" algn="ctr">
               <a:buNone/>
             </a:pPr>
             <a:r>
@@ -11056,7 +11484,7 @@
           <a:bodyPr wrap="square" lIns="0" tIns="0" rIns="0" bIns="0" rtlCol="0" anchor="ctr"/>
           <a:lstStyle/>
           <a:p>
-            <a:pPr indent="0" marL="0">
+            <a:pPr marL="0" indent="0">
               <a:buNone/>
             </a:pPr>
             <a:r>
@@ -11095,7 +11523,7 @@
           <a:bodyPr wrap="square" lIns="0" tIns="0" rIns="0" bIns="0" rtlCol="0" anchor="ctr"/>
           <a:lstStyle/>
           <a:p>
-            <a:pPr indent="0" marL="0">
+            <a:pPr marL="0" indent="0">
               <a:buNone/>
             </a:pPr>
             <a:r>
@@ -11134,13 +11562,20 @@
           </a:solidFill>
           <a:ln/>
           <a:effectLst>
-            <a:outerShdw sx="100000" sy="100000" kx="0" ky="0" algn="bl" rotWithShape="0" blurRad="101600" dist="38100" dir="8100000">
+            <a:outerShdw blurRad="101600" dist="38100" dir="8100000" algn="bl" rotWithShape="0">
               <a:srgbClr val="000000">
                 <a:alpha val="30000"/>
               </a:srgbClr>
             </a:outerShdw>
           </a:effectLst>
         </p:spPr>
+        <p:txBody>
+          <a:bodyPr/>
+          <a:lstStyle/>
+          <a:p>
+            <a:endParaRPr lang="en-US"/>
+          </a:p>
+        </p:txBody>
       </p:sp>
       <p:sp>
         <p:nvSpPr>
@@ -11161,6 +11596,13 @@
           </a:solidFill>
           <a:ln/>
         </p:spPr>
+        <p:txBody>
+          <a:bodyPr/>
+          <a:lstStyle/>
+          <a:p>
+            <a:endParaRPr lang="en-US"/>
+          </a:p>
+        </p:txBody>
       </p:sp>
       <p:sp>
         <p:nvSpPr>
@@ -11183,7 +11625,7 @@
           <a:bodyPr wrap="square" rtlCol="0" anchor="ctr"/>
           <a:lstStyle/>
           <a:p>
-            <a:pPr algn="ctr" indent="0" marL="0">
+            <a:pPr marL="0" indent="0" algn="ctr">
               <a:buNone/>
             </a:pPr>
             <a:r>
@@ -11222,7 +11664,7 @@
           <a:bodyPr wrap="square" lIns="0" tIns="0" rIns="0" bIns="0" rtlCol="0" anchor="ctr"/>
           <a:lstStyle/>
           <a:p>
-            <a:pPr indent="0" marL="0">
+            <a:pPr marL="0" indent="0">
               <a:buNone/>
             </a:pPr>
             <a:r>
@@ -11261,7 +11703,7 @@
           <a:bodyPr wrap="square" lIns="0" tIns="0" rIns="0" bIns="0" rtlCol="0" anchor="ctr"/>
           <a:lstStyle/>
           <a:p>
-            <a:pPr indent="0" marL="0">
+            <a:pPr marL="0" indent="0">
               <a:buNone/>
             </a:pPr>
             <a:r>
@@ -11300,7 +11742,7 @@
           <a:bodyPr wrap="square" lIns="0" tIns="0" rIns="0" bIns="0" rtlCol="0" anchor="ctr"/>
           <a:lstStyle/>
           <a:p>
-            <a:pPr indent="0" marL="0">
+            <a:pPr marL="0" indent="0">
               <a:buNone/>
             </a:pPr>
             <a:r>
@@ -11334,6 +11776,7 @@
         <a:solidFill>
           <a:srgbClr val="0D1117"/>
         </a:solidFill>
+        <a:effectLst/>
       </p:bgPr>
     </p:bg>
     <p:spTree>
@@ -11369,6 +11812,13 @@
           </a:solidFill>
           <a:ln/>
         </p:spPr>
+        <p:txBody>
+          <a:bodyPr/>
+          <a:lstStyle/>
+          <a:p>
+            <a:endParaRPr lang="en-US"/>
+          </a:p>
+        </p:txBody>
       </p:sp>
       <p:sp>
         <p:nvSpPr>
@@ -11391,11 +11841,11 @@
           <a:bodyPr wrap="square" lIns="0" tIns="0" rIns="0" bIns="0" rtlCol="0" anchor="ctr"/>
           <a:lstStyle/>
           <a:p>
-            <a:pPr indent="0" marL="0">
-              <a:buNone/>
-            </a:pPr>
-            <a:r>
-              <a:rPr lang="en-US" sz="1100" b="1" spc="300" kern="0" dirty="0">
+            <a:pPr marL="0" indent="0">
+              <a:buNone/>
+            </a:pPr>
+            <a:r>
+              <a:rPr lang="en-US" sz="1100" b="1" kern="0" spc="300" dirty="0">
                 <a:solidFill>
                   <a:srgbClr val="0A66C2"/>
                 </a:solidFill>
@@ -11430,7 +11880,7 @@
           <a:bodyPr wrap="square" lIns="0" tIns="0" rIns="0" bIns="0" rtlCol="0" anchor="ctr"/>
           <a:lstStyle/>
           <a:p>
-            <a:pPr indent="0" marL="0">
+            <a:pPr marL="0" indent="0">
               <a:buNone/>
             </a:pPr>
             <a:r>
@@ -11469,13 +11919,20 @@
           </a:solidFill>
           <a:ln/>
           <a:effectLst>
-            <a:outerShdw sx="100000" sy="100000" kx="0" ky="0" algn="bl" rotWithShape="0" blurRad="101600" dist="38100" dir="8100000">
+            <a:outerShdw blurRad="101600" dist="38100" dir="8100000" algn="bl" rotWithShape="0">
               <a:srgbClr val="000000">
                 <a:alpha val="30000"/>
               </a:srgbClr>
             </a:outerShdw>
           </a:effectLst>
         </p:spPr>
+        <p:txBody>
+          <a:bodyPr/>
+          <a:lstStyle/>
+          <a:p>
+            <a:endParaRPr lang="en-US"/>
+          </a:p>
+        </p:txBody>
       </p:sp>
       <p:sp>
         <p:nvSpPr>
@@ -11496,6 +11953,13 @@
           </a:solidFill>
           <a:ln/>
         </p:spPr>
+        <p:txBody>
+          <a:bodyPr/>
+          <a:lstStyle/>
+          <a:p>
+            <a:endParaRPr lang="en-US"/>
+          </a:p>
+        </p:txBody>
       </p:sp>
       <p:sp>
         <p:nvSpPr>
@@ -11518,7 +11982,7 @@
           <a:bodyPr wrap="square" lIns="0" tIns="0" rIns="0" bIns="0" rtlCol="0" anchor="ctr"/>
           <a:lstStyle/>
           <a:p>
-            <a:pPr indent="0" marL="0">
+            <a:pPr marL="0" indent="0">
               <a:buNone/>
             </a:pPr>
             <a:r>
@@ -11555,6 +12019,13 @@
           </a:solidFill>
           <a:ln/>
         </p:spPr>
+        <p:txBody>
+          <a:bodyPr/>
+          <a:lstStyle/>
+          <a:p>
+            <a:endParaRPr lang="en-US"/>
+          </a:p>
+        </p:txBody>
       </p:sp>
       <p:sp>
         <p:nvSpPr>
@@ -11577,7 +12048,7 @@
           <a:bodyPr wrap="square" rtlCol="0" anchor="ctr"/>
           <a:lstStyle/>
           <a:p>
-            <a:pPr algn="ctr" indent="0" marL="0">
+            <a:pPr marL="0" indent="0" algn="ctr">
               <a:buNone/>
             </a:pPr>
             <a:r>
@@ -11616,7 +12087,7 @@
           <a:bodyPr wrap="square" lIns="0" tIns="0" rIns="0" bIns="0" rtlCol="0" anchor="ctr"/>
           <a:lstStyle/>
           <a:p>
-            <a:pPr indent="0" marL="0">
+            <a:pPr marL="0" indent="0">
               <a:buNone/>
             </a:pPr>
             <a:r>
@@ -11653,6 +12124,13 @@
           </a:solidFill>
           <a:ln/>
         </p:spPr>
+        <p:txBody>
+          <a:bodyPr/>
+          <a:lstStyle/>
+          <a:p>
+            <a:endParaRPr lang="en-US"/>
+          </a:p>
+        </p:txBody>
       </p:sp>
       <p:sp>
         <p:nvSpPr>
@@ -11675,7 +12153,7 @@
           <a:bodyPr wrap="square" rtlCol="0" anchor="ctr"/>
           <a:lstStyle/>
           <a:p>
-            <a:pPr algn="ctr" indent="0" marL="0">
+            <a:pPr marL="0" indent="0" algn="ctr">
               <a:buNone/>
             </a:pPr>
             <a:r>
@@ -11714,7 +12192,7 @@
           <a:bodyPr wrap="square" lIns="0" tIns="0" rIns="0" bIns="0" rtlCol="0" anchor="ctr"/>
           <a:lstStyle/>
           <a:p>
-            <a:pPr indent="0" marL="0">
+            <a:pPr marL="0" indent="0">
               <a:buNone/>
             </a:pPr>
             <a:r>
@@ -11751,6 +12229,13 @@
           </a:solidFill>
           <a:ln/>
         </p:spPr>
+        <p:txBody>
+          <a:bodyPr/>
+          <a:lstStyle/>
+          <a:p>
+            <a:endParaRPr lang="en-US"/>
+          </a:p>
+        </p:txBody>
       </p:sp>
       <p:sp>
         <p:nvSpPr>
@@ -11773,7 +12258,7 @@
           <a:bodyPr wrap="square" rtlCol="0" anchor="ctr"/>
           <a:lstStyle/>
           <a:p>
-            <a:pPr algn="ctr" indent="0" marL="0">
+            <a:pPr marL="0" indent="0" algn="ctr">
               <a:buNone/>
             </a:pPr>
             <a:r>
@@ -11812,7 +12297,7 @@
           <a:bodyPr wrap="square" lIns="0" tIns="0" rIns="0" bIns="0" rtlCol="0" anchor="ctr"/>
           <a:lstStyle/>
           <a:p>
-            <a:pPr indent="0" marL="0">
+            <a:pPr marL="0" indent="0">
               <a:buNone/>
             </a:pPr>
             <a:r>
@@ -11849,6 +12334,13 @@
           </a:solidFill>
           <a:ln/>
         </p:spPr>
+        <p:txBody>
+          <a:bodyPr/>
+          <a:lstStyle/>
+          <a:p>
+            <a:endParaRPr lang="en-US"/>
+          </a:p>
+        </p:txBody>
       </p:sp>
       <p:sp>
         <p:nvSpPr>
@@ -11871,7 +12363,7 @@
           <a:bodyPr wrap="square" rtlCol="0" anchor="ctr"/>
           <a:lstStyle/>
           <a:p>
-            <a:pPr algn="ctr" indent="0" marL="0">
+            <a:pPr marL="0" indent="0" algn="ctr">
               <a:buNone/>
             </a:pPr>
             <a:r>
@@ -11910,7 +12402,7 @@
           <a:bodyPr wrap="square" lIns="0" tIns="0" rIns="0" bIns="0" rtlCol="0" anchor="ctr"/>
           <a:lstStyle/>
           <a:p>
-            <a:pPr indent="0" marL="0">
+            <a:pPr marL="0" indent="0">
               <a:buNone/>
             </a:pPr>
             <a:r>
@@ -11947,6 +12439,13 @@
           </a:solidFill>
           <a:ln/>
         </p:spPr>
+        <p:txBody>
+          <a:bodyPr/>
+          <a:lstStyle/>
+          <a:p>
+            <a:endParaRPr lang="en-US"/>
+          </a:p>
+        </p:txBody>
       </p:sp>
       <p:sp>
         <p:nvSpPr>
@@ -11969,7 +12468,7 @@
           <a:bodyPr wrap="square" rtlCol="0" anchor="ctr"/>
           <a:lstStyle/>
           <a:p>
-            <a:pPr algn="ctr" indent="0" marL="0">
+            <a:pPr marL="0" indent="0" algn="ctr">
               <a:buNone/>
             </a:pPr>
             <a:r>
@@ -12008,7 +12507,7 @@
           <a:bodyPr wrap="square" lIns="0" tIns="0" rIns="0" bIns="0" rtlCol="0" anchor="ctr"/>
           <a:lstStyle/>
           <a:p>
-            <a:pPr indent="0" marL="0">
+            <a:pPr marL="0" indent="0">
               <a:buNone/>
             </a:pPr>
             <a:r>
@@ -12047,7 +12546,7 @@
           <a:bodyPr wrap="square" lIns="0" tIns="0" rIns="0" bIns="0" rtlCol="0" anchor="ctr"/>
           <a:lstStyle/>
           <a:p>
-            <a:pPr indent="0" marL="0">
+            <a:pPr marL="0" indent="0">
               <a:buNone/>
             </a:pPr>
             <a:r>
@@ -12086,13 +12585,20 @@
           </a:solidFill>
           <a:ln/>
           <a:effectLst>
-            <a:outerShdw sx="100000" sy="100000" kx="0" ky="0" algn="bl" rotWithShape="0" blurRad="101600" dist="38100" dir="8100000">
+            <a:outerShdw blurRad="101600" dist="38100" dir="8100000" algn="bl" rotWithShape="0">
               <a:srgbClr val="000000">
                 <a:alpha val="30000"/>
               </a:srgbClr>
             </a:outerShdw>
           </a:effectLst>
         </p:spPr>
+        <p:txBody>
+          <a:bodyPr/>
+          <a:lstStyle/>
+          <a:p>
+            <a:endParaRPr lang="en-US" dirty="0"/>
+          </a:p>
+        </p:txBody>
       </p:sp>
       <p:sp>
         <p:nvSpPr>
@@ -12113,6 +12619,13 @@
           </a:solidFill>
           <a:ln/>
         </p:spPr>
+        <p:txBody>
+          <a:bodyPr/>
+          <a:lstStyle/>
+          <a:p>
+            <a:endParaRPr lang="en-US"/>
+          </a:p>
+        </p:txBody>
       </p:sp>
       <p:sp>
         <p:nvSpPr>
@@ -12135,7 +12648,7 @@
           <a:bodyPr wrap="square" lIns="0" tIns="0" rIns="0" bIns="0" rtlCol="0" anchor="ctr"/>
           <a:lstStyle/>
           <a:p>
-            <a:pPr indent="0" marL="0">
+            <a:pPr marL="0" indent="0">
               <a:buNone/>
             </a:pPr>
             <a:r>
@@ -12174,20 +12687,9 @@
           <a:bodyPr wrap="square" lIns="0" tIns="0" rIns="0" bIns="0" rtlCol="0" anchor="ctr"/>
           <a:lstStyle/>
           <a:p>
-            <a:pPr indent="0" marL="0">
-              <a:buNone/>
-            </a:pPr>
-            <a:r>
-              <a:rPr lang="en-US" sz="1000" dirty="0">
-                <a:solidFill>
-                  <a:srgbClr val="8B949E"/>
-                </a:solidFill>
-                <a:latin typeface="Calibri" pitchFamily="34" charset="0"/>
-                <a:ea typeface="Calibri" pitchFamily="34" charset="-122"/>
-                <a:cs typeface="Calibri" pitchFamily="34" charset="-120"/>
-              </a:rPr>
-              <a:t>— MBA Student</a:t>
-            </a:r>
+            <a:pPr marL="0" indent="0">
+              <a:buNone/>
+            </a:pPr>
             <a:endParaRPr lang="en-US" sz="1000" dirty="0"/>
           </a:p>
         </p:txBody>
@@ -12213,13 +12715,20 @@
           </a:solidFill>
           <a:ln/>
           <a:effectLst>
-            <a:outerShdw sx="100000" sy="100000" kx="0" ky="0" algn="bl" rotWithShape="0" blurRad="101600" dist="38100" dir="8100000">
+            <a:outerShdw blurRad="101600" dist="38100" dir="8100000" algn="bl" rotWithShape="0">
               <a:srgbClr val="000000">
                 <a:alpha val="30000"/>
               </a:srgbClr>
             </a:outerShdw>
           </a:effectLst>
         </p:spPr>
+        <p:txBody>
+          <a:bodyPr/>
+          <a:lstStyle/>
+          <a:p>
+            <a:endParaRPr lang="en-US"/>
+          </a:p>
+        </p:txBody>
       </p:sp>
       <p:sp>
         <p:nvSpPr>
@@ -12240,6 +12749,13 @@
           </a:solidFill>
           <a:ln/>
         </p:spPr>
+        <p:txBody>
+          <a:bodyPr/>
+          <a:lstStyle/>
+          <a:p>
+            <a:endParaRPr lang="en-US"/>
+          </a:p>
+        </p:txBody>
       </p:sp>
       <p:sp>
         <p:nvSpPr>
@@ -12262,7 +12778,7 @@
           <a:bodyPr wrap="square" lIns="0" tIns="0" rIns="0" bIns="0" rtlCol="0" anchor="ctr"/>
           <a:lstStyle/>
           <a:p>
-            <a:pPr indent="0" marL="0">
+            <a:pPr marL="0" indent="0">
               <a:buNone/>
             </a:pPr>
             <a:r>
@@ -12274,7 +12790,7 @@
                 <a:ea typeface="Georgia" pitchFamily="34" charset="-122"/>
                 <a:cs typeface="Georgia" pitchFamily="34" charset="-120"/>
               </a:rPr>
-              <a:t>"I want to save time on the job search."</a:t>
+              <a:t>"I want to save time on watching learning videos”</a:t>
             </a:r>
             <a:endParaRPr lang="en-US" sz="1200" dirty="0"/>
           </a:p>
@@ -12301,20 +12817,9 @@
           <a:bodyPr wrap="square" lIns="0" tIns="0" rIns="0" bIns="0" rtlCol="0" anchor="ctr"/>
           <a:lstStyle/>
           <a:p>
-            <a:pPr indent="0" marL="0">
-              <a:buNone/>
-            </a:pPr>
-            <a:r>
-              <a:rPr lang="en-US" sz="1000" dirty="0">
-                <a:solidFill>
-                  <a:srgbClr val="8B949E"/>
-                </a:solidFill>
-                <a:latin typeface="Calibri" pitchFamily="34" charset="0"/>
-                <a:ea typeface="Calibri" pitchFamily="34" charset="-122"/>
-                <a:cs typeface="Calibri" pitchFamily="34" charset="-120"/>
-              </a:rPr>
-              <a:t>— Job Seeker</a:t>
-            </a:r>
+            <a:pPr marL="0" indent="0">
+              <a:buNone/>
+            </a:pPr>
             <a:endParaRPr lang="en-US" sz="1000" dirty="0"/>
           </a:p>
         </p:txBody>
@@ -12340,13 +12845,20 @@
           </a:solidFill>
           <a:ln/>
           <a:effectLst>
-            <a:outerShdw sx="100000" sy="100000" kx="0" ky="0" algn="bl" rotWithShape="0" blurRad="101600" dist="38100" dir="8100000">
+            <a:outerShdw blurRad="101600" dist="38100" dir="8100000" algn="bl" rotWithShape="0">
               <a:srgbClr val="000000">
                 <a:alpha val="30000"/>
               </a:srgbClr>
             </a:outerShdw>
           </a:effectLst>
         </p:spPr>
+        <p:txBody>
+          <a:bodyPr/>
+          <a:lstStyle/>
+          <a:p>
+            <a:endParaRPr lang="en-US"/>
+          </a:p>
+        </p:txBody>
       </p:sp>
       <p:sp>
         <p:nvSpPr>
@@ -12367,6 +12879,13 @@
           </a:solidFill>
           <a:ln/>
         </p:spPr>
+        <p:txBody>
+          <a:bodyPr/>
+          <a:lstStyle/>
+          <a:p>
+            <a:endParaRPr lang="en-US"/>
+          </a:p>
+        </p:txBody>
       </p:sp>
       <p:sp>
         <p:nvSpPr>
@@ -12389,7 +12908,7 @@
           <a:bodyPr wrap="square" lIns="0" tIns="0" rIns="0" bIns="0" rtlCol="0" anchor="ctr"/>
           <a:lstStyle/>
           <a:p>
-            <a:pPr indent="0" marL="0">
+            <a:pPr marL="0" indent="0">
               <a:buNone/>
             </a:pPr>
             <a:r>
@@ -12401,7 +12920,7 @@
                 <a:ea typeface="Georgia" pitchFamily="34" charset="-122"/>
                 <a:cs typeface="Georgia" pitchFamily="34" charset="-120"/>
               </a:rPr>
-              <a:t>"I wish LI had better acceptance rates on job matches."</a:t>
+              <a:t>"I wish LI Learning had more recognition."</a:t>
             </a:r>
             <a:endParaRPr lang="en-US" sz="1200" dirty="0"/>
           </a:p>
@@ -12428,20 +12947,9 @@
           <a:bodyPr wrap="square" lIns="0" tIns="0" rIns="0" bIns="0" rtlCol="0" anchor="ctr"/>
           <a:lstStyle/>
           <a:p>
-            <a:pPr indent="0" marL="0">
-              <a:buNone/>
-            </a:pPr>
-            <a:r>
-              <a:rPr lang="en-US" sz="1000" dirty="0">
-                <a:solidFill>
-                  <a:srgbClr val="8B949E"/>
-                </a:solidFill>
-                <a:latin typeface="Calibri" pitchFamily="34" charset="0"/>
-                <a:ea typeface="Calibri" pitchFamily="34" charset="-122"/>
-                <a:cs typeface="Calibri" pitchFamily="34" charset="-120"/>
-              </a:rPr>
-              <a:t>— Working Professional</a:t>
-            </a:r>
+            <a:pPr marL="0" indent="0">
+              <a:buNone/>
+            </a:pPr>
             <a:endParaRPr lang="en-US" sz="1000" dirty="0"/>
           </a:p>
         </p:txBody>
@@ -12467,7 +12975,7 @@
           <a:bodyPr wrap="square" lIns="0" tIns="0" rIns="0" bIns="0" rtlCol="0" anchor="ctr"/>
           <a:lstStyle/>
           <a:p>
-            <a:pPr indent="0" marL="0">
+            <a:pPr marL="0" indent="0">
               <a:buNone/>
             </a:pPr>
             <a:r>
@@ -12501,6 +13009,7 @@
         <a:solidFill>
           <a:srgbClr val="0D1117"/>
         </a:solidFill>
+        <a:effectLst/>
       </p:bgPr>
     </p:bg>
     <p:spTree>
@@ -12536,6 +13045,13 @@
           </a:solidFill>
           <a:ln/>
         </p:spPr>
+        <p:txBody>
+          <a:bodyPr/>
+          <a:lstStyle/>
+          <a:p>
+            <a:endParaRPr lang="en-US"/>
+          </a:p>
+        </p:txBody>
       </p:sp>
       <p:sp>
         <p:nvSpPr>
@@ -12558,11 +13074,11 @@
           <a:bodyPr wrap="square" lIns="0" tIns="0" rIns="0" bIns="0" rtlCol="0" anchor="ctr"/>
           <a:lstStyle/>
           <a:p>
-            <a:pPr indent="0" marL="0">
-              <a:buNone/>
-            </a:pPr>
-            <a:r>
-              <a:rPr lang="en-US" sz="1100" b="1" spc="300" kern="0" dirty="0">
+            <a:pPr marL="0" indent="0">
+              <a:buNone/>
+            </a:pPr>
+            <a:r>
+              <a:rPr lang="en-US" sz="1100" b="1" kern="0" spc="300" dirty="0">
                 <a:solidFill>
                   <a:srgbClr val="0A66C2"/>
                 </a:solidFill>
@@ -12597,7 +13113,7 @@
           <a:bodyPr wrap="square" lIns="0" tIns="0" rIns="0" bIns="0" rtlCol="0" anchor="ctr"/>
           <a:lstStyle/>
           <a:p>
-            <a:pPr indent="0" marL="0">
+            <a:pPr marL="0" indent="0">
               <a:buNone/>
             </a:pPr>
             <a:r>
@@ -12636,7 +13152,7 @@
           <a:bodyPr wrap="square" lIns="0" tIns="0" rIns="0" bIns="0" rtlCol="0" anchor="ctr"/>
           <a:lstStyle/>
           <a:p>
-            <a:pPr indent="0" marL="0">
+            <a:pPr marL="0" indent="0">
               <a:buNone/>
             </a:pPr>
             <a:r>
@@ -12675,7 +13191,7 @@
           <a:bodyPr wrap="square" lIns="0" tIns="0" rIns="0" bIns="0" rtlCol="0" anchor="ctr"/>
           <a:lstStyle/>
           <a:p>
-            <a:pPr algn="r" indent="0" marL="0">
+            <a:pPr marL="0" indent="0" algn="r">
               <a:buNone/>
             </a:pPr>
             <a:r>
@@ -12714,7 +13230,7 @@
           <a:bodyPr wrap="square" lIns="0" tIns="0" rIns="0" bIns="0" rtlCol="0" anchor="ctr"/>
           <a:lstStyle/>
           <a:p>
-            <a:pPr indent="0" marL="0">
+            <a:pPr marL="0" indent="0">
               <a:buNone/>
             </a:pPr>
             <a:r>
@@ -12753,7 +13269,7 @@
           <a:bodyPr wrap="square" lIns="0" tIns="0" rIns="0" bIns="0" rtlCol="0" anchor="ctr"/>
           <a:lstStyle/>
           <a:p>
-            <a:pPr indent="0" marL="0">
+            <a:pPr marL="0" indent="0">
               <a:buNone/>
             </a:pPr>
             <a:r>
@@ -12795,6 +13311,13 @@
             <a:prstDash val="solid"/>
           </a:ln>
         </p:spPr>
+        <p:txBody>
+          <a:bodyPr/>
+          <a:lstStyle/>
+          <a:p>
+            <a:endParaRPr lang="en-US"/>
+          </a:p>
+        </p:txBody>
       </p:sp>
       <p:sp>
         <p:nvSpPr>
@@ -12818,6 +13341,13 @@
             <a:prstDash val="dash"/>
           </a:ln>
         </p:spPr>
+        <p:txBody>
+          <a:bodyPr/>
+          <a:lstStyle/>
+          <a:p>
+            <a:endParaRPr lang="en-US"/>
+          </a:p>
+        </p:txBody>
       </p:sp>
       <p:sp>
         <p:nvSpPr>
@@ -12841,6 +13371,13 @@
             <a:prstDash val="dash"/>
           </a:ln>
         </p:spPr>
+        <p:txBody>
+          <a:bodyPr/>
+          <a:lstStyle/>
+          <a:p>
+            <a:endParaRPr lang="en-US"/>
+          </a:p>
+        </p:txBody>
       </p:sp>
       <p:sp>
         <p:nvSpPr>
@@ -12863,11 +13400,11 @@
           <a:bodyPr wrap="square" rtlCol="0" anchor="ctr"/>
           <a:lstStyle/>
           <a:p>
-            <a:pPr indent="0" marL="0">
-              <a:buNone/>
-            </a:pPr>
-            <a:r>
-              <a:rPr lang="en-US" sz="1000" b="1" spc="200" kern="0" dirty="0">
+            <a:pPr marL="0" indent="0">
+              <a:buNone/>
+            </a:pPr>
+            <a:r>
+              <a:rPr lang="en-US" sz="1000" b="1" kern="0" spc="200" dirty="0">
                 <a:solidFill>
                   <a:srgbClr val="2EA169"/>
                 </a:solidFill>
@@ -12902,11 +13439,11 @@
           <a:bodyPr wrap="square" rtlCol="0" anchor="ctr"/>
           <a:lstStyle/>
           <a:p>
-            <a:pPr indent="0" marL="0">
-              <a:buNone/>
-            </a:pPr>
-            <a:r>
-              <a:rPr lang="en-US" sz="1000" b="1" spc="200" kern="0" dirty="0">
+            <a:pPr marL="0" indent="0">
+              <a:buNone/>
+            </a:pPr>
+            <a:r>
+              <a:rPr lang="en-US" sz="1000" b="1" kern="0" spc="200" dirty="0">
                 <a:solidFill>
                   <a:srgbClr val="1B8FE8"/>
                 </a:solidFill>
@@ -12941,11 +13478,11 @@
           <a:bodyPr wrap="square" rtlCol="0" anchor="ctr"/>
           <a:lstStyle/>
           <a:p>
-            <a:pPr indent="0" marL="0">
-              <a:buNone/>
-            </a:pPr>
-            <a:r>
-              <a:rPr lang="en-US" sz="1000" b="1" spc="200" kern="0" dirty="0">
+            <a:pPr marL="0" indent="0">
+              <a:buNone/>
+            </a:pPr>
+            <a:r>
+              <a:rPr lang="en-US" sz="1000" b="1" kern="0" spc="200" dirty="0">
                 <a:solidFill>
                   <a:srgbClr val="8B949E"/>
                 </a:solidFill>
@@ -12980,11 +13517,11 @@
           <a:bodyPr wrap="square" rtlCol="0" anchor="ctr"/>
           <a:lstStyle/>
           <a:p>
-            <a:pPr indent="0" marL="0">
-              <a:buNone/>
-            </a:pPr>
-            <a:r>
-              <a:rPr lang="en-US" sz="1000" b="1" spc="200" kern="0" dirty="0">
+            <a:pPr marL="0" indent="0">
+              <a:buNone/>
+            </a:pPr>
+            <a:r>
+              <a:rPr lang="en-US" sz="1000" b="1" kern="0" spc="200" dirty="0">
                 <a:solidFill>
                   <a:srgbClr val="CC1016"/>
                 </a:solidFill>
@@ -13017,6 +13554,13 @@
           </a:solidFill>
           <a:ln/>
         </p:spPr>
+        <p:txBody>
+          <a:bodyPr/>
+          <a:lstStyle/>
+          <a:p>
+            <a:endParaRPr lang="en-US"/>
+          </a:p>
+        </p:txBody>
       </p:sp>
       <p:sp>
         <p:nvSpPr>
@@ -13039,7 +13583,7 @@
           <a:bodyPr wrap="square" lIns="0" tIns="0" rIns="0" bIns="0" rtlCol="0" anchor="ctr"/>
           <a:lstStyle/>
           <a:p>
-            <a:pPr indent="0" marL="0">
+            <a:pPr marL="0" indent="0">
               <a:buNone/>
             </a:pPr>
             <a:r>
@@ -13076,6 +13620,13 @@
           </a:solidFill>
           <a:ln/>
         </p:spPr>
+        <p:txBody>
+          <a:bodyPr/>
+          <a:lstStyle/>
+          <a:p>
+            <a:endParaRPr lang="en-US"/>
+          </a:p>
+        </p:txBody>
       </p:sp>
       <p:sp>
         <p:nvSpPr>
@@ -13098,7 +13649,7 @@
           <a:bodyPr wrap="square" lIns="0" tIns="0" rIns="0" bIns="0" rtlCol="0" anchor="ctr"/>
           <a:lstStyle/>
           <a:p>
-            <a:pPr indent="0" marL="0">
+            <a:pPr marL="0" indent="0">
               <a:buNone/>
             </a:pPr>
             <a:r>
@@ -13135,6 +13686,13 @@
           </a:solidFill>
           <a:ln/>
         </p:spPr>
+        <p:txBody>
+          <a:bodyPr/>
+          <a:lstStyle/>
+          <a:p>
+            <a:endParaRPr lang="en-US"/>
+          </a:p>
+        </p:txBody>
       </p:sp>
       <p:sp>
         <p:nvSpPr>
@@ -13157,7 +13715,7 @@
           <a:bodyPr wrap="square" lIns="0" tIns="0" rIns="0" bIns="0" rtlCol="0" anchor="ctr"/>
           <a:lstStyle/>
           <a:p>
-            <a:pPr indent="0" marL="0">
+            <a:pPr marL="0" indent="0">
               <a:buNone/>
             </a:pPr>
             <a:r>
@@ -13194,6 +13752,13 @@
           </a:solidFill>
           <a:ln/>
         </p:spPr>
+        <p:txBody>
+          <a:bodyPr/>
+          <a:lstStyle/>
+          <a:p>
+            <a:endParaRPr lang="en-US"/>
+          </a:p>
+        </p:txBody>
       </p:sp>
       <p:sp>
         <p:nvSpPr>
@@ -13216,7 +13781,7 @@
           <a:bodyPr wrap="square" lIns="0" tIns="0" rIns="0" bIns="0" rtlCol="0" anchor="ctr"/>
           <a:lstStyle/>
           <a:p>
-            <a:pPr indent="0" marL="0">
+            <a:pPr marL="0" indent="0">
               <a:buNone/>
             </a:pPr>
             <a:r>
@@ -13253,6 +13818,13 @@
           </a:solidFill>
           <a:ln/>
         </p:spPr>
+        <p:txBody>
+          <a:bodyPr/>
+          <a:lstStyle/>
+          <a:p>
+            <a:endParaRPr lang="en-US"/>
+          </a:p>
+        </p:txBody>
       </p:sp>
       <p:sp>
         <p:nvSpPr>
@@ -13275,7 +13847,7 @@
           <a:bodyPr wrap="square" lIns="0" tIns="0" rIns="0" bIns="0" rtlCol="0" anchor="ctr"/>
           <a:lstStyle/>
           <a:p>
-            <a:pPr indent="0" marL="0">
+            <a:pPr marL="0" indent="0">
               <a:buNone/>
             </a:pPr>
             <a:r>
@@ -13312,6 +13884,13 @@
           </a:solidFill>
           <a:ln/>
         </p:spPr>
+        <p:txBody>
+          <a:bodyPr/>
+          <a:lstStyle/>
+          <a:p>
+            <a:endParaRPr lang="en-US"/>
+          </a:p>
+        </p:txBody>
       </p:sp>
       <p:sp>
         <p:nvSpPr>
@@ -13334,7 +13913,7 @@
           <a:bodyPr wrap="square" lIns="0" tIns="0" rIns="0" bIns="0" rtlCol="0" anchor="ctr"/>
           <a:lstStyle/>
           <a:p>
-            <a:pPr indent="0" marL="0">
+            <a:pPr marL="0" indent="0">
               <a:buNone/>
             </a:pPr>
             <a:r>
@@ -13371,6 +13950,13 @@
           </a:solidFill>
           <a:ln/>
         </p:spPr>
+        <p:txBody>
+          <a:bodyPr/>
+          <a:lstStyle/>
+          <a:p>
+            <a:endParaRPr lang="en-US"/>
+          </a:p>
+        </p:txBody>
       </p:sp>
       <p:sp>
         <p:nvSpPr>
@@ -13393,7 +13979,7 @@
           <a:bodyPr wrap="square" lIns="0" tIns="0" rIns="0" bIns="0" rtlCol="0" anchor="ctr"/>
           <a:lstStyle/>
           <a:p>
-            <a:pPr indent="0" marL="0">
+            <a:pPr marL="0" indent="0">
               <a:buNone/>
             </a:pPr>
             <a:r>
@@ -13430,6 +14016,13 @@
           </a:solidFill>
           <a:ln/>
         </p:spPr>
+        <p:txBody>
+          <a:bodyPr/>
+          <a:lstStyle/>
+          <a:p>
+            <a:endParaRPr lang="en-US"/>
+          </a:p>
+        </p:txBody>
       </p:sp>
       <p:sp>
         <p:nvSpPr>
@@ -13452,7 +14045,7 @@
           <a:bodyPr wrap="square" lIns="0" tIns="0" rIns="0" bIns="0" rtlCol="0" anchor="ctr"/>
           <a:lstStyle/>
           <a:p>
-            <a:pPr indent="0" marL="0">
+            <a:pPr marL="0" indent="0">
               <a:buNone/>
             </a:pPr>
             <a:r>
@@ -13489,6 +14082,13 @@
           </a:solidFill>
           <a:ln/>
         </p:spPr>
+        <p:txBody>
+          <a:bodyPr/>
+          <a:lstStyle/>
+          <a:p>
+            <a:endParaRPr lang="en-US"/>
+          </a:p>
+        </p:txBody>
       </p:sp>
       <p:sp>
         <p:nvSpPr>
@@ -13511,7 +14111,7 @@
           <a:bodyPr wrap="square" lIns="0" tIns="0" rIns="0" bIns="0" rtlCol="0" anchor="ctr"/>
           <a:lstStyle/>
           <a:p>
-            <a:pPr indent="0" marL="0">
+            <a:pPr marL="0" indent="0">
               <a:buNone/>
             </a:pPr>
             <a:r>
@@ -13550,13 +14150,20 @@
           </a:solidFill>
           <a:ln/>
           <a:effectLst>
-            <a:outerShdw sx="100000" sy="100000" kx="0" ky="0" algn="bl" rotWithShape="0" blurRad="101600" dist="38100" dir="8100000">
+            <a:outerShdw blurRad="101600" dist="38100" dir="8100000" algn="bl" rotWithShape="0">
               <a:srgbClr val="000000">
                 <a:alpha val="30000"/>
               </a:srgbClr>
             </a:outerShdw>
           </a:effectLst>
         </p:spPr>
+        <p:txBody>
+          <a:bodyPr/>
+          <a:lstStyle/>
+          <a:p>
+            <a:endParaRPr lang="en-US"/>
+          </a:p>
+        </p:txBody>
       </p:sp>
       <p:sp>
         <p:nvSpPr>
@@ -13577,6 +14184,13 @@
           </a:solidFill>
           <a:ln/>
         </p:spPr>
+        <p:txBody>
+          <a:bodyPr/>
+          <a:lstStyle/>
+          <a:p>
+            <a:endParaRPr lang="en-US"/>
+          </a:p>
+        </p:txBody>
       </p:sp>
       <p:sp>
         <p:nvSpPr>
@@ -13599,7 +14213,7 @@
           <a:bodyPr wrap="square" lIns="0" tIns="0" rIns="0" bIns="0" rtlCol="0" anchor="ctr"/>
           <a:lstStyle/>
           <a:p>
-            <a:pPr indent="0" marL="0">
+            <a:pPr marL="0" indent="0">
               <a:buNone/>
             </a:pPr>
             <a:r>
@@ -13638,7 +14252,7 @@
           <a:bodyPr wrap="square" rtlCol="0" anchor="ctr"/>
           <a:lstStyle/>
           <a:p>
-            <a:pPr indent="0" marL="0">
+            <a:pPr marL="0" indent="0">
               <a:spcAft>
                 <a:spcPts val="400"/>
               </a:spcAft>
@@ -13658,7 +14272,7 @@
             <a:endParaRPr lang="en-US" sz="1100" dirty="0"/>
           </a:p>
           <a:p>
-            <a:pPr indent="0" marL="0">
+            <a:pPr marL="0" indent="0">
               <a:spcAft>
                 <a:spcPts val="800"/>
               </a:spcAft>
@@ -13678,7 +14292,7 @@
             <a:endParaRPr lang="en-US" sz="1100" dirty="0"/>
           </a:p>
           <a:p>
-            <a:pPr indent="0" marL="0">
+            <a:pPr marL="0" indent="0">
               <a:spcAft>
                 <a:spcPts val="400"/>
               </a:spcAft>
@@ -13698,7 +14312,7 @@
             <a:endParaRPr lang="en-US" sz="1100" dirty="0"/>
           </a:p>
           <a:p>
-            <a:pPr indent="0" marL="0">
+            <a:pPr marL="0" indent="0">
               <a:spcAft>
                 <a:spcPts val="800"/>
               </a:spcAft>
@@ -13718,7 +14332,7 @@
             <a:endParaRPr lang="en-US" sz="1100" dirty="0"/>
           </a:p>
           <a:p>
-            <a:pPr indent="0" marL="0">
+            <a:pPr marL="0" indent="0">
               <a:spcAft>
                 <a:spcPts val="400"/>
               </a:spcAft>
@@ -13738,7 +14352,7 @@
             <a:endParaRPr lang="en-US" sz="1100" dirty="0"/>
           </a:p>
           <a:p>
-            <a:pPr indent="0" marL="0">
+            <a:pPr marL="0" indent="0">
               <a:buNone/>
             </a:pPr>
             <a:r>
@@ -13777,7 +14391,7 @@
           <a:bodyPr wrap="square" lIns="0" tIns="0" rIns="0" bIns="0" rtlCol="0" anchor="ctr"/>
           <a:lstStyle/>
           <a:p>
-            <a:pPr indent="0" marL="0">
+            <a:pPr marL="0" indent="0">
               <a:buNone/>
             </a:pPr>
             <a:r>
@@ -13811,6 +14425,7 @@
         <a:solidFill>
           <a:srgbClr val="0D1117"/>
         </a:solidFill>
+        <a:effectLst/>
       </p:bgPr>
     </p:bg>
     <p:spTree>
@@ -13846,6 +14461,13 @@
           </a:solidFill>
           <a:ln/>
         </p:spPr>
+        <p:txBody>
+          <a:bodyPr/>
+          <a:lstStyle/>
+          <a:p>
+            <a:endParaRPr lang="en-US"/>
+          </a:p>
+        </p:txBody>
       </p:sp>
       <p:sp>
         <p:nvSpPr>
@@ -13868,11 +14490,11 @@
           <a:bodyPr wrap="square" lIns="0" tIns="0" rIns="0" bIns="0" rtlCol="0" anchor="ctr"/>
           <a:lstStyle/>
           <a:p>
-            <a:pPr indent="0" marL="0">
-              <a:buNone/>
-            </a:pPr>
-            <a:r>
-              <a:rPr lang="en-US" sz="1100" b="1" spc="300" kern="0" dirty="0">
+            <a:pPr marL="0" indent="0">
+              <a:buNone/>
+            </a:pPr>
+            <a:r>
+              <a:rPr lang="en-US" sz="1100" b="1" kern="0" spc="300" dirty="0">
                 <a:solidFill>
                   <a:srgbClr val="0A66C2"/>
                 </a:solidFill>
@@ -13907,7 +14529,7 @@
           <a:bodyPr wrap="square" lIns="0" tIns="0" rIns="0" bIns="0" rtlCol="0" anchor="ctr"/>
           <a:lstStyle/>
           <a:p>
-            <a:pPr indent="0" marL="0">
+            <a:pPr marL="0" indent="0">
               <a:buNone/>
             </a:pPr>
             <a:r>
@@ -13946,13 +14568,20 @@
           </a:solidFill>
           <a:ln/>
           <a:effectLst>
-            <a:outerShdw sx="100000" sy="100000" kx="0" ky="0" algn="bl" rotWithShape="0" blurRad="101600" dist="38100" dir="8100000">
+            <a:outerShdw blurRad="101600" dist="38100" dir="8100000" algn="bl" rotWithShape="0">
               <a:srgbClr val="000000">
                 <a:alpha val="30000"/>
               </a:srgbClr>
             </a:outerShdw>
           </a:effectLst>
         </p:spPr>
+        <p:txBody>
+          <a:bodyPr/>
+          <a:lstStyle/>
+          <a:p>
+            <a:endParaRPr lang="en-US"/>
+          </a:p>
+        </p:txBody>
       </p:sp>
       <p:sp>
         <p:nvSpPr>
@@ -13973,6 +14602,13 @@
           </a:solidFill>
           <a:ln/>
         </p:spPr>
+        <p:txBody>
+          <a:bodyPr/>
+          <a:lstStyle/>
+          <a:p>
+            <a:endParaRPr lang="en-US"/>
+          </a:p>
+        </p:txBody>
       </p:sp>
       <p:sp>
         <p:nvSpPr>
@@ -13993,6 +14629,13 @@
           </a:solidFill>
           <a:ln/>
         </p:spPr>
+        <p:txBody>
+          <a:bodyPr/>
+          <a:lstStyle/>
+          <a:p>
+            <a:endParaRPr lang="en-US"/>
+          </a:p>
+        </p:txBody>
       </p:sp>
       <p:sp>
         <p:nvSpPr>
@@ -14015,7 +14658,7 @@
           <a:bodyPr wrap="square" rtlCol="0" anchor="ctr"/>
           <a:lstStyle/>
           <a:p>
-            <a:pPr algn="ctr" indent="0" marL="0">
+            <a:pPr marL="0" indent="0" algn="ctr">
               <a:buNone/>
             </a:pPr>
             <a:r>
@@ -14054,7 +14697,7 @@
           <a:bodyPr wrap="square" lIns="0" tIns="0" rIns="0" bIns="0" rtlCol="0" anchor="ctr"/>
           <a:lstStyle/>
           <a:p>
-            <a:pPr indent="0" marL="0">
+            <a:pPr marL="0" indent="0">
               <a:buNone/>
             </a:pPr>
             <a:r>
@@ -14093,7 +14736,7 @@
           <a:bodyPr wrap="square" lIns="0" tIns="0" rIns="0" bIns="0" rtlCol="0" anchor="ctr"/>
           <a:lstStyle/>
           <a:p>
-            <a:pPr indent="0" marL="0">
+            <a:pPr marL="0" indent="0">
               <a:buNone/>
             </a:pPr>
             <a:r>
@@ -14132,7 +14775,7 @@
           <a:bodyPr wrap="square" rtlCol="0" anchor="ctr"/>
           <a:lstStyle/>
           <a:p>
-            <a:pPr algn="ctr" indent="0" marL="0">
+            <a:pPr marL="0" indent="0" algn="ctr">
               <a:buNone/>
             </a:pPr>
             <a:r>
@@ -14168,13 +14811,20 @@
           </a:solidFill>
           <a:ln/>
           <a:effectLst>
-            <a:outerShdw sx="100000" sy="100000" kx="0" ky="0" algn="bl" rotWithShape="0" blurRad="101600" dist="38100" dir="8100000">
+            <a:outerShdw blurRad="101600" dist="38100" dir="8100000" algn="bl" rotWithShape="0">
               <a:srgbClr val="000000">
                 <a:alpha val="30000"/>
               </a:srgbClr>
             </a:outerShdw>
           </a:effectLst>
         </p:spPr>
+        <p:txBody>
+          <a:bodyPr/>
+          <a:lstStyle/>
+          <a:p>
+            <a:endParaRPr lang="en-US"/>
+          </a:p>
+        </p:txBody>
       </p:sp>
       <p:sp>
         <p:nvSpPr>
@@ -14195,6 +14845,13 @@
           </a:solidFill>
           <a:ln/>
         </p:spPr>
+        <p:txBody>
+          <a:bodyPr/>
+          <a:lstStyle/>
+          <a:p>
+            <a:endParaRPr lang="en-US"/>
+          </a:p>
+        </p:txBody>
       </p:sp>
       <p:sp>
         <p:nvSpPr>
@@ -14215,6 +14872,13 @@
           </a:solidFill>
           <a:ln/>
         </p:spPr>
+        <p:txBody>
+          <a:bodyPr/>
+          <a:lstStyle/>
+          <a:p>
+            <a:endParaRPr lang="en-US"/>
+          </a:p>
+        </p:txBody>
       </p:sp>
       <p:sp>
         <p:nvSpPr>
@@ -14237,7 +14901,7 @@
           <a:bodyPr wrap="square" rtlCol="0" anchor="ctr"/>
           <a:lstStyle/>
           <a:p>
-            <a:pPr algn="ctr" indent="0" marL="0">
+            <a:pPr marL="0" indent="0" algn="ctr">
               <a:buNone/>
             </a:pPr>
             <a:r>
@@ -14276,7 +14940,7 @@
           <a:bodyPr wrap="square" lIns="0" tIns="0" rIns="0" bIns="0" rtlCol="0" anchor="ctr"/>
           <a:lstStyle/>
           <a:p>
-            <a:pPr indent="0" marL="0">
+            <a:pPr marL="0" indent="0">
               <a:buNone/>
             </a:pPr>
             <a:r>
@@ -14315,7 +14979,7 @@
           <a:bodyPr wrap="square" lIns="0" tIns="0" rIns="0" bIns="0" rtlCol="0" anchor="ctr"/>
           <a:lstStyle/>
           <a:p>
-            <a:pPr indent="0" marL="0">
+            <a:pPr marL="0" indent="0">
               <a:buNone/>
             </a:pPr>
             <a:r>
@@ -14354,7 +15018,7 @@
           <a:bodyPr wrap="square" rtlCol="0" anchor="ctr"/>
           <a:lstStyle/>
           <a:p>
-            <a:pPr algn="ctr" indent="0" marL="0">
+            <a:pPr marL="0" indent="0" algn="ctr">
               <a:buNone/>
             </a:pPr>
             <a:r>
@@ -14390,13 +15054,20 @@
           </a:solidFill>
           <a:ln/>
           <a:effectLst>
-            <a:outerShdw sx="100000" sy="100000" kx="0" ky="0" algn="bl" rotWithShape="0" blurRad="101600" dist="38100" dir="8100000">
+            <a:outerShdw blurRad="101600" dist="38100" dir="8100000" algn="bl" rotWithShape="0">
               <a:srgbClr val="000000">
                 <a:alpha val="30000"/>
               </a:srgbClr>
             </a:outerShdw>
           </a:effectLst>
         </p:spPr>
+        <p:txBody>
+          <a:bodyPr/>
+          <a:lstStyle/>
+          <a:p>
+            <a:endParaRPr lang="en-US"/>
+          </a:p>
+        </p:txBody>
       </p:sp>
       <p:sp>
         <p:nvSpPr>
@@ -14417,6 +15088,13 @@
           </a:solidFill>
           <a:ln/>
         </p:spPr>
+        <p:txBody>
+          <a:bodyPr/>
+          <a:lstStyle/>
+          <a:p>
+            <a:endParaRPr lang="en-US"/>
+          </a:p>
+        </p:txBody>
       </p:sp>
       <p:sp>
         <p:nvSpPr>
@@ -14437,6 +15115,13 @@
           </a:solidFill>
           <a:ln/>
         </p:spPr>
+        <p:txBody>
+          <a:bodyPr/>
+          <a:lstStyle/>
+          <a:p>
+            <a:endParaRPr lang="en-US"/>
+          </a:p>
+        </p:txBody>
       </p:sp>
       <p:sp>
         <p:nvSpPr>
@@ -14459,7 +15144,7 @@
           <a:bodyPr wrap="square" rtlCol="0" anchor="ctr"/>
           <a:lstStyle/>
           <a:p>
-            <a:pPr algn="ctr" indent="0" marL="0">
+            <a:pPr marL="0" indent="0" algn="ctr">
               <a:buNone/>
             </a:pPr>
             <a:r>
@@ -14498,7 +15183,7 @@
           <a:bodyPr wrap="square" lIns="0" tIns="0" rIns="0" bIns="0" rtlCol="0" anchor="ctr"/>
           <a:lstStyle/>
           <a:p>
-            <a:pPr indent="0" marL="0">
+            <a:pPr marL="0" indent="0">
               <a:buNone/>
             </a:pPr>
             <a:r>
@@ -14537,7 +15222,7 @@
           <a:bodyPr wrap="square" lIns="0" tIns="0" rIns="0" bIns="0" rtlCol="0" anchor="ctr"/>
           <a:lstStyle/>
           <a:p>
-            <a:pPr indent="0" marL="0">
+            <a:pPr marL="0" indent="0">
               <a:buNone/>
             </a:pPr>
             <a:r>
@@ -14576,7 +15261,7 @@
           <a:bodyPr wrap="square" rtlCol="0" anchor="ctr"/>
           <a:lstStyle/>
           <a:p>
-            <a:pPr algn="ctr" indent="0" marL="0">
+            <a:pPr marL="0" indent="0" algn="ctr">
               <a:buNone/>
             </a:pPr>
             <a:r>
@@ -14612,13 +15297,20 @@
           </a:solidFill>
           <a:ln/>
           <a:effectLst>
-            <a:outerShdw sx="100000" sy="100000" kx="0" ky="0" algn="bl" rotWithShape="0" blurRad="101600" dist="38100" dir="8100000">
+            <a:outerShdw blurRad="101600" dist="38100" dir="8100000" algn="bl" rotWithShape="0">
               <a:srgbClr val="000000">
                 <a:alpha val="30000"/>
               </a:srgbClr>
             </a:outerShdw>
           </a:effectLst>
         </p:spPr>
+        <p:txBody>
+          <a:bodyPr/>
+          <a:lstStyle/>
+          <a:p>
+            <a:endParaRPr lang="en-US"/>
+          </a:p>
+        </p:txBody>
       </p:sp>
       <p:sp>
         <p:nvSpPr>
@@ -14639,6 +15331,13 @@
           </a:solidFill>
           <a:ln/>
         </p:spPr>
+        <p:txBody>
+          <a:bodyPr/>
+          <a:lstStyle/>
+          <a:p>
+            <a:endParaRPr lang="en-US"/>
+          </a:p>
+        </p:txBody>
       </p:sp>
       <p:sp>
         <p:nvSpPr>
@@ -14659,6 +15358,13 @@
           </a:solidFill>
           <a:ln/>
         </p:spPr>
+        <p:txBody>
+          <a:bodyPr/>
+          <a:lstStyle/>
+          <a:p>
+            <a:endParaRPr lang="en-US"/>
+          </a:p>
+        </p:txBody>
       </p:sp>
       <p:sp>
         <p:nvSpPr>
@@ -14681,7 +15387,7 @@
           <a:bodyPr wrap="square" rtlCol="0" anchor="ctr"/>
           <a:lstStyle/>
           <a:p>
-            <a:pPr algn="ctr" indent="0" marL="0">
+            <a:pPr marL="0" indent="0" algn="ctr">
               <a:buNone/>
             </a:pPr>
             <a:r>
@@ -14720,7 +15426,7 @@
           <a:bodyPr wrap="square" lIns="0" tIns="0" rIns="0" bIns="0" rtlCol="0" anchor="ctr"/>
           <a:lstStyle/>
           <a:p>
-            <a:pPr indent="0" marL="0">
+            <a:pPr marL="0" indent="0">
               <a:buNone/>
             </a:pPr>
             <a:r>
@@ -14759,7 +15465,7 @@
           <a:bodyPr wrap="square" lIns="0" tIns="0" rIns="0" bIns="0" rtlCol="0" anchor="ctr"/>
           <a:lstStyle/>
           <a:p>
-            <a:pPr indent="0" marL="0">
+            <a:pPr marL="0" indent="0">
               <a:buNone/>
             </a:pPr>
             <a:r>
@@ -14798,13 +15504,20 @@
           </a:solidFill>
           <a:ln/>
           <a:effectLst>
-            <a:outerShdw sx="100000" sy="100000" kx="0" ky="0" algn="bl" rotWithShape="0" blurRad="101600" dist="38100" dir="8100000">
+            <a:outerShdw blurRad="101600" dist="38100" dir="8100000" algn="bl" rotWithShape="0">
               <a:srgbClr val="000000">
                 <a:alpha val="30000"/>
               </a:srgbClr>
             </a:outerShdw>
           </a:effectLst>
         </p:spPr>
+        <p:txBody>
+          <a:bodyPr/>
+          <a:lstStyle/>
+          <a:p>
+            <a:endParaRPr lang="en-US"/>
+          </a:p>
+        </p:txBody>
       </p:sp>
       <p:sp>
         <p:nvSpPr>
@@ -14825,6 +15538,13 @@
           </a:solidFill>
           <a:ln/>
         </p:spPr>
+        <p:txBody>
+          <a:bodyPr/>
+          <a:lstStyle/>
+          <a:p>
+            <a:endParaRPr lang="en-US"/>
+          </a:p>
+        </p:txBody>
       </p:sp>
       <p:sp>
         <p:nvSpPr>
@@ -14845,6 +15565,13 @@
           </a:solidFill>
           <a:ln/>
         </p:spPr>
+        <p:txBody>
+          <a:bodyPr/>
+          <a:lstStyle/>
+          <a:p>
+            <a:endParaRPr lang="en-US"/>
+          </a:p>
+        </p:txBody>
       </p:sp>
       <p:sp>
         <p:nvSpPr>
@@ -14867,7 +15594,7 @@
           <a:bodyPr wrap="square" rtlCol="0" anchor="ctr"/>
           <a:lstStyle/>
           <a:p>
-            <a:pPr algn="ctr" indent="0" marL="0">
+            <a:pPr marL="0" indent="0" algn="ctr">
               <a:buNone/>
             </a:pPr>
             <a:r>
@@ -14906,7 +15633,7 @@
           <a:bodyPr wrap="square" lIns="0" tIns="0" rIns="0" bIns="0" rtlCol="0" anchor="ctr"/>
           <a:lstStyle/>
           <a:p>
-            <a:pPr indent="0" marL="0">
+            <a:pPr marL="0" indent="0">
               <a:buNone/>
             </a:pPr>
             <a:r>
@@ -14945,7 +15672,7 @@
           <a:bodyPr wrap="square" lIns="0" tIns="0" rIns="0" bIns="0" rtlCol="0" anchor="ctr"/>
           <a:lstStyle/>
           <a:p>
-            <a:pPr indent="0" marL="0">
+            <a:pPr marL="0" indent="0">
               <a:buNone/>
             </a:pPr>
             <a:r>
@@ -14984,7 +15711,7 @@
           <a:bodyPr wrap="square" rtlCol="0" anchor="ctr"/>
           <a:lstStyle/>
           <a:p>
-            <a:pPr algn="ctr" indent="0" marL="0">
+            <a:pPr marL="0" indent="0" algn="ctr">
               <a:buNone/>
             </a:pPr>
             <a:r>
@@ -15020,13 +15747,20 @@
           </a:solidFill>
           <a:ln/>
           <a:effectLst>
-            <a:outerShdw sx="100000" sy="100000" kx="0" ky="0" algn="bl" rotWithShape="0" blurRad="101600" dist="38100" dir="8100000">
+            <a:outerShdw blurRad="101600" dist="38100" dir="8100000" algn="bl" rotWithShape="0">
               <a:srgbClr val="000000">
                 <a:alpha val="30000"/>
               </a:srgbClr>
             </a:outerShdw>
           </a:effectLst>
         </p:spPr>
+        <p:txBody>
+          <a:bodyPr/>
+          <a:lstStyle/>
+          <a:p>
+            <a:endParaRPr lang="en-US"/>
+          </a:p>
+        </p:txBody>
       </p:sp>
       <p:sp>
         <p:nvSpPr>
@@ -15047,6 +15781,13 @@
           </a:solidFill>
           <a:ln/>
         </p:spPr>
+        <p:txBody>
+          <a:bodyPr/>
+          <a:lstStyle/>
+          <a:p>
+            <a:endParaRPr lang="en-US"/>
+          </a:p>
+        </p:txBody>
       </p:sp>
       <p:sp>
         <p:nvSpPr>
@@ -15067,6 +15808,13 @@
           </a:solidFill>
           <a:ln/>
         </p:spPr>
+        <p:txBody>
+          <a:bodyPr/>
+          <a:lstStyle/>
+          <a:p>
+            <a:endParaRPr lang="en-US"/>
+          </a:p>
+        </p:txBody>
       </p:sp>
       <p:sp>
         <p:nvSpPr>
@@ -15089,7 +15837,7 @@
           <a:bodyPr wrap="square" rtlCol="0" anchor="ctr"/>
           <a:lstStyle/>
           <a:p>
-            <a:pPr algn="ctr" indent="0" marL="0">
+            <a:pPr marL="0" indent="0" algn="ctr">
               <a:buNone/>
             </a:pPr>
             <a:r>
@@ -15128,7 +15876,7 @@
           <a:bodyPr wrap="square" lIns="0" tIns="0" rIns="0" bIns="0" rtlCol="0" anchor="ctr"/>
           <a:lstStyle/>
           <a:p>
-            <a:pPr indent="0" marL="0">
+            <a:pPr marL="0" indent="0">
               <a:buNone/>
             </a:pPr>
             <a:r>
@@ -15167,7 +15915,7 @@
           <a:bodyPr wrap="square" lIns="0" tIns="0" rIns="0" bIns="0" rtlCol="0" anchor="ctr"/>
           <a:lstStyle/>
           <a:p>
-            <a:pPr indent="0" marL="0">
+            <a:pPr marL="0" indent="0">
               <a:buNone/>
             </a:pPr>
             <a:r>
@@ -15206,7 +15954,7 @@
           <a:bodyPr wrap="square" rtlCol="0" anchor="ctr"/>
           <a:lstStyle/>
           <a:p>
-            <a:pPr algn="ctr" indent="0" marL="0">
+            <a:pPr marL="0" indent="0" algn="ctr">
               <a:buNone/>
             </a:pPr>
             <a:r>
@@ -15242,13 +15990,20 @@
           </a:solidFill>
           <a:ln/>
           <a:effectLst>
-            <a:outerShdw sx="100000" sy="100000" kx="0" ky="0" algn="bl" rotWithShape="0" blurRad="101600" dist="38100" dir="8100000">
+            <a:outerShdw blurRad="101600" dist="38100" dir="8100000" algn="bl" rotWithShape="0">
               <a:srgbClr val="000000">
                 <a:alpha val="30000"/>
               </a:srgbClr>
             </a:outerShdw>
           </a:effectLst>
         </p:spPr>
+        <p:txBody>
+          <a:bodyPr/>
+          <a:lstStyle/>
+          <a:p>
+            <a:endParaRPr lang="en-US"/>
+          </a:p>
+        </p:txBody>
       </p:sp>
       <p:sp>
         <p:nvSpPr>
@@ -15269,6 +16024,13 @@
           </a:solidFill>
           <a:ln/>
         </p:spPr>
+        <p:txBody>
+          <a:bodyPr/>
+          <a:lstStyle/>
+          <a:p>
+            <a:endParaRPr lang="en-US"/>
+          </a:p>
+        </p:txBody>
       </p:sp>
       <p:sp>
         <p:nvSpPr>
@@ -15289,6 +16051,13 @@
           </a:solidFill>
           <a:ln/>
         </p:spPr>
+        <p:txBody>
+          <a:bodyPr/>
+          <a:lstStyle/>
+          <a:p>
+            <a:endParaRPr lang="en-US"/>
+          </a:p>
+        </p:txBody>
       </p:sp>
       <p:sp>
         <p:nvSpPr>
@@ -15311,7 +16080,7 @@
           <a:bodyPr wrap="square" rtlCol="0" anchor="ctr"/>
           <a:lstStyle/>
           <a:p>
-            <a:pPr algn="ctr" indent="0" marL="0">
+            <a:pPr marL="0" indent="0" algn="ctr">
               <a:buNone/>
             </a:pPr>
             <a:r>
@@ -15350,7 +16119,7 @@
           <a:bodyPr wrap="square" lIns="0" tIns="0" rIns="0" bIns="0" rtlCol="0" anchor="ctr"/>
           <a:lstStyle/>
           <a:p>
-            <a:pPr indent="0" marL="0">
+            <a:pPr marL="0" indent="0">
               <a:buNone/>
             </a:pPr>
             <a:r>
@@ -15389,7 +16158,7 @@
           <a:bodyPr wrap="square" lIns="0" tIns="0" rIns="0" bIns="0" rtlCol="0" anchor="ctr"/>
           <a:lstStyle/>
           <a:p>
-            <a:pPr indent="0" marL="0">
+            <a:pPr marL="0" indent="0">
               <a:buNone/>
             </a:pPr>
             <a:r>
@@ -15428,7 +16197,7 @@
           <a:bodyPr wrap="square" rtlCol="0" anchor="ctr"/>
           <a:lstStyle/>
           <a:p>
-            <a:pPr algn="ctr" indent="0" marL="0">
+            <a:pPr marL="0" indent="0" algn="ctr">
               <a:buNone/>
             </a:pPr>
             <a:r>
@@ -15464,13 +16233,20 @@
           </a:solidFill>
           <a:ln/>
           <a:effectLst>
-            <a:outerShdw sx="100000" sy="100000" kx="0" ky="0" algn="bl" rotWithShape="0" blurRad="101600" dist="38100" dir="8100000">
+            <a:outerShdw blurRad="101600" dist="38100" dir="8100000" algn="bl" rotWithShape="0">
               <a:srgbClr val="000000">
                 <a:alpha val="30000"/>
               </a:srgbClr>
             </a:outerShdw>
           </a:effectLst>
         </p:spPr>
+        <p:txBody>
+          <a:bodyPr/>
+          <a:lstStyle/>
+          <a:p>
+            <a:endParaRPr lang="en-US"/>
+          </a:p>
+        </p:txBody>
       </p:sp>
       <p:sp>
         <p:nvSpPr>
@@ -15491,6 +16267,13 @@
           </a:solidFill>
           <a:ln/>
         </p:spPr>
+        <p:txBody>
+          <a:bodyPr/>
+          <a:lstStyle/>
+          <a:p>
+            <a:endParaRPr lang="en-US"/>
+          </a:p>
+        </p:txBody>
       </p:sp>
       <p:sp>
         <p:nvSpPr>
@@ -15511,6 +16294,13 @@
           </a:solidFill>
           <a:ln/>
         </p:spPr>
+        <p:txBody>
+          <a:bodyPr/>
+          <a:lstStyle/>
+          <a:p>
+            <a:endParaRPr lang="en-US"/>
+          </a:p>
+        </p:txBody>
       </p:sp>
       <p:sp>
         <p:nvSpPr>
@@ -15533,7 +16323,7 @@
           <a:bodyPr wrap="square" rtlCol="0" anchor="ctr"/>
           <a:lstStyle/>
           <a:p>
-            <a:pPr algn="ctr" indent="0" marL="0">
+            <a:pPr marL="0" indent="0" algn="ctr">
               <a:buNone/>
             </a:pPr>
             <a:r>
@@ -15572,7 +16362,7 @@
           <a:bodyPr wrap="square" lIns="0" tIns="0" rIns="0" bIns="0" rtlCol="0" anchor="ctr"/>
           <a:lstStyle/>
           <a:p>
-            <a:pPr indent="0" marL="0">
+            <a:pPr marL="0" indent="0">
               <a:buNone/>
             </a:pPr>
             <a:r>
@@ -15611,7 +16401,7 @@
           <a:bodyPr wrap="square" lIns="0" tIns="0" rIns="0" bIns="0" rtlCol="0" anchor="ctr"/>
           <a:lstStyle/>
           <a:p>
-            <a:pPr indent="0" marL="0">
+            <a:pPr marL="0" indent="0">
               <a:buNone/>
             </a:pPr>
             <a:r>
@@ -15650,7 +16440,7 @@
           <a:bodyPr wrap="square" rtlCol="0" anchor="ctr"/>
           <a:lstStyle/>
           <a:p>
-            <a:pPr algn="ctr" indent="0" marL="0">
+            <a:pPr marL="0" indent="0" algn="ctr">
               <a:buNone/>
             </a:pPr>
             <a:r>
@@ -15686,6 +16476,13 @@
           </a:solidFill>
           <a:ln/>
         </p:spPr>
+        <p:txBody>
+          <a:bodyPr/>
+          <a:lstStyle/>
+          <a:p>
+            <a:endParaRPr lang="en-US"/>
+          </a:p>
+        </p:txBody>
       </p:sp>
       <p:sp>
         <p:nvSpPr>
@@ -15708,7 +16505,7 @@
           <a:bodyPr wrap="square" rtlCol="0" anchor="ctr"/>
           <a:lstStyle/>
           <a:p>
-            <a:pPr algn="ctr" indent="0" marL="0">
+            <a:pPr marL="0" indent="0" algn="ctr">
               <a:buNone/>
             </a:pPr>
             <a:r>
@@ -15747,7 +16544,7 @@
           <a:bodyPr wrap="square" lIns="0" tIns="0" rIns="0" bIns="0" rtlCol="0" anchor="ctr"/>
           <a:lstStyle/>
           <a:p>
-            <a:pPr indent="0" marL="0">
+            <a:pPr marL="0" indent="0">
               <a:buNone/>
             </a:pPr>
             <a:r>
@@ -16066,4 +16863,319 @@
     </a:ext>
   </a:extLst>
 </a:theme>
+</file>
+
+<file path=ppt/theme/theme2.xml><?xml version="1.0" encoding="utf-8"?>
+<a:theme xmlns:a="http://schemas.openxmlformats.org/drawingml/2006/main" name="Office Theme">
+  <a:themeElements>
+    <a:clrScheme name="Office">
+      <a:dk1>
+        <a:sysClr val="windowText" lastClr="000000"/>
+      </a:dk1>
+      <a:lt1>
+        <a:sysClr val="window" lastClr="FFFFFF"/>
+      </a:lt1>
+      <a:dk2>
+        <a:srgbClr val="0E2841"/>
+      </a:dk2>
+      <a:lt2>
+        <a:srgbClr val="E8E8E8"/>
+      </a:lt2>
+      <a:accent1>
+        <a:srgbClr val="156082"/>
+      </a:accent1>
+      <a:accent2>
+        <a:srgbClr val="E97132"/>
+      </a:accent2>
+      <a:accent3>
+        <a:srgbClr val="196B24"/>
+      </a:accent3>
+      <a:accent4>
+        <a:srgbClr val="0F9ED5"/>
+      </a:accent4>
+      <a:accent5>
+        <a:srgbClr val="A02B93"/>
+      </a:accent5>
+      <a:accent6>
+        <a:srgbClr val="4EA72E"/>
+      </a:accent6>
+      <a:hlink>
+        <a:srgbClr val="467886"/>
+      </a:hlink>
+      <a:folHlink>
+        <a:srgbClr val="96607D"/>
+      </a:folHlink>
+    </a:clrScheme>
+    <a:fontScheme name="Office">
+      <a:majorFont>
+        <a:latin typeface="Aptos Display" panose="02110004020202020204"/>
+        <a:ea typeface=""/>
+        <a:cs typeface=""/>
+        <a:font script="Jpan" typeface="游ゴシック Light"/>
+        <a:font script="Hang" typeface="맑은 고딕"/>
+        <a:font script="Hans" typeface="等线 Light"/>
+        <a:font script="Hant" typeface="新細明體"/>
+        <a:font script="Arab" typeface="Times New Roman"/>
+        <a:font script="Hebr" typeface="Times New Roman"/>
+        <a:font script="Thai" typeface="Angsana New"/>
+        <a:font script="Ethi" typeface="Nyala"/>
+        <a:font script="Beng" typeface="Vrinda"/>
+        <a:font script="Gujr" typeface="Shruti"/>
+        <a:font script="Khmr" typeface="MoolBoran"/>
+        <a:font script="Knda" typeface="Tunga"/>
+        <a:font script="Guru" typeface="Raavi"/>
+        <a:font script="Cans" typeface="Euphemia"/>
+        <a:font script="Cher" typeface="Plantagenet Cherokee"/>
+        <a:font script="Yiii" typeface="Microsoft Yi Baiti"/>
+        <a:font script="Tibt" typeface="Microsoft Himalaya"/>
+        <a:font script="Thaa" typeface="MV Boli"/>
+        <a:font script="Deva" typeface="Mangal"/>
+        <a:font script="Telu" typeface="Gautami"/>
+        <a:font script="Taml" typeface="Latha"/>
+        <a:font script="Syrc" typeface="Estrangelo Edessa"/>
+        <a:font script="Orya" typeface="Kalinga"/>
+        <a:font script="Mlym" typeface="Kartika"/>
+        <a:font script="Laoo" typeface="DokChampa"/>
+        <a:font script="Sinh" typeface="Iskoola Pota"/>
+        <a:font script="Mong" typeface="Mongolian Baiti"/>
+        <a:font script="Viet" typeface="Times New Roman"/>
+        <a:font script="Uigh" typeface="Microsoft Uighur"/>
+        <a:font script="Geor" typeface="Sylfaen"/>
+        <a:font script="Armn" typeface="Arial"/>
+        <a:font script="Bugi" typeface="Leelawadee UI"/>
+        <a:font script="Bopo" typeface="Microsoft JhengHei"/>
+        <a:font script="Java" typeface="Javanese Text"/>
+        <a:font script="Lisu" typeface="Segoe UI"/>
+        <a:font script="Mymr" typeface="Myanmar Text"/>
+        <a:font script="Nkoo" typeface="Ebrima"/>
+        <a:font script="Olck" typeface="Nirmala UI"/>
+        <a:font script="Osma" typeface="Ebrima"/>
+        <a:font script="Phag" typeface="Phagspa"/>
+        <a:font script="Syrn" typeface="Estrangelo Edessa"/>
+        <a:font script="Syrj" typeface="Estrangelo Edessa"/>
+        <a:font script="Syre" typeface="Estrangelo Edessa"/>
+        <a:font script="Sora" typeface="Nirmala UI"/>
+        <a:font script="Tale" typeface="Microsoft Tai Le"/>
+        <a:font script="Talu" typeface="Microsoft New Tai Lue"/>
+        <a:font script="Tfng" typeface="Ebrima"/>
+      </a:majorFont>
+      <a:minorFont>
+        <a:latin typeface="Aptos" panose="02110004020202020204"/>
+        <a:ea typeface=""/>
+        <a:cs typeface=""/>
+        <a:font script="Jpan" typeface="游ゴシック"/>
+        <a:font script="Hang" typeface="맑은 고딕"/>
+        <a:font script="Hans" typeface="等线"/>
+        <a:font script="Hant" typeface="新細明體"/>
+        <a:font script="Arab" typeface="Arial"/>
+        <a:font script="Hebr" typeface="Arial"/>
+        <a:font script="Thai" typeface="Cordia New"/>
+        <a:font script="Ethi" typeface="Nyala"/>
+        <a:font script="Beng" typeface="Vrinda"/>
+        <a:font script="Gujr" typeface="Shruti"/>
+        <a:font script="Khmr" typeface="DaunPenh"/>
+        <a:font script="Knda" typeface="Tunga"/>
+        <a:font script="Guru" typeface="Raavi"/>
+        <a:font script="Cans" typeface="Euphemia"/>
+        <a:font script="Cher" typeface="Plantagenet Cherokee"/>
+        <a:font script="Yiii" typeface="Microsoft Yi Baiti"/>
+        <a:font script="Tibt" typeface="Microsoft Himalaya"/>
+        <a:font script="Thaa" typeface="MV Boli"/>
+        <a:font script="Deva" typeface="Mangal"/>
+        <a:font script="Telu" typeface="Gautami"/>
+        <a:font script="Taml" typeface="Latha"/>
+        <a:font script="Syrc" typeface="Estrangelo Edessa"/>
+        <a:font script="Orya" typeface="Kalinga"/>
+        <a:font script="Mlym" typeface="Kartika"/>
+        <a:font script="Laoo" typeface="DokChampa"/>
+        <a:font script="Sinh" typeface="Iskoola Pota"/>
+        <a:font script="Mong" typeface="Mongolian Baiti"/>
+        <a:font script="Viet" typeface="Arial"/>
+        <a:font script="Uigh" typeface="Microsoft Uighur"/>
+        <a:font script="Geor" typeface="Sylfaen"/>
+        <a:font script="Armn" typeface="Arial"/>
+        <a:font script="Bugi" typeface="Leelawadee UI"/>
+        <a:font script="Bopo" typeface="Microsoft JhengHei"/>
+        <a:font script="Java" typeface="Javanese Text"/>
+        <a:font script="Lisu" typeface="Segoe UI"/>
+        <a:font script="Mymr" typeface="Myanmar Text"/>
+        <a:font script="Nkoo" typeface="Ebrima"/>
+        <a:font script="Olck" typeface="Nirmala UI"/>
+        <a:font script="Osma" typeface="Ebrima"/>
+        <a:font script="Phag" typeface="Phagspa"/>
+        <a:font script="Syrn" typeface="Estrangelo Edessa"/>
+        <a:font script="Syrj" typeface="Estrangelo Edessa"/>
+        <a:font script="Syre" typeface="Estrangelo Edessa"/>
+        <a:font script="Sora" typeface="Nirmala UI"/>
+        <a:font script="Tale" typeface="Microsoft Tai Le"/>
+        <a:font script="Talu" typeface="Microsoft New Tai Lue"/>
+        <a:font script="Tfng" typeface="Ebrima"/>
+      </a:minorFont>
+    </a:fontScheme>
+    <a:fmtScheme name="Office">
+      <a:fillStyleLst>
+        <a:solidFill>
+          <a:schemeClr val="phClr"/>
+        </a:solidFill>
+        <a:gradFill rotWithShape="1">
+          <a:gsLst>
+            <a:gs pos="0">
+              <a:schemeClr val="phClr">
+                <a:lumMod val="110000"/>
+                <a:satMod val="105000"/>
+                <a:tint val="67000"/>
+              </a:schemeClr>
+            </a:gs>
+            <a:gs pos="50000">
+              <a:schemeClr val="phClr">
+                <a:lumMod val="105000"/>
+                <a:satMod val="103000"/>
+                <a:tint val="73000"/>
+              </a:schemeClr>
+            </a:gs>
+            <a:gs pos="100000">
+              <a:schemeClr val="phClr">
+                <a:lumMod val="105000"/>
+                <a:satMod val="109000"/>
+                <a:tint val="81000"/>
+              </a:schemeClr>
+            </a:gs>
+          </a:gsLst>
+          <a:lin ang="5400000" scaled="0"/>
+        </a:gradFill>
+        <a:gradFill rotWithShape="1">
+          <a:gsLst>
+            <a:gs pos="0">
+              <a:schemeClr val="phClr">
+                <a:satMod val="103000"/>
+                <a:lumMod val="102000"/>
+                <a:tint val="94000"/>
+              </a:schemeClr>
+            </a:gs>
+            <a:gs pos="50000">
+              <a:schemeClr val="phClr">
+                <a:satMod val="110000"/>
+                <a:lumMod val="100000"/>
+                <a:shade val="100000"/>
+              </a:schemeClr>
+            </a:gs>
+            <a:gs pos="100000">
+              <a:schemeClr val="phClr">
+                <a:lumMod val="99000"/>
+                <a:satMod val="120000"/>
+                <a:shade val="78000"/>
+              </a:schemeClr>
+            </a:gs>
+          </a:gsLst>
+          <a:lin ang="5400000" scaled="0"/>
+        </a:gradFill>
+      </a:fillStyleLst>
+      <a:lnStyleLst>
+        <a:ln w="12700" cap="flat" cmpd="sng" algn="ctr">
+          <a:solidFill>
+            <a:schemeClr val="phClr"/>
+          </a:solidFill>
+          <a:prstDash val="solid"/>
+          <a:miter lim="800000"/>
+        </a:ln>
+        <a:ln w="19050" cap="flat" cmpd="sng" algn="ctr">
+          <a:solidFill>
+            <a:schemeClr val="phClr"/>
+          </a:solidFill>
+          <a:prstDash val="solid"/>
+          <a:miter lim="800000"/>
+        </a:ln>
+        <a:ln w="25400" cap="flat" cmpd="sng" algn="ctr">
+          <a:solidFill>
+            <a:schemeClr val="phClr"/>
+          </a:solidFill>
+          <a:prstDash val="solid"/>
+          <a:miter lim="800000"/>
+        </a:ln>
+      </a:lnStyleLst>
+      <a:effectStyleLst>
+        <a:effectStyle>
+          <a:effectLst/>
+        </a:effectStyle>
+        <a:effectStyle>
+          <a:effectLst/>
+        </a:effectStyle>
+        <a:effectStyle>
+          <a:effectLst>
+            <a:outerShdw blurRad="57150" dist="19050" dir="5400000" algn="ctr" rotWithShape="0">
+              <a:srgbClr val="000000">
+                <a:alpha val="63000"/>
+              </a:srgbClr>
+            </a:outerShdw>
+          </a:effectLst>
+        </a:effectStyle>
+      </a:effectStyleLst>
+      <a:bgFillStyleLst>
+        <a:solidFill>
+          <a:schemeClr val="phClr"/>
+        </a:solidFill>
+        <a:solidFill>
+          <a:schemeClr val="phClr">
+            <a:tint val="95000"/>
+            <a:satMod val="170000"/>
+          </a:schemeClr>
+        </a:solidFill>
+        <a:gradFill rotWithShape="1">
+          <a:gsLst>
+            <a:gs pos="0">
+              <a:schemeClr val="phClr">
+                <a:tint val="93000"/>
+                <a:satMod val="150000"/>
+                <a:shade val="98000"/>
+                <a:lumMod val="102000"/>
+              </a:schemeClr>
+            </a:gs>
+            <a:gs pos="50000">
+              <a:schemeClr val="phClr">
+                <a:tint val="98000"/>
+                <a:satMod val="130000"/>
+                <a:shade val="90000"/>
+                <a:lumMod val="103000"/>
+              </a:schemeClr>
+            </a:gs>
+            <a:gs pos="100000">
+              <a:schemeClr val="phClr">
+                <a:shade val="63000"/>
+                <a:satMod val="120000"/>
+              </a:schemeClr>
+            </a:gs>
+          </a:gsLst>
+          <a:lin ang="5400000" scaled="0"/>
+        </a:gradFill>
+      </a:bgFillStyleLst>
+    </a:fmtScheme>
+  </a:themeElements>
+  <a:objectDefaults>
+    <a:lnDef>
+      <a:spPr/>
+      <a:bodyPr/>
+      <a:lstStyle/>
+      <a:style>
+        <a:lnRef idx="2">
+          <a:schemeClr val="accent1"/>
+        </a:lnRef>
+        <a:fillRef idx="0">
+          <a:schemeClr val="accent1"/>
+        </a:fillRef>
+        <a:effectRef idx="1">
+          <a:schemeClr val="accent1"/>
+        </a:effectRef>
+        <a:fontRef idx="minor">
+          <a:schemeClr val="tx1"/>
+        </a:fontRef>
+      </a:style>
+    </a:lnDef>
+  </a:objectDefaults>
+  <a:extraClrSchemeLst/>
+  <a:extLst>
+    <a:ext uri="{05A4C25C-085E-4340-85A3-A5531E510DB2}">
+      <thm15:themeFamily xmlns:thm15="http://schemas.microsoft.com/office/thememl/2012/main" name="Office Theme" id="{2E142A2C-CD16-42D6-873A-C26D2A0506FA}" vid="{1BDDFF52-6CD6-40A5-AB3C-68EB2F1E4D0A}"/>
+    </a:ext>
+  </a:extLst>
+</a:theme>
 </file>